--- a/Готовое/Шаблон 01.01.pptx
+++ b/Готовое/Шаблон 01.01.pptx
@@ -4,6 +4,12 @@
   <p:sldMasterIdLst>
     <p:sldMasterId id="2147483648" r:id="rId1"/>
   </p:sldMasterIdLst>
+  <p:notesMasterIdLst>
+    <p:notesMasterId r:id="rId20"/>
+  </p:notesMasterIdLst>
+  <p:handoutMasterIdLst>
+    <p:handoutMasterId r:id="rId21"/>
+  </p:handoutMasterIdLst>
   <p:sldIdLst>
     <p:sldId id="256" r:id="rId3"/>
     <p:sldId id="257" r:id="rId4"/>
@@ -14,12 +20,14 @@
     <p:sldId id="262" r:id="rId9"/>
     <p:sldId id="263" r:id="rId10"/>
     <p:sldId id="264" r:id="rId11"/>
-    <p:sldId id="265" r:id="rId12"/>
-    <p:sldId id="266" r:id="rId13"/>
-    <p:sldId id="267" r:id="rId14"/>
-    <p:sldId id="268" r:id="rId15"/>
-    <p:sldId id="270" r:id="rId16"/>
-    <p:sldId id="269" r:id="rId17"/>
+    <p:sldId id="272" r:id="rId12"/>
+    <p:sldId id="265" r:id="rId13"/>
+    <p:sldId id="271" r:id="rId14"/>
+    <p:sldId id="266" r:id="rId15"/>
+    <p:sldId id="267" r:id="rId16"/>
+    <p:sldId id="268" r:id="rId17"/>
+    <p:sldId id="270" r:id="rId18"/>
+    <p:sldId id="269" r:id="rId19"/>
   </p:sldIdLst>
   <p:sldSz cx="12192000" cy="6858000"/>
   <p:notesSz cx="6858000" cy="9144000"/>
@@ -119,6 +127,511 @@
     </a:lvl9pPr>
   </p:defaultTextStyle>
 </p:presentation>
+</file>
+
+<file path=ppt/handoutMasters/handoutMaster1.xml><?xml version="1.0" encoding="utf-8"?>
+<p:handoutMaster xmlns:a="http://schemas.openxmlformats.org/drawingml/2006/main" xmlns:r="http://schemas.openxmlformats.org/officeDocument/2006/relationships" xmlns:p="http://schemas.openxmlformats.org/presentationml/2006/main">
+  <p:cSld>
+    <p:bg>
+      <p:bgRef idx="1001">
+        <a:schemeClr val="bg1"/>
+      </p:bgRef>
+    </p:bg>
+    <p:spTree>
+      <p:nvGrpSpPr>
+        <p:cNvPr id="1" name=""/>
+        <p:cNvGrpSpPr/>
+        <p:nvPr/>
+      </p:nvGrpSpPr>
+      <p:grpSpPr>
+        <a:xfrm>
+          <a:off x="0" y="0"/>
+          <a:ext cx="0" cy="0"/>
+          <a:chOff x="0" y="0"/>
+          <a:chExt cx="0" cy="0"/>
+        </a:xfrm>
+      </p:grpSpPr>
+      <p:sp>
+        <p:nvSpPr>
+          <p:cNvPr id="2" name="Верхний колонтитул 1"/>
+          <p:cNvSpPr>
+            <a:spLocks noGrp="1"/>
+          </p:cNvSpPr>
+          <p:nvPr>
+            <p:ph type="hdr" sz="quarter"/>
+          </p:nvPr>
+        </p:nvSpPr>
+        <p:spPr>
+          <a:xfrm>
+            <a:off x="0" y="0"/>
+            <a:ext cx="2971800" cy="458788"/>
+          </a:xfrm>
+          <a:prstGeom prst="rect">
+            <a:avLst/>
+          </a:prstGeom>
+        </p:spPr>
+        <p:txBody>
+          <a:bodyPr vert="horz" lIns="91440" tIns="45720" rIns="91440" bIns="45720" rtlCol="0"/>
+          <a:lstStyle>
+            <a:lvl1pPr algn="l">
+              <a:defRPr sz="1200"/>
+            </a:lvl1pPr>
+          </a:lstStyle>
+          <a:p>
+            <a:endParaRPr lang="ru-RU"/>
+          </a:p>
+        </p:txBody>
+      </p:sp>
+      <p:sp>
+        <p:nvSpPr>
+          <p:cNvPr id="3" name="Дата 2"/>
+          <p:cNvSpPr>
+            <a:spLocks noGrp="1"/>
+          </p:cNvSpPr>
+          <p:nvPr>
+            <p:ph type="dt" sz="quarter" idx="1"/>
+          </p:nvPr>
+        </p:nvSpPr>
+        <p:spPr>
+          <a:xfrm>
+            <a:off x="3884613" y="0"/>
+            <a:ext cx="2971800" cy="458788"/>
+          </a:xfrm>
+          <a:prstGeom prst="rect">
+            <a:avLst/>
+          </a:prstGeom>
+        </p:spPr>
+        <p:txBody>
+          <a:bodyPr vert="horz" lIns="91440" tIns="45720" rIns="91440" bIns="45720" rtlCol="0"/>
+          <a:lstStyle>
+            <a:lvl1pPr algn="r">
+              <a:defRPr sz="1200"/>
+            </a:lvl1pPr>
+          </a:lstStyle>
+          <a:p>
+            <a:fld id="{96285ADB-1465-4FCF-8D1B-E067E37D3CEE}" type="datetimeFigureOut">
+              <a:rPr lang="ru-RU" smtClean="0"/>
+            </a:fld>
+            <a:endParaRPr lang="ru-RU"/>
+          </a:p>
+        </p:txBody>
+      </p:sp>
+      <p:sp>
+        <p:nvSpPr>
+          <p:cNvPr id="4" name="Нижний колонтитул 3"/>
+          <p:cNvSpPr>
+            <a:spLocks noGrp="1"/>
+          </p:cNvSpPr>
+          <p:nvPr>
+            <p:ph type="ftr" sz="quarter" idx="2"/>
+          </p:nvPr>
+        </p:nvSpPr>
+        <p:spPr>
+          <a:xfrm>
+            <a:off x="0" y="8685213"/>
+            <a:ext cx="2971800" cy="458787"/>
+          </a:xfrm>
+          <a:prstGeom prst="rect">
+            <a:avLst/>
+          </a:prstGeom>
+        </p:spPr>
+        <p:txBody>
+          <a:bodyPr vert="horz" lIns="91440" tIns="45720" rIns="91440" bIns="45720" rtlCol="0" anchor="b"/>
+          <a:lstStyle>
+            <a:lvl1pPr algn="l">
+              <a:defRPr sz="1200"/>
+            </a:lvl1pPr>
+          </a:lstStyle>
+          <a:p>
+            <a:endParaRPr lang="ru-RU"/>
+          </a:p>
+        </p:txBody>
+      </p:sp>
+      <p:sp>
+        <p:nvSpPr>
+          <p:cNvPr id="5" name="Номер слайда 4"/>
+          <p:cNvSpPr>
+            <a:spLocks noGrp="1"/>
+          </p:cNvSpPr>
+          <p:nvPr>
+            <p:ph type="sldNum" sz="quarter" idx="3"/>
+          </p:nvPr>
+        </p:nvSpPr>
+        <p:spPr>
+          <a:xfrm>
+            <a:off x="3884613" y="8685213"/>
+            <a:ext cx="2971800" cy="458787"/>
+          </a:xfrm>
+          <a:prstGeom prst="rect">
+            <a:avLst/>
+          </a:prstGeom>
+        </p:spPr>
+        <p:txBody>
+          <a:bodyPr vert="horz" lIns="91440" tIns="45720" rIns="91440" bIns="45720" rtlCol="0" anchor="b"/>
+          <a:lstStyle>
+            <a:lvl1pPr algn="r">
+              <a:defRPr sz="1200"/>
+            </a:lvl1pPr>
+          </a:lstStyle>
+          <a:p>
+            <a:fld id="{F7A9B2AF-2D09-4280-84D1-4F6D53786F2B}" type="slidenum">
+              <a:rPr lang="ru-RU" smtClean="0"/>
+            </a:fld>
+            <a:endParaRPr lang="ru-RU"/>
+          </a:p>
+        </p:txBody>
+      </p:sp>
+    </p:spTree>
+  </p:cSld>
+  <p:clrMap bg1="lt1" tx1="dk1" bg2="lt2" tx2="dk2" accent1="accent1" accent2="accent2" accent3="accent3" accent4="accent4" accent5="accent5" accent6="accent6" hlink="hlink" folHlink="folHlink"/>
+</p:handoutMaster>
+</file>
+
+<file path=ppt/notesMasters/notesMaster1.xml><?xml version="1.0" encoding="utf-8"?>
+<p:notesMaster xmlns:a="http://schemas.openxmlformats.org/drawingml/2006/main" xmlns:r="http://schemas.openxmlformats.org/officeDocument/2006/relationships" xmlns:p="http://schemas.openxmlformats.org/presentationml/2006/main">
+  <p:cSld>
+    <p:bg>
+      <p:bgRef idx="1001">
+        <a:schemeClr val="bg1"/>
+      </p:bgRef>
+    </p:bg>
+    <p:spTree>
+      <p:nvGrpSpPr>
+        <p:cNvPr id="1" name=""/>
+        <p:cNvGrpSpPr/>
+        <p:nvPr/>
+      </p:nvGrpSpPr>
+      <p:grpSpPr>
+        <a:xfrm>
+          <a:off x="0" y="0"/>
+          <a:ext cx="0" cy="0"/>
+          <a:chOff x="0" y="0"/>
+          <a:chExt cx="0" cy="0"/>
+        </a:xfrm>
+      </p:grpSpPr>
+      <p:sp>
+        <p:nvSpPr>
+          <p:cNvPr id="2" name="Верхний колонтитул 1"/>
+          <p:cNvSpPr>
+            <a:spLocks noGrp="1"/>
+          </p:cNvSpPr>
+          <p:nvPr>
+            <p:ph type="hdr" sz="quarter"/>
+          </p:nvPr>
+        </p:nvSpPr>
+        <p:spPr>
+          <a:xfrm>
+            <a:off x="0" y="0"/>
+            <a:ext cx="2971800" cy="458788"/>
+          </a:xfrm>
+          <a:prstGeom prst="rect">
+            <a:avLst/>
+          </a:prstGeom>
+        </p:spPr>
+        <p:txBody>
+          <a:bodyPr vert="horz" lIns="91440" tIns="45720" rIns="91440" bIns="45720" rtlCol="0"/>
+          <a:lstStyle>
+            <a:lvl1pPr algn="l">
+              <a:defRPr sz="1200"/>
+            </a:lvl1pPr>
+          </a:lstStyle>
+          <a:p>
+            <a:endParaRPr lang="ru-RU"/>
+          </a:p>
+        </p:txBody>
+      </p:sp>
+      <p:sp>
+        <p:nvSpPr>
+          <p:cNvPr id="3" name="Дата 2"/>
+          <p:cNvSpPr>
+            <a:spLocks noGrp="1"/>
+          </p:cNvSpPr>
+          <p:nvPr>
+            <p:ph type="dt" idx="1"/>
+          </p:nvPr>
+        </p:nvSpPr>
+        <p:spPr>
+          <a:xfrm>
+            <a:off x="3884613" y="0"/>
+            <a:ext cx="2971800" cy="458788"/>
+          </a:xfrm>
+          <a:prstGeom prst="rect">
+            <a:avLst/>
+          </a:prstGeom>
+        </p:spPr>
+        <p:txBody>
+          <a:bodyPr vert="horz" lIns="91440" tIns="45720" rIns="91440" bIns="45720" rtlCol="0"/>
+          <a:lstStyle>
+            <a:lvl1pPr algn="r">
+              <a:defRPr sz="1200"/>
+            </a:lvl1pPr>
+          </a:lstStyle>
+          <a:p>
+            <a:fld id="{46D652B2-8C6E-419B-8E93-813F678ADC08}" type="datetimeFigureOut">
+              <a:rPr lang="ru-RU" smtClean="0"/>
+            </a:fld>
+            <a:endParaRPr lang="ru-RU"/>
+          </a:p>
+        </p:txBody>
+      </p:sp>
+      <p:sp>
+        <p:nvSpPr>
+          <p:cNvPr id="4" name="Образ слайда 3"/>
+          <p:cNvSpPr>
+            <a:spLocks noGrp="1" noRot="1" noChangeAspect="1"/>
+          </p:cNvSpPr>
+          <p:nvPr>
+            <p:ph type="sldImg" idx="2"/>
+          </p:nvPr>
+        </p:nvSpPr>
+        <p:spPr>
+          <a:xfrm>
+            <a:off x="685800" y="1143000"/>
+            <a:ext cx="5486400" cy="3086100"/>
+          </a:xfrm>
+          <a:prstGeom prst="rect">
+            <a:avLst/>
+          </a:prstGeom>
+          <a:noFill/>
+          <a:ln w="12700">
+            <a:solidFill>
+              <a:prstClr val="black"/>
+            </a:solidFill>
+          </a:ln>
+        </p:spPr>
+        <p:txBody>
+          <a:bodyPr vert="horz" lIns="91440" tIns="45720" rIns="91440" bIns="45720" rtlCol="0" anchor="ctr"/>
+          <a:lstStyle/>
+          <a:p>
+            <a:endParaRPr lang="ru-RU"/>
+          </a:p>
+        </p:txBody>
+      </p:sp>
+      <p:sp>
+        <p:nvSpPr>
+          <p:cNvPr id="5" name="Заметки 4"/>
+          <p:cNvSpPr>
+            <a:spLocks noGrp="1"/>
+          </p:cNvSpPr>
+          <p:nvPr>
+            <p:ph type="body" sz="quarter" idx="3"/>
+          </p:nvPr>
+        </p:nvSpPr>
+        <p:spPr>
+          <a:xfrm>
+            <a:off x="685800" y="4400550"/>
+            <a:ext cx="5486400" cy="3600450"/>
+          </a:xfrm>
+          <a:prstGeom prst="rect">
+            <a:avLst/>
+          </a:prstGeom>
+        </p:spPr>
+        <p:txBody>
+          <a:bodyPr vert="horz" lIns="91440" tIns="45720" rIns="91440" bIns="45720" rtlCol="0"/>
+          <a:lstStyle/>
+          <a:p>
+            <a:pPr lvl="0"/>
+            <a:r>
+              <a:rPr lang="ru-RU" smtClean="0"/>
+              <a:t>Образец текста</a:t>
+            </a:r>
+            <a:endParaRPr lang="ru-RU" smtClean="0"/>
+          </a:p>
+          <a:p>
+            <a:pPr lvl="1"/>
+            <a:r>
+              <a:rPr lang="ru-RU" smtClean="0"/>
+              <a:t>Второй уровень</a:t>
+            </a:r>
+            <a:endParaRPr lang="ru-RU" smtClean="0"/>
+          </a:p>
+          <a:p>
+            <a:pPr lvl="2"/>
+            <a:r>
+              <a:rPr lang="ru-RU" smtClean="0"/>
+              <a:t>Третий уровень</a:t>
+            </a:r>
+            <a:endParaRPr lang="ru-RU" smtClean="0"/>
+          </a:p>
+          <a:p>
+            <a:pPr lvl="3"/>
+            <a:r>
+              <a:rPr lang="ru-RU" smtClean="0"/>
+              <a:t>Четвертый уровень</a:t>
+            </a:r>
+            <a:endParaRPr lang="ru-RU" smtClean="0"/>
+          </a:p>
+          <a:p>
+            <a:pPr lvl="4"/>
+            <a:r>
+              <a:rPr lang="ru-RU" smtClean="0"/>
+              <a:t>Пятый уровень</a:t>
+            </a:r>
+            <a:endParaRPr lang="ru-RU"/>
+          </a:p>
+        </p:txBody>
+      </p:sp>
+      <p:sp>
+        <p:nvSpPr>
+          <p:cNvPr id="6" name="Нижний колонтитул 5"/>
+          <p:cNvSpPr>
+            <a:spLocks noGrp="1"/>
+          </p:cNvSpPr>
+          <p:nvPr>
+            <p:ph type="ftr" sz="quarter" idx="4"/>
+          </p:nvPr>
+        </p:nvSpPr>
+        <p:spPr>
+          <a:xfrm>
+            <a:off x="0" y="8685213"/>
+            <a:ext cx="2971800" cy="458787"/>
+          </a:xfrm>
+          <a:prstGeom prst="rect">
+            <a:avLst/>
+          </a:prstGeom>
+        </p:spPr>
+        <p:txBody>
+          <a:bodyPr vert="horz" lIns="91440" tIns="45720" rIns="91440" bIns="45720" rtlCol="0" anchor="b"/>
+          <a:lstStyle>
+            <a:lvl1pPr algn="l">
+              <a:defRPr sz="1200"/>
+            </a:lvl1pPr>
+          </a:lstStyle>
+          <a:p>
+            <a:endParaRPr lang="ru-RU"/>
+          </a:p>
+        </p:txBody>
+      </p:sp>
+      <p:sp>
+        <p:nvSpPr>
+          <p:cNvPr id="7" name="Номер слайда 6"/>
+          <p:cNvSpPr>
+            <a:spLocks noGrp="1"/>
+          </p:cNvSpPr>
+          <p:nvPr>
+            <p:ph type="sldNum" sz="quarter" idx="5"/>
+          </p:nvPr>
+        </p:nvSpPr>
+        <p:spPr>
+          <a:xfrm>
+            <a:off x="3884613" y="8685213"/>
+            <a:ext cx="2971800" cy="458787"/>
+          </a:xfrm>
+          <a:prstGeom prst="rect">
+            <a:avLst/>
+          </a:prstGeom>
+        </p:spPr>
+        <p:txBody>
+          <a:bodyPr vert="horz" lIns="91440" tIns="45720" rIns="91440" bIns="45720" rtlCol="0" anchor="b"/>
+          <a:lstStyle>
+            <a:lvl1pPr algn="r">
+              <a:defRPr sz="1200"/>
+            </a:lvl1pPr>
+          </a:lstStyle>
+          <a:p>
+            <a:fld id="{C6C6DC3D-C717-495C-B489-C044A339A551}" type="slidenum">
+              <a:rPr lang="ru-RU" smtClean="0"/>
+            </a:fld>
+            <a:endParaRPr lang="ru-RU"/>
+          </a:p>
+        </p:txBody>
+      </p:sp>
+    </p:spTree>
+  </p:cSld>
+  <p:clrMap bg1="lt1" tx1="dk1" bg2="lt2" tx2="dk2" accent1="accent1" accent2="accent2" accent3="accent3" accent4="accent4" accent5="accent5" accent6="accent6" hlink="hlink" folHlink="folHlink"/>
+  <p:notesStyle>
+    <a:lvl1pPr marL="0" algn="l" defTabSz="914400" rtl="0" eaLnBrk="1" latinLnBrk="0" hangingPunct="1">
+      <a:defRPr sz="1200" kern="1200">
+        <a:solidFill>
+          <a:schemeClr val="tx1"/>
+        </a:solidFill>
+        <a:latin typeface="+mn-lt"/>
+        <a:ea typeface="+mn-ea"/>
+        <a:cs typeface="+mn-cs"/>
+      </a:defRPr>
+    </a:lvl1pPr>
+    <a:lvl2pPr marL="457200" algn="l" defTabSz="914400" rtl="0" eaLnBrk="1" latinLnBrk="0" hangingPunct="1">
+      <a:defRPr sz="1200" kern="1200">
+        <a:solidFill>
+          <a:schemeClr val="tx1"/>
+        </a:solidFill>
+        <a:latin typeface="+mn-lt"/>
+        <a:ea typeface="+mn-ea"/>
+        <a:cs typeface="+mn-cs"/>
+      </a:defRPr>
+    </a:lvl2pPr>
+    <a:lvl3pPr marL="914400" algn="l" defTabSz="914400" rtl="0" eaLnBrk="1" latinLnBrk="0" hangingPunct="1">
+      <a:defRPr sz="1200" kern="1200">
+        <a:solidFill>
+          <a:schemeClr val="tx1"/>
+        </a:solidFill>
+        <a:latin typeface="+mn-lt"/>
+        <a:ea typeface="+mn-ea"/>
+        <a:cs typeface="+mn-cs"/>
+      </a:defRPr>
+    </a:lvl3pPr>
+    <a:lvl4pPr marL="1371600" algn="l" defTabSz="914400" rtl="0" eaLnBrk="1" latinLnBrk="0" hangingPunct="1">
+      <a:defRPr sz="1200" kern="1200">
+        <a:solidFill>
+          <a:schemeClr val="tx1"/>
+        </a:solidFill>
+        <a:latin typeface="+mn-lt"/>
+        <a:ea typeface="+mn-ea"/>
+        <a:cs typeface="+mn-cs"/>
+      </a:defRPr>
+    </a:lvl4pPr>
+    <a:lvl5pPr marL="1828800" algn="l" defTabSz="914400" rtl="0" eaLnBrk="1" latinLnBrk="0" hangingPunct="1">
+      <a:defRPr sz="1200" kern="1200">
+        <a:solidFill>
+          <a:schemeClr val="tx1"/>
+        </a:solidFill>
+        <a:latin typeface="+mn-lt"/>
+        <a:ea typeface="+mn-ea"/>
+        <a:cs typeface="+mn-cs"/>
+      </a:defRPr>
+    </a:lvl5pPr>
+    <a:lvl6pPr marL="2286000" algn="l" defTabSz="914400" rtl="0" eaLnBrk="1" latinLnBrk="0" hangingPunct="1">
+      <a:defRPr sz="1200" kern="1200">
+        <a:solidFill>
+          <a:schemeClr val="tx1"/>
+        </a:solidFill>
+        <a:latin typeface="+mn-lt"/>
+        <a:ea typeface="+mn-ea"/>
+        <a:cs typeface="+mn-cs"/>
+      </a:defRPr>
+    </a:lvl6pPr>
+    <a:lvl7pPr marL="2743200" algn="l" defTabSz="914400" rtl="0" eaLnBrk="1" latinLnBrk="0" hangingPunct="1">
+      <a:defRPr sz="1200" kern="1200">
+        <a:solidFill>
+          <a:schemeClr val="tx1"/>
+        </a:solidFill>
+        <a:latin typeface="+mn-lt"/>
+        <a:ea typeface="+mn-ea"/>
+        <a:cs typeface="+mn-cs"/>
+      </a:defRPr>
+    </a:lvl7pPr>
+    <a:lvl8pPr marL="3200400" algn="l" defTabSz="914400" rtl="0" eaLnBrk="1" latinLnBrk="0" hangingPunct="1">
+      <a:defRPr sz="1200" kern="1200">
+        <a:solidFill>
+          <a:schemeClr val="tx1"/>
+        </a:solidFill>
+        <a:latin typeface="+mn-lt"/>
+        <a:ea typeface="+mn-ea"/>
+        <a:cs typeface="+mn-cs"/>
+      </a:defRPr>
+    </a:lvl8pPr>
+    <a:lvl9pPr marL="3657600" algn="l" defTabSz="914400" rtl="0" eaLnBrk="1" latinLnBrk="0" hangingPunct="1">
+      <a:defRPr sz="1200" kern="1200">
+        <a:solidFill>
+          <a:schemeClr val="tx1"/>
+        </a:solidFill>
+        <a:latin typeface="+mn-lt"/>
+        <a:ea typeface="+mn-ea"/>
+        <a:cs typeface="+mn-cs"/>
+      </a:defRPr>
+    </a:lvl9pPr>
+  </p:notesStyle>
+</p:notesMaster>
 </file>
 
 <file path=ppt/slideLayouts/slideLayout1.xml><?xml version="1.0" encoding="utf-8"?>
@@ -4003,28 +4516,9 @@
           <a:p>
             <a:r>
               <a:rPr lang="ru-RU" dirty="0"/>
-              <a:t>Программные модули</a:t>
-            </a:r>
-            <a:endParaRPr lang="ru-RU" dirty="0"/>
-          </a:p>
-        </p:txBody>
-      </p:sp>
-      <p:sp>
-        <p:nvSpPr>
-          <p:cNvPr id="3" name="Объект 2"/>
-          <p:cNvSpPr>
-            <a:spLocks noGrp="1"/>
-          </p:cNvSpPr>
-          <p:nvPr>
-            <p:ph idx="1"/>
-          </p:nvPr>
-        </p:nvSpPr>
-        <p:spPr/>
-        <p:txBody>
-          <a:bodyPr/>
-          <a:lstStyle/>
-          <a:p>
-            <a:endParaRPr lang="ru-RU" dirty="0"/>
+              <a:t>Окно Учёта улова</a:t>
+            </a:r>
+            <a:endParaRPr lang="en-US" altLang="ru-RU" dirty="0"/>
           </a:p>
         </p:txBody>
       </p:sp>
@@ -4046,6 +4540,409 @@
           <a:xfrm>
             <a:off x="8904586" y="5499849"/>
             <a:ext cx="1594580" cy="679657"/>
+          </a:xfrm>
+          <a:prstGeom prst="rect">
+            <a:avLst/>
+          </a:prstGeom>
+        </p:spPr>
+      </p:pic>
+      <p:sp>
+        <p:nvSpPr>
+          <p:cNvPr id="5" name="Текстовое поле 4"/>
+          <p:cNvSpPr txBox="1"/>
+          <p:nvPr/>
+        </p:nvSpPr>
+        <p:spPr>
+          <a:xfrm>
+            <a:off x="810260" y="4683760"/>
+            <a:ext cx="10571480" cy="1753235"/>
+          </a:xfrm>
+          <a:prstGeom prst="rect">
+            <a:avLst/>
+          </a:prstGeom>
+          <a:noFill/>
+        </p:spPr>
+        <p:txBody>
+          <a:bodyPr wrap="square" rtlCol="0">
+            <a:spAutoFit/>
+          </a:bodyPr>
+          <a:p>
+            <a:pPr algn="ctr"/>
+            <a:r>
+              <a:rPr lang="en-US" altLang="en-US"/>
+              <a:t>Окно</a:t>
+            </a:r>
+            <a:r>
+              <a:rPr lang="en-US" altLang="ru-RU"/>
+              <a:t> </a:t>
+            </a:r>
+            <a:r>
+              <a:rPr lang="en-US" altLang="en-US"/>
+              <a:t>предназначено</a:t>
+            </a:r>
+            <a:r>
+              <a:rPr lang="en-US" altLang="ru-RU"/>
+              <a:t> </a:t>
+            </a:r>
+            <a:r>
+              <a:rPr lang="en-US" altLang="en-US"/>
+              <a:t>для</a:t>
+            </a:r>
+            <a:r>
+              <a:rPr lang="en-US" altLang="ru-RU"/>
+              <a:t> </a:t>
+            </a:r>
+            <a:r>
+              <a:rPr lang="en-US" altLang="en-US"/>
+              <a:t>фиксации</a:t>
+            </a:r>
+            <a:r>
+              <a:rPr lang="en-US" altLang="ru-RU"/>
+              <a:t> </a:t>
+            </a:r>
+            <a:r>
+              <a:rPr lang="en-US" altLang="en-US"/>
+              <a:t>результатов</a:t>
+            </a:r>
+            <a:r>
+              <a:rPr lang="en-US" altLang="ru-RU"/>
+              <a:t> </a:t>
+            </a:r>
+            <a:r>
+              <a:rPr lang="en-US" altLang="en-US"/>
+              <a:t>промысла</a:t>
+            </a:r>
+            <a:r>
+              <a:rPr lang="en-US" altLang="ru-RU"/>
+              <a:t>. </a:t>
+            </a:r>
+            <a:r>
+              <a:rPr lang="en-US" altLang="en-US"/>
+              <a:t>Для</a:t>
+            </a:r>
+            <a:r>
+              <a:rPr lang="en-US" altLang="ru-RU"/>
+              <a:t> </a:t>
+            </a:r>
+            <a:r>
+              <a:rPr lang="en-US" altLang="en-US"/>
+              <a:t>каждой</a:t>
+            </a:r>
+            <a:r>
+              <a:rPr lang="en-US" altLang="ru-RU"/>
+              <a:t> </a:t>
+            </a:r>
+            <a:r>
+              <a:rPr lang="en-US" altLang="en-US"/>
+              <a:t>записи</a:t>
+            </a:r>
+            <a:r>
+              <a:rPr lang="en-US" altLang="ru-RU"/>
+              <a:t> </a:t>
+            </a:r>
+            <a:r>
+              <a:rPr lang="en-US" altLang="en-US"/>
+              <a:t>указываются</a:t>
+            </a:r>
+            <a:r>
+              <a:rPr lang="en-US" altLang="ru-RU"/>
+              <a:t> </a:t>
+            </a:r>
+            <a:r>
+              <a:rPr lang="en-US" altLang="en-US"/>
+              <a:t>выход</a:t>
+            </a:r>
+            <a:r>
+              <a:rPr lang="en-US" altLang="ru-RU"/>
+              <a:t> </a:t>
+            </a:r>
+            <a:r>
+              <a:rPr lang="en-US" altLang="en-US"/>
+              <a:t>катера</a:t>
+            </a:r>
+            <a:r>
+              <a:rPr lang="en-US" altLang="ru-RU"/>
+              <a:t>, </a:t>
+            </a:r>
+            <a:r>
+              <a:rPr lang="en-US" altLang="en-US"/>
+              <a:t>банка</a:t>
+            </a:r>
+            <a:r>
+              <a:rPr lang="en-US" altLang="ru-RU"/>
+              <a:t>, </a:t>
+            </a:r>
+            <a:r>
+              <a:rPr lang="en-US" altLang="en-US"/>
+              <a:t>сорт</a:t>
+            </a:r>
+            <a:r>
+              <a:rPr lang="en-US" altLang="ru-RU"/>
+              <a:t> </a:t>
+            </a:r>
+            <a:r>
+              <a:rPr lang="en-US" altLang="en-US"/>
+              <a:t>рыбы</a:t>
+            </a:r>
+            <a:r>
+              <a:rPr lang="en-US" altLang="ru-RU"/>
+              <a:t>, </a:t>
+            </a:r>
+            <a:r>
+              <a:rPr lang="en-US" altLang="en-US"/>
+              <a:t>вес</a:t>
+            </a:r>
+            <a:r>
+              <a:rPr lang="en-US" altLang="ru-RU"/>
+              <a:t>, </a:t>
+            </a:r>
+            <a:r>
+              <a:rPr lang="en-US" altLang="en-US"/>
+              <a:t>качество</a:t>
+            </a:r>
+            <a:r>
+              <a:rPr lang="en-US" altLang="ru-RU"/>
+              <a:t> (</a:t>
+            </a:r>
+            <a:r>
+              <a:rPr lang="en-US" altLang="en-US"/>
+              <a:t>отличное</a:t>
+            </a:r>
+            <a:r>
+              <a:rPr lang="en-US" altLang="ru-RU"/>
+              <a:t>, </a:t>
+            </a:r>
+            <a:r>
+              <a:rPr lang="en-US" altLang="en-US"/>
+              <a:t>хорошее</a:t>
+            </a:r>
+            <a:r>
+              <a:rPr lang="en-US" altLang="ru-RU"/>
+              <a:t>, </a:t>
+            </a:r>
+            <a:r>
+              <a:rPr lang="en-US" altLang="en-US"/>
+              <a:t>плохое</a:t>
+            </a:r>
+            <a:r>
+              <a:rPr lang="en-US" altLang="ru-RU"/>
+              <a:t>), </a:t>
+            </a:r>
+            <a:r>
+              <a:rPr lang="en-US" altLang="en-US"/>
+              <a:t>дата</a:t>
+            </a:r>
+            <a:r>
+              <a:rPr lang="en-US" altLang="ru-RU"/>
+              <a:t> </a:t>
+            </a:r>
+            <a:r>
+              <a:rPr lang="en-US" altLang="en-US"/>
+              <a:t>прихода</a:t>
+            </a:r>
+            <a:r>
+              <a:rPr lang="en-US" altLang="ru-RU"/>
+              <a:t> </a:t>
+            </a:r>
+            <a:r>
+              <a:rPr lang="en-US" altLang="en-US"/>
+              <a:t>и</a:t>
+            </a:r>
+            <a:r>
+              <a:rPr lang="en-US" altLang="ru-RU"/>
+              <a:t> </a:t>
+            </a:r>
+            <a:r>
+              <a:rPr lang="en-US" altLang="en-US"/>
+              <a:t>отплытия</a:t>
+            </a:r>
+            <a:r>
+              <a:rPr lang="en-US" altLang="ru-RU"/>
+              <a:t>. </a:t>
+            </a:r>
+            <a:r>
+              <a:rPr lang="en-US" altLang="en-US"/>
+              <a:t>Один</a:t>
+            </a:r>
+            <a:r>
+              <a:rPr lang="en-US" altLang="ru-RU"/>
+              <a:t> </a:t>
+            </a:r>
+            <a:r>
+              <a:rPr lang="en-US" altLang="en-US"/>
+              <a:t>выход</a:t>
+            </a:r>
+            <a:r>
+              <a:rPr lang="en-US" altLang="ru-RU"/>
+              <a:t> </a:t>
+            </a:r>
+            <a:r>
+              <a:rPr lang="en-US" altLang="en-US"/>
+              <a:t>может</a:t>
+            </a:r>
+            <a:r>
+              <a:rPr lang="en-US" altLang="ru-RU"/>
+              <a:t> </a:t>
+            </a:r>
+            <a:r>
+              <a:rPr lang="en-US" altLang="en-US"/>
+              <a:t>включать</a:t>
+            </a:r>
+            <a:r>
+              <a:rPr lang="en-US" altLang="ru-RU"/>
+              <a:t> </a:t>
+            </a:r>
+            <a:r>
+              <a:rPr lang="en-US" altLang="en-US"/>
+              <a:t>несколько</a:t>
+            </a:r>
+            <a:r>
+              <a:rPr lang="en-US" altLang="ru-RU"/>
+              <a:t> </a:t>
+            </a:r>
+            <a:r>
+              <a:rPr lang="en-US" altLang="en-US"/>
+              <a:t>записей</a:t>
+            </a:r>
+            <a:r>
+              <a:rPr lang="en-US" altLang="ru-RU"/>
+              <a:t> – </a:t>
+            </a:r>
+            <a:r>
+              <a:rPr lang="en-US" altLang="en-US"/>
+              <a:t>по</a:t>
+            </a:r>
+            <a:r>
+              <a:rPr lang="en-US" altLang="ru-RU"/>
+              <a:t> </a:t>
+            </a:r>
+            <a:r>
+              <a:rPr lang="en-US" altLang="en-US"/>
+              <a:t>разным</a:t>
+            </a:r>
+            <a:r>
+              <a:rPr lang="en-US" altLang="ru-RU"/>
+              <a:t> </a:t>
+            </a:r>
+            <a:r>
+              <a:rPr lang="en-US" altLang="en-US"/>
+              <a:t>банкам</a:t>
+            </a:r>
+            <a:r>
+              <a:rPr lang="en-US" altLang="ru-RU"/>
+              <a:t> </a:t>
+            </a:r>
+            <a:r>
+              <a:rPr lang="en-US" altLang="en-US"/>
+              <a:t>и</a:t>
+            </a:r>
+            <a:r>
+              <a:rPr lang="en-US" altLang="ru-RU"/>
+              <a:t> </a:t>
+            </a:r>
+            <a:r>
+              <a:rPr lang="en-US" altLang="en-US"/>
+              <a:t>сортам</a:t>
+            </a:r>
+            <a:r>
+              <a:rPr lang="en-US" altLang="ru-RU"/>
+              <a:t> </a:t>
+            </a:r>
+            <a:r>
+              <a:rPr lang="en-US" altLang="en-US"/>
+              <a:t>рыбы</a:t>
+            </a:r>
+            <a:r>
+              <a:rPr lang="en-US" altLang="ru-RU"/>
+              <a:t>. </a:t>
+            </a:r>
+            <a:r>
+              <a:rPr lang="en-US" altLang="en-US"/>
+              <a:t>Реализованы</a:t>
+            </a:r>
+            <a:r>
+              <a:rPr lang="en-US" altLang="ru-RU"/>
+              <a:t> </a:t>
+            </a:r>
+            <a:r>
+              <a:rPr lang="en-US" altLang="en-US"/>
+              <a:t>добавление</a:t>
+            </a:r>
+            <a:r>
+              <a:rPr lang="en-US" altLang="ru-RU"/>
+              <a:t>, </a:t>
+            </a:r>
+            <a:r>
+              <a:rPr lang="en-US" altLang="en-US"/>
+              <a:t>редактирование</a:t>
+            </a:r>
+            <a:r>
+              <a:rPr lang="en-US" altLang="ru-RU"/>
+              <a:t>, </a:t>
+            </a:r>
+            <a:r>
+              <a:rPr lang="en-US" altLang="en-US"/>
+              <a:t>удаление</a:t>
+            </a:r>
+            <a:r>
+              <a:rPr lang="en-US" altLang="ru-RU"/>
+              <a:t>, </a:t>
+            </a:r>
+            <a:r>
+              <a:rPr lang="en-US" altLang="en-US"/>
+              <a:t>поиск</a:t>
+            </a:r>
+            <a:r>
+              <a:rPr lang="en-US" altLang="ru-RU"/>
+              <a:t> </a:t>
+            </a:r>
+            <a:r>
+              <a:rPr lang="en-US" altLang="en-US"/>
+              <a:t>и</a:t>
+            </a:r>
+            <a:r>
+              <a:rPr lang="en-US" altLang="ru-RU"/>
+              <a:t> </a:t>
+            </a:r>
+            <a:r>
+              <a:rPr lang="en-US" altLang="en-US"/>
+              <a:t>пагинация</a:t>
+            </a:r>
+            <a:r>
+              <a:rPr lang="en-US" altLang="ru-RU"/>
+              <a:t>.</a:t>
+            </a:r>
+            <a:endParaRPr lang="en-US" altLang="ru-RU"/>
+          </a:p>
+          <a:p>
+            <a:endParaRPr lang="en-US" altLang="ru-RU"/>
+          </a:p>
+          <a:p>
+            <a:pPr algn="ctr"/>
+            <a:endParaRPr lang="en-US" altLang="ru-RU"/>
+          </a:p>
+        </p:txBody>
+      </p:sp>
+      <p:pic>
+        <p:nvPicPr>
+          <p:cNvPr id="7" name="Замещающее содержимое 6"/>
+          <p:cNvPicPr>
+            <a:picLocks noChangeAspect="1"/>
+          </p:cNvPicPr>
+          <p:nvPr>
+            <p:ph idx="1"/>
+          </p:nvPr>
+        </p:nvPicPr>
+        <p:blipFill>
+          <a:blip r:embed="rId4"/>
+          <a:stretch>
+            <a:fillRect/>
+          </a:stretch>
+        </p:blipFill>
+        <p:spPr>
+          <a:xfrm>
+            <a:off x="3529330" y="1845945"/>
+            <a:ext cx="5133340" cy="2766060"/>
           </a:xfrm>
           <a:prstGeom prst="rect">
             <a:avLst/>
@@ -4147,31 +5044,38 @@
           <a:p>
             <a:r>
               <a:rPr lang="ru-RU" dirty="0"/>
-              <a:t>Дефект 1</a:t>
+              <a:t>Программные модули</a:t>
             </a:r>
             <a:endParaRPr lang="ru-RU" dirty="0"/>
           </a:p>
         </p:txBody>
       </p:sp>
-      <p:sp>
-        <p:nvSpPr>
-          <p:cNvPr id="3" name="Объект 2"/>
-          <p:cNvSpPr>
-            <a:spLocks noGrp="1"/>
-          </p:cNvSpPr>
+      <p:pic>
+        <p:nvPicPr>
+          <p:cNvPr id="4" name="Замещающее содержимое 3"/>
+          <p:cNvPicPr>
+            <a:picLocks noChangeAspect="1"/>
+          </p:cNvPicPr>
           <p:nvPr>
             <p:ph idx="1"/>
           </p:nvPr>
-        </p:nvSpPr>
-        <p:spPr/>
-        <p:txBody>
-          <a:bodyPr/>
-          <a:lstStyle/>
-          <a:p>
-            <a:endParaRPr lang="ru-RU" dirty="0"/>
-          </a:p>
-        </p:txBody>
-      </p:sp>
+        </p:nvPicPr>
+        <p:blipFill>
+          <a:blip r:embed="rId3"/>
+          <a:stretch>
+            <a:fillRect/>
+          </a:stretch>
+        </p:blipFill>
+        <p:spPr>
+          <a:xfrm>
+            <a:off x="386080" y="2554605"/>
+            <a:ext cx="5330825" cy="1988820"/>
+          </a:xfrm>
+          <a:prstGeom prst="rect">
+            <a:avLst/>
+          </a:prstGeom>
+        </p:spPr>
+      </p:pic>
       <p:pic>
         <p:nvPicPr>
           <p:cNvPr id="8" name="Рисунок 7"/>
@@ -4181,7 +5085,7 @@
           <p:nvPr/>
         </p:nvPicPr>
         <p:blipFill>
-          <a:blip r:embed="rId3"/>
+          <a:blip r:embed="rId4"/>
           <a:stretch>
             <a:fillRect/>
           </a:stretch>
@@ -4196,6 +5100,89 @@
           </a:prstGeom>
         </p:spPr>
       </p:pic>
+      <p:sp>
+        <p:nvSpPr>
+          <p:cNvPr id="5" name="Текстовое поле 4"/>
+          <p:cNvSpPr txBox="1"/>
+          <p:nvPr/>
+        </p:nvSpPr>
+        <p:spPr>
+          <a:xfrm>
+            <a:off x="1019810" y="2064385"/>
+            <a:ext cx="4064000" cy="368300"/>
+          </a:xfrm>
+          <a:prstGeom prst="rect">
+            <a:avLst/>
+          </a:prstGeom>
+          <a:noFill/>
+        </p:spPr>
+        <p:txBody>
+          <a:bodyPr wrap="square" rtlCol="0">
+            <a:spAutoFit/>
+          </a:bodyPr>
+          <a:p>
+            <a:r>
+              <a:rPr lang="ru-RU" altLang="en-US"/>
+              <a:t>Пример настройки видимости вкладок</a:t>
+            </a:r>
+            <a:endParaRPr lang="ru-RU" altLang="en-US"/>
+          </a:p>
+        </p:txBody>
+      </p:sp>
+      <p:pic>
+        <p:nvPicPr>
+          <p:cNvPr id="7" name="Изображение 6"/>
+          <p:cNvPicPr>
+            <a:picLocks noChangeAspect="1"/>
+          </p:cNvPicPr>
+          <p:nvPr/>
+        </p:nvPicPr>
+        <p:blipFill>
+          <a:blip r:embed="rId5"/>
+          <a:stretch>
+            <a:fillRect/>
+          </a:stretch>
+        </p:blipFill>
+        <p:spPr>
+          <a:xfrm>
+            <a:off x="6630035" y="2554605"/>
+            <a:ext cx="4525645" cy="2023745"/>
+          </a:xfrm>
+          <a:prstGeom prst="rect">
+            <a:avLst/>
+          </a:prstGeom>
+        </p:spPr>
+      </p:pic>
+      <p:sp>
+        <p:nvSpPr>
+          <p:cNvPr id="10" name="Текстовое поле 9"/>
+          <p:cNvSpPr txBox="1"/>
+          <p:nvPr/>
+        </p:nvSpPr>
+        <p:spPr>
+          <a:xfrm>
+            <a:off x="6630670" y="2064385"/>
+            <a:ext cx="4525645" cy="368300"/>
+          </a:xfrm>
+          <a:prstGeom prst="rect">
+            <a:avLst/>
+          </a:prstGeom>
+          <a:noFill/>
+        </p:spPr>
+        <p:txBody>
+          <a:bodyPr wrap="square" rtlCol="0">
+            <a:spAutoFit/>
+          </a:bodyPr>
+          <a:p>
+            <a:pPr algn="ctr"/>
+            <a:r>
+              <a:rPr lang="ru-RU" altLang="en-US"/>
+              <a:t>Сохранение открытых и открытие вкладок</a:t>
+            </a:r>
+            <a:endParaRPr lang="ru-RU" altLang="en-US"/>
+          </a:p>
+        </p:txBody>
+      </p:sp>
     </p:spTree>
   </p:cSld>
   <p:clrMapOvr>
@@ -4291,27 +5278,8 @@
           <a:p>
             <a:r>
               <a:rPr lang="ru-RU" dirty="0"/>
-              <a:t>Дефект 2</a:t>
-            </a:r>
-            <a:endParaRPr lang="ru-RU" dirty="0"/>
-          </a:p>
-        </p:txBody>
-      </p:sp>
-      <p:sp>
-        <p:nvSpPr>
-          <p:cNvPr id="3" name="Объект 2"/>
-          <p:cNvSpPr>
-            <a:spLocks noGrp="1"/>
-          </p:cNvSpPr>
-          <p:nvPr>
-            <p:ph idx="1"/>
-          </p:nvPr>
-        </p:nvSpPr>
-        <p:spPr/>
-        <p:txBody>
-          <a:bodyPr/>
-          <a:lstStyle/>
-          <a:p>
+              <a:t>Программные модули</a:t>
+            </a:r>
             <a:endParaRPr lang="ru-RU" dirty="0"/>
           </a:p>
         </p:txBody>
@@ -4340,6 +5308,170 @@
           </a:prstGeom>
         </p:spPr>
       </p:pic>
+      <p:sp>
+        <p:nvSpPr>
+          <p:cNvPr id="5" name="Текстовое поле 4"/>
+          <p:cNvSpPr txBox="1"/>
+          <p:nvPr/>
+        </p:nvSpPr>
+        <p:spPr>
+          <a:xfrm>
+            <a:off x="1019810" y="2064385"/>
+            <a:ext cx="4064000" cy="368300"/>
+          </a:xfrm>
+          <a:prstGeom prst="rect">
+            <a:avLst/>
+          </a:prstGeom>
+          <a:noFill/>
+        </p:spPr>
+        <p:txBody>
+          <a:bodyPr wrap="square" rtlCol="0">
+            <a:spAutoFit/>
+          </a:bodyPr>
+          <a:p>
+            <a:pPr algn="ctr"/>
+            <a:r>
+              <a:rPr lang="ru-RU" altLang="en-US"/>
+              <a:t>Удаление банки</a:t>
+            </a:r>
+            <a:endParaRPr lang="ru-RU" altLang="en-US"/>
+          </a:p>
+        </p:txBody>
+      </p:sp>
+      <p:sp>
+        <p:nvSpPr>
+          <p:cNvPr id="10" name="Текстовое поле 9"/>
+          <p:cNvSpPr txBox="1"/>
+          <p:nvPr/>
+        </p:nvSpPr>
+        <p:spPr>
+          <a:xfrm>
+            <a:off x="6861175" y="2064385"/>
+            <a:ext cx="4064000" cy="368300"/>
+          </a:xfrm>
+          <a:prstGeom prst="rect">
+            <a:avLst/>
+          </a:prstGeom>
+          <a:noFill/>
+        </p:spPr>
+        <p:txBody>
+          <a:bodyPr wrap="square" rtlCol="0">
+            <a:spAutoFit/>
+          </a:bodyPr>
+          <a:p>
+            <a:pPr algn="ctr"/>
+            <a:r>
+              <a:rPr lang="ru-RU" altLang="en-US"/>
+              <a:t>Выручка по товарам</a:t>
+            </a:r>
+            <a:endParaRPr lang="ru-RU" altLang="en-US"/>
+          </a:p>
+        </p:txBody>
+      </p:sp>
+      <p:pic>
+        <p:nvPicPr>
+          <p:cNvPr id="11" name="Замещающее содержимое 10"/>
+          <p:cNvPicPr>
+            <a:picLocks noChangeAspect="1"/>
+          </p:cNvPicPr>
+          <p:nvPr>
+            <p:ph idx="1"/>
+          </p:nvPr>
+        </p:nvPicPr>
+        <p:blipFill>
+          <a:blip r:embed="rId4"/>
+          <a:stretch>
+            <a:fillRect/>
+          </a:stretch>
+        </p:blipFill>
+        <p:spPr>
+          <a:xfrm>
+            <a:off x="650240" y="2554605"/>
+            <a:ext cx="4802505" cy="922020"/>
+          </a:xfrm>
+          <a:prstGeom prst="rect">
+            <a:avLst/>
+          </a:prstGeom>
+        </p:spPr>
+      </p:pic>
+      <p:pic>
+        <p:nvPicPr>
+          <p:cNvPr id="12" name="Изображение 11"/>
+          <p:cNvPicPr>
+            <a:picLocks noChangeAspect="1"/>
+          </p:cNvPicPr>
+          <p:nvPr/>
+        </p:nvPicPr>
+        <p:blipFill>
+          <a:blip r:embed="rId5"/>
+          <a:stretch>
+            <a:fillRect/>
+          </a:stretch>
+        </p:blipFill>
+        <p:spPr>
+          <a:xfrm>
+            <a:off x="7385050" y="2554605"/>
+            <a:ext cx="3015615" cy="2059305"/>
+          </a:xfrm>
+          <a:prstGeom prst="rect">
+            <a:avLst/>
+          </a:prstGeom>
+        </p:spPr>
+      </p:pic>
+      <p:pic>
+        <p:nvPicPr>
+          <p:cNvPr id="13" name="Изображение 12"/>
+          <p:cNvPicPr>
+            <a:picLocks noChangeAspect="1"/>
+          </p:cNvPicPr>
+          <p:nvPr/>
+        </p:nvPicPr>
+        <p:blipFill>
+          <a:blip r:embed="rId6"/>
+          <a:stretch>
+            <a:fillRect/>
+          </a:stretch>
+        </p:blipFill>
+        <p:spPr>
+          <a:xfrm>
+            <a:off x="1144905" y="4495800"/>
+            <a:ext cx="3813175" cy="1157605"/>
+          </a:xfrm>
+          <a:prstGeom prst="rect">
+            <a:avLst/>
+          </a:prstGeom>
+        </p:spPr>
+      </p:pic>
+      <p:sp>
+        <p:nvSpPr>
+          <p:cNvPr id="14" name="Текстовое поле 13"/>
+          <p:cNvSpPr txBox="1"/>
+          <p:nvPr/>
+        </p:nvSpPr>
+        <p:spPr>
+          <a:xfrm>
+            <a:off x="961390" y="4032250"/>
+            <a:ext cx="4064000" cy="368300"/>
+          </a:xfrm>
+          <a:prstGeom prst="rect">
+            <a:avLst/>
+          </a:prstGeom>
+          <a:noFill/>
+        </p:spPr>
+        <p:txBody>
+          <a:bodyPr wrap="square" rtlCol="0">
+            <a:spAutoFit/>
+          </a:bodyPr>
+          <a:p>
+            <a:pPr algn="ctr"/>
+            <a:r>
+              <a:rPr lang="ru-RU" altLang="en-US"/>
+              <a:t>Видимость элементов внутри окна</a:t>
+            </a:r>
+            <a:endParaRPr lang="ru-RU" altLang="en-US"/>
+          </a:p>
+        </p:txBody>
+      </p:sp>
     </p:spTree>
   </p:cSld>
   <p:clrMapOvr>
@@ -4435,31 +5567,38 @@
           <a:p>
             <a:r>
               <a:rPr lang="ru-RU" dirty="0"/>
-              <a:t>Дефект 3</a:t>
+              <a:t>Дефект 1</a:t>
             </a:r>
             <a:endParaRPr lang="ru-RU" dirty="0"/>
           </a:p>
         </p:txBody>
       </p:sp>
-      <p:sp>
-        <p:nvSpPr>
-          <p:cNvPr id="3" name="Объект 2"/>
-          <p:cNvSpPr>
-            <a:spLocks noGrp="1"/>
-          </p:cNvSpPr>
+      <p:pic>
+        <p:nvPicPr>
+          <p:cNvPr id="4" name="Замещающее содержимое 3"/>
+          <p:cNvPicPr>
+            <a:picLocks noChangeAspect="1"/>
+          </p:cNvPicPr>
           <p:nvPr>
             <p:ph idx="1"/>
           </p:nvPr>
-        </p:nvSpPr>
-        <p:spPr/>
-        <p:txBody>
-          <a:bodyPr/>
-          <a:lstStyle/>
-          <a:p>
-            <a:endParaRPr lang="ru-RU" dirty="0"/>
-          </a:p>
-        </p:txBody>
-      </p:sp>
+        </p:nvPicPr>
+        <p:blipFill>
+          <a:blip r:embed="rId3"/>
+          <a:stretch>
+            <a:fillRect/>
+          </a:stretch>
+        </p:blipFill>
+        <p:spPr>
+          <a:xfrm>
+            <a:off x="521970" y="2918460"/>
+            <a:ext cx="4437380" cy="2890520"/>
+          </a:xfrm>
+          <a:prstGeom prst="rect">
+            <a:avLst/>
+          </a:prstGeom>
+        </p:spPr>
+      </p:pic>
       <p:pic>
         <p:nvPicPr>
           <p:cNvPr id="8" name="Рисунок 7"/>
@@ -4469,7 +5608,7 @@
           <p:nvPr/>
         </p:nvPicPr>
         <p:blipFill>
-          <a:blip r:embed="rId3"/>
+          <a:blip r:embed="rId4"/>
           <a:stretch>
             <a:fillRect/>
           </a:stretch>
@@ -4478,6 +5617,380 @@
           <a:xfrm>
             <a:off x="8904586" y="5499849"/>
             <a:ext cx="1594580" cy="679657"/>
+          </a:xfrm>
+          <a:prstGeom prst="rect">
+            <a:avLst/>
+          </a:prstGeom>
+        </p:spPr>
+      </p:pic>
+      <p:sp>
+        <p:nvSpPr>
+          <p:cNvPr id="5" name="Текстовое поле 4"/>
+          <p:cNvSpPr txBox="1"/>
+          <p:nvPr/>
+        </p:nvSpPr>
+        <p:spPr>
+          <a:xfrm>
+            <a:off x="635635" y="1866900"/>
+            <a:ext cx="4064000" cy="922020"/>
+          </a:xfrm>
+          <a:prstGeom prst="rect">
+            <a:avLst/>
+          </a:prstGeom>
+          <a:noFill/>
+        </p:spPr>
+        <p:txBody>
+          <a:bodyPr wrap="square" rtlCol="0">
+            <a:spAutoFit/>
+          </a:bodyPr>
+          <a:p>
+            <a:pPr algn="ctr"/>
+            <a:r>
+              <a:rPr lang="ru-RU" altLang="ru-RU"/>
+              <a:t>Несмотря на то, что пользователь выбрал товары, которые входят в закупку - код говорит, что список пуст</a:t>
+            </a:r>
+            <a:endParaRPr lang="ru-RU" altLang="ru-RU"/>
+          </a:p>
+        </p:txBody>
+      </p:sp>
+      <p:sp>
+        <p:nvSpPr>
+          <p:cNvPr id="7" name="Текстовое поле 6"/>
+          <p:cNvSpPr txBox="1"/>
+          <p:nvPr/>
+        </p:nvSpPr>
+        <p:spPr>
+          <a:xfrm>
+            <a:off x="5989955" y="1927225"/>
+            <a:ext cx="5295265" cy="1383665"/>
+          </a:xfrm>
+          <a:prstGeom prst="rect">
+            <a:avLst/>
+          </a:prstGeom>
+          <a:noFill/>
+        </p:spPr>
+        <p:txBody>
+          <a:bodyPr wrap="square" rtlCol="0">
+            <a:spAutoFit/>
+          </a:bodyPr>
+          <a:p>
+            <a:r>
+              <a:rPr lang="en-US" altLang="en-US" sz="1400">
+                <a:latin typeface="Times New Roman" panose="02020603050405020304" charset="0"/>
+                <a:cs typeface="Times New Roman" panose="02020603050405020304" charset="0"/>
+              </a:rPr>
+              <a:t>Решение</a:t>
+            </a:r>
+            <a:r>
+              <a:rPr lang="en-US" altLang="ru-RU" sz="1400">
+                <a:latin typeface="Times New Roman" panose="02020603050405020304" charset="0"/>
+                <a:cs typeface="Times New Roman" panose="02020603050405020304" charset="0"/>
+              </a:rPr>
+              <a:t>: </a:t>
+            </a:r>
+            <a:r>
+              <a:rPr lang="en-US" altLang="en-US" sz="1400">
+                <a:latin typeface="Times New Roman" panose="02020603050405020304" charset="0"/>
+                <a:cs typeface="Times New Roman" panose="02020603050405020304" charset="0"/>
+              </a:rPr>
+              <a:t>Исправлен</a:t>
+            </a:r>
+            <a:r>
+              <a:rPr lang="en-US" altLang="ru-RU" sz="1400">
+                <a:latin typeface="Times New Roman" panose="02020603050405020304" charset="0"/>
+                <a:cs typeface="Times New Roman" panose="02020603050405020304" charset="0"/>
+              </a:rPr>
+              <a:t> </a:t>
+            </a:r>
+            <a:r>
+              <a:rPr lang="en-US" altLang="en-US" sz="1400">
+                <a:latin typeface="Times New Roman" panose="02020603050405020304" charset="0"/>
+                <a:cs typeface="Times New Roman" panose="02020603050405020304" charset="0"/>
+              </a:rPr>
+              <a:t>метод</a:t>
+            </a:r>
+            <a:r>
+              <a:rPr lang="en-US" altLang="ru-RU" sz="1400">
+                <a:latin typeface="Times New Roman" panose="02020603050405020304" charset="0"/>
+                <a:cs typeface="Times New Roman" panose="02020603050405020304" charset="0"/>
+              </a:rPr>
+              <a:t> LoadProducts </a:t>
+            </a:r>
+            <a:r>
+              <a:rPr lang="en-US" altLang="en-US" sz="1400">
+                <a:latin typeface="Times New Roman" panose="02020603050405020304" charset="0"/>
+                <a:cs typeface="Times New Roman" panose="02020603050405020304" charset="0"/>
+              </a:rPr>
+              <a:t>в</a:t>
+            </a:r>
+            <a:r>
+              <a:rPr lang="en-US" altLang="ru-RU" sz="1400">
+                <a:latin typeface="Times New Roman" panose="02020603050405020304" charset="0"/>
+                <a:cs typeface="Times New Roman" panose="02020603050405020304" charset="0"/>
+              </a:rPr>
+              <a:t> SelectProductsForPurchaseWindow.xaml.cs. </a:t>
+            </a:r>
+            <a:r>
+              <a:rPr lang="en-US" altLang="en-US" sz="1400">
+                <a:latin typeface="Times New Roman" panose="02020603050405020304" charset="0"/>
+                <a:cs typeface="Times New Roman" panose="02020603050405020304" charset="0"/>
+              </a:rPr>
+              <a:t>Добавлена</a:t>
+            </a:r>
+            <a:r>
+              <a:rPr lang="en-US" altLang="ru-RU" sz="1400">
+                <a:latin typeface="Times New Roman" panose="02020603050405020304" charset="0"/>
+                <a:cs typeface="Times New Roman" panose="02020603050405020304" charset="0"/>
+              </a:rPr>
+              <a:t> </a:t>
+            </a:r>
+            <a:r>
+              <a:rPr lang="en-US" altLang="en-US" sz="1400">
+                <a:latin typeface="Times New Roman" panose="02020603050405020304" charset="0"/>
+                <a:cs typeface="Times New Roman" panose="02020603050405020304" charset="0"/>
+              </a:rPr>
+              <a:t>корректная</a:t>
+            </a:r>
+            <a:r>
+              <a:rPr lang="en-US" altLang="ru-RU" sz="1400">
+                <a:latin typeface="Times New Roman" panose="02020603050405020304" charset="0"/>
+                <a:cs typeface="Times New Roman" panose="02020603050405020304" charset="0"/>
+              </a:rPr>
+              <a:t> </a:t>
+            </a:r>
+            <a:r>
+              <a:rPr lang="en-US" altLang="en-US" sz="1400">
+                <a:latin typeface="Times New Roman" panose="02020603050405020304" charset="0"/>
+                <a:cs typeface="Times New Roman" panose="02020603050405020304" charset="0"/>
+              </a:rPr>
+              <a:t>загрузка</a:t>
+            </a:r>
+            <a:r>
+              <a:rPr lang="en-US" altLang="ru-RU" sz="1400">
+                <a:latin typeface="Times New Roman" panose="02020603050405020304" charset="0"/>
+                <a:cs typeface="Times New Roman" panose="02020603050405020304" charset="0"/>
+              </a:rPr>
+              <a:t> </a:t>
+            </a:r>
+            <a:r>
+              <a:rPr lang="en-US" altLang="en-US" sz="1400">
+                <a:latin typeface="Times New Roman" panose="02020603050405020304" charset="0"/>
+                <a:cs typeface="Times New Roman" panose="02020603050405020304" charset="0"/>
+              </a:rPr>
+              <a:t>товаров</a:t>
+            </a:r>
+            <a:r>
+              <a:rPr lang="en-US" altLang="ru-RU" sz="1400">
+                <a:latin typeface="Times New Roman" panose="02020603050405020304" charset="0"/>
+                <a:cs typeface="Times New Roman" panose="02020603050405020304" charset="0"/>
+              </a:rPr>
+              <a:t> </a:t>
+            </a:r>
+            <a:r>
+              <a:rPr lang="en-US" altLang="en-US" sz="1400">
+                <a:latin typeface="Times New Roman" panose="02020603050405020304" charset="0"/>
+                <a:cs typeface="Times New Roman" panose="02020603050405020304" charset="0"/>
+              </a:rPr>
+              <a:t>из</a:t>
+            </a:r>
+            <a:r>
+              <a:rPr lang="en-US" altLang="ru-RU" sz="1400">
+                <a:latin typeface="Times New Roman" panose="02020603050405020304" charset="0"/>
+                <a:cs typeface="Times New Roman" panose="02020603050405020304" charset="0"/>
+              </a:rPr>
+              <a:t> </a:t>
+            </a:r>
+            <a:r>
+              <a:rPr lang="en-US" altLang="en-US" sz="1400">
+                <a:latin typeface="Times New Roman" panose="02020603050405020304" charset="0"/>
+                <a:cs typeface="Times New Roman" panose="02020603050405020304" charset="0"/>
+              </a:rPr>
+              <a:t>базы</a:t>
+            </a:r>
+            <a:r>
+              <a:rPr lang="en-US" altLang="ru-RU" sz="1400">
+                <a:latin typeface="Times New Roman" panose="02020603050405020304" charset="0"/>
+                <a:cs typeface="Times New Roman" panose="02020603050405020304" charset="0"/>
+              </a:rPr>
+              <a:t> </a:t>
+            </a:r>
+            <a:r>
+              <a:rPr lang="en-US" altLang="en-US" sz="1400">
+                <a:latin typeface="Times New Roman" panose="02020603050405020304" charset="0"/>
+                <a:cs typeface="Times New Roman" panose="02020603050405020304" charset="0"/>
+              </a:rPr>
+              <a:t>данных</a:t>
+            </a:r>
+            <a:r>
+              <a:rPr lang="en-US" altLang="ru-RU" sz="1400">
+                <a:latin typeface="Times New Roman" panose="02020603050405020304" charset="0"/>
+                <a:cs typeface="Times New Roman" panose="02020603050405020304" charset="0"/>
+              </a:rPr>
+              <a:t> </a:t>
+            </a:r>
+            <a:r>
+              <a:rPr lang="en-US" altLang="en-US" sz="1400">
+                <a:latin typeface="Times New Roman" panose="02020603050405020304" charset="0"/>
+                <a:cs typeface="Times New Roman" panose="02020603050405020304" charset="0"/>
+              </a:rPr>
+              <a:t>с</a:t>
+            </a:r>
+            <a:r>
+              <a:rPr lang="en-US" altLang="ru-RU" sz="1400">
+                <a:latin typeface="Times New Roman" panose="02020603050405020304" charset="0"/>
+                <a:cs typeface="Times New Roman" panose="02020603050405020304" charset="0"/>
+              </a:rPr>
+              <a:t> </a:t>
+            </a:r>
+            <a:r>
+              <a:rPr lang="en-US" altLang="en-US" sz="1400">
+                <a:latin typeface="Times New Roman" panose="02020603050405020304" charset="0"/>
+                <a:cs typeface="Times New Roman" panose="02020603050405020304" charset="0"/>
+              </a:rPr>
+              <a:t>преобразованием</a:t>
+            </a:r>
+            <a:r>
+              <a:rPr lang="en-US" altLang="ru-RU" sz="1400">
+                <a:latin typeface="Times New Roman" panose="02020603050405020304" charset="0"/>
+                <a:cs typeface="Times New Roman" panose="02020603050405020304" charset="0"/>
+              </a:rPr>
+              <a:t> </a:t>
+            </a:r>
+            <a:r>
+              <a:rPr lang="en-US" altLang="en-US" sz="1400">
+                <a:latin typeface="Times New Roman" panose="02020603050405020304" charset="0"/>
+                <a:cs typeface="Times New Roman" panose="02020603050405020304" charset="0"/>
+              </a:rPr>
+              <a:t>в</a:t>
+            </a:r>
+            <a:r>
+              <a:rPr lang="en-US" altLang="ru-RU" sz="1400">
+                <a:latin typeface="Times New Roman" panose="02020603050405020304" charset="0"/>
+                <a:cs typeface="Times New Roman" panose="02020603050405020304" charset="0"/>
+              </a:rPr>
+              <a:t> </a:t>
+            </a:r>
+            <a:r>
+              <a:rPr lang="en-US" altLang="en-US" sz="1400">
+                <a:latin typeface="Times New Roman" panose="02020603050405020304" charset="0"/>
+                <a:cs typeface="Times New Roman" panose="02020603050405020304" charset="0"/>
+              </a:rPr>
+              <a:t>нужный</a:t>
+            </a:r>
+            <a:r>
+              <a:rPr lang="en-US" altLang="ru-RU" sz="1400">
+                <a:latin typeface="Times New Roman" panose="02020603050405020304" charset="0"/>
+                <a:cs typeface="Times New Roman" panose="02020603050405020304" charset="0"/>
+              </a:rPr>
+              <a:t> </a:t>
+            </a:r>
+            <a:r>
+              <a:rPr lang="en-US" altLang="en-US" sz="1400">
+                <a:latin typeface="Times New Roman" panose="02020603050405020304" charset="0"/>
+                <a:cs typeface="Times New Roman" panose="02020603050405020304" charset="0"/>
+              </a:rPr>
+              <a:t>тип</a:t>
+            </a:r>
+            <a:r>
+              <a:rPr lang="en-US" altLang="ru-RU" sz="1400">
+                <a:latin typeface="Times New Roman" panose="02020603050405020304" charset="0"/>
+                <a:cs typeface="Times New Roman" panose="02020603050405020304" charset="0"/>
+              </a:rPr>
+              <a:t> </a:t>
+            </a:r>
+            <a:r>
+              <a:rPr lang="en-US" altLang="en-US" sz="1400">
+                <a:latin typeface="Times New Roman" panose="02020603050405020304" charset="0"/>
+                <a:cs typeface="Times New Roman" panose="02020603050405020304" charset="0"/>
+              </a:rPr>
+              <a:t>и</a:t>
+            </a:r>
+            <a:r>
+              <a:rPr lang="en-US" altLang="ru-RU" sz="1400">
+                <a:latin typeface="Times New Roman" panose="02020603050405020304" charset="0"/>
+                <a:cs typeface="Times New Roman" panose="02020603050405020304" charset="0"/>
+              </a:rPr>
+              <a:t> </a:t>
+            </a:r>
+            <a:r>
+              <a:rPr lang="en-US" altLang="en-US" sz="1400">
+                <a:latin typeface="Times New Roman" panose="02020603050405020304" charset="0"/>
+                <a:cs typeface="Times New Roman" panose="02020603050405020304" charset="0"/>
+              </a:rPr>
+              <a:t>присвоение</a:t>
+            </a:r>
+            <a:r>
+              <a:rPr lang="en-US" altLang="ru-RU" sz="1400">
+                <a:latin typeface="Times New Roman" panose="02020603050405020304" charset="0"/>
+                <a:cs typeface="Times New Roman" panose="02020603050405020304" charset="0"/>
+              </a:rPr>
+              <a:t> </a:t>
+            </a:r>
+            <a:r>
+              <a:rPr lang="en-US" altLang="en-US" sz="1400">
+                <a:latin typeface="Times New Roman" panose="02020603050405020304" charset="0"/>
+                <a:cs typeface="Times New Roman" panose="02020603050405020304" charset="0"/>
+              </a:rPr>
+              <a:t>источника</a:t>
+            </a:r>
+            <a:r>
+              <a:rPr lang="en-US" altLang="ru-RU" sz="1400">
+                <a:latin typeface="Times New Roman" panose="02020603050405020304" charset="0"/>
+                <a:cs typeface="Times New Roman" panose="02020603050405020304" charset="0"/>
+              </a:rPr>
+              <a:t> </a:t>
+            </a:r>
+            <a:r>
+              <a:rPr lang="en-US" altLang="en-US" sz="1400">
+                <a:latin typeface="Times New Roman" panose="02020603050405020304" charset="0"/>
+                <a:cs typeface="Times New Roman" panose="02020603050405020304" charset="0"/>
+              </a:rPr>
+              <a:t>данных</a:t>
+            </a:r>
+            <a:r>
+              <a:rPr lang="en-US" altLang="ru-RU" sz="1400">
+                <a:latin typeface="Times New Roman" panose="02020603050405020304" charset="0"/>
+                <a:cs typeface="Times New Roman" panose="02020603050405020304" charset="0"/>
+              </a:rPr>
+              <a:t> DataGrid.</a:t>
+            </a:r>
+            <a:endParaRPr lang="en-US" altLang="ru-RU" sz="1400">
+              <a:latin typeface="Times New Roman" panose="02020603050405020304" charset="0"/>
+              <a:cs typeface="Times New Roman" panose="02020603050405020304" charset="0"/>
+            </a:endParaRPr>
+          </a:p>
+          <a:p>
+            <a:endParaRPr lang="en-US" altLang="ru-RU" sz="1400">
+              <a:latin typeface="Times New Roman" panose="02020603050405020304" charset="0"/>
+              <a:cs typeface="Times New Roman" panose="02020603050405020304" charset="0"/>
+            </a:endParaRPr>
+          </a:p>
+          <a:p>
+            <a:endParaRPr lang="en-US" altLang="ru-RU" sz="1400">
+              <a:latin typeface="Times New Roman" panose="02020603050405020304" charset="0"/>
+              <a:cs typeface="Times New Roman" panose="02020603050405020304" charset="0"/>
+            </a:endParaRPr>
+          </a:p>
+        </p:txBody>
+      </p:sp>
+      <p:pic>
+        <p:nvPicPr>
+          <p:cNvPr id="10" name="Изображение 9"/>
+          <p:cNvPicPr>
+            <a:picLocks noChangeAspect="1"/>
+          </p:cNvPicPr>
+          <p:nvPr/>
+        </p:nvPicPr>
+        <p:blipFill>
+          <a:blip r:embed="rId5"/>
+          <a:stretch>
+            <a:fillRect/>
+          </a:stretch>
+        </p:blipFill>
+        <p:spPr>
+          <a:xfrm>
+            <a:off x="6682105" y="2918460"/>
+            <a:ext cx="3910965" cy="2237740"/>
           </a:xfrm>
           <a:prstGeom prst="rect">
             <a:avLst/>
@@ -4579,85 +6092,38 @@
           <a:p>
             <a:r>
               <a:rPr lang="ru-RU" dirty="0"/>
-              <a:t>Заключение</a:t>
+              <a:t>Дефект 2</a:t>
             </a:r>
             <a:endParaRPr lang="ru-RU" dirty="0"/>
           </a:p>
         </p:txBody>
       </p:sp>
-      <p:sp>
-        <p:nvSpPr>
-          <p:cNvPr id="3" name="Объект 2"/>
-          <p:cNvSpPr>
-            <a:spLocks noGrp="1"/>
-          </p:cNvSpPr>
+      <p:pic>
+        <p:nvPicPr>
+          <p:cNvPr id="4" name="Замещающее содержимое 3"/>
+          <p:cNvPicPr>
+            <a:picLocks noChangeAspect="1"/>
+          </p:cNvPicPr>
           <p:nvPr>
             <p:ph idx="1"/>
           </p:nvPr>
-        </p:nvSpPr>
-        <p:spPr/>
-        <p:txBody>
-          <a:bodyPr/>
-          <a:lstStyle/>
-          <a:p>
-            <a:r>
-              <a:rPr lang="ru-RU" dirty="0"/>
-              <a:t>В ходе работы были сформулированы и решены следующие проблемы:</a:t>
-            </a:r>
-            <a:endParaRPr lang="ru-RU" dirty="0"/>
-          </a:p>
-          <a:p>
-            <a:r>
-              <a:rPr lang="ru-RU" dirty="0"/>
-              <a:t>- Обосновать разработку автоматизированной системы для рыболовной фирмы;</a:t>
-            </a:r>
-            <a:endParaRPr lang="ru-RU" dirty="0"/>
-          </a:p>
-          <a:p>
-            <a:r>
-              <a:rPr lang="ru-RU" dirty="0"/>
-              <a:t>- Разработать автоматизированную систему для </a:t>
-            </a:r>
-            <a:r>
-              <a:rPr lang="ru-RU" dirty="0">
-                <a:sym typeface="+mn-ea"/>
-              </a:rPr>
-              <a:t>рыболовной фирмы</a:t>
-            </a:r>
-            <a:r>
-              <a:rPr lang="ru-RU" dirty="0"/>
-              <a:t>;</a:t>
-            </a:r>
-            <a:endParaRPr lang="ru-RU" dirty="0"/>
-          </a:p>
-          <a:p>
-            <a:r>
-              <a:rPr lang="ru-RU" dirty="0"/>
-              <a:t>- Определить технологию настройки, установки и сопровождения системы для рыболовной фирмы.</a:t>
-            </a:r>
-            <a:endParaRPr lang="ru-RU" dirty="0"/>
-          </a:p>
-          <a:p>
-            <a:endParaRPr lang="ru-RU" dirty="0"/>
-          </a:p>
-          <a:p>
-            <a:r>
-              <a:rPr lang="ru-RU" dirty="0"/>
-              <a:t>Курсовая работа выполнена в соответствии с методическими рекомендациями. Цель курсовой работы достигнута.</a:t>
-            </a:r>
-            <a:endParaRPr lang="ru-RU" dirty="0"/>
-          </a:p>
-          <a:p>
-            <a:endParaRPr lang="ru-RU" dirty="0"/>
-          </a:p>
-          <a:p>
-            <a:endParaRPr lang="ru-RU" dirty="0"/>
-          </a:p>
-          <a:p>
-            <a:endParaRPr lang="ru-RU" dirty="0"/>
-          </a:p>
-        </p:txBody>
-      </p:sp>
+        </p:nvPicPr>
+        <p:blipFill>
+          <a:blip r:embed="rId3"/>
+          <a:stretch>
+            <a:fillRect/>
+          </a:stretch>
+        </p:blipFill>
+        <p:spPr>
+          <a:xfrm>
+            <a:off x="1100455" y="2917190"/>
+            <a:ext cx="4363720" cy="2812415"/>
+          </a:xfrm>
+          <a:prstGeom prst="rect">
+            <a:avLst/>
+          </a:prstGeom>
+        </p:spPr>
+      </p:pic>
       <p:pic>
         <p:nvPicPr>
           <p:cNvPr id="8" name="Рисунок 7"/>
@@ -4667,7 +6133,7 @@
           <p:nvPr/>
         </p:nvPicPr>
         <p:blipFill>
-          <a:blip r:embed="rId3"/>
+          <a:blip r:embed="rId4"/>
           <a:stretch>
             <a:fillRect/>
           </a:stretch>
@@ -4676,6 +6142,268 @@
           <a:xfrm>
             <a:off x="8904586" y="5499849"/>
             <a:ext cx="1594580" cy="679657"/>
+          </a:xfrm>
+          <a:prstGeom prst="rect">
+            <a:avLst/>
+          </a:prstGeom>
+        </p:spPr>
+      </p:pic>
+      <p:sp>
+        <p:nvSpPr>
+          <p:cNvPr id="5" name="Текстовое поле 4"/>
+          <p:cNvSpPr txBox="1"/>
+          <p:nvPr/>
+        </p:nvSpPr>
+        <p:spPr>
+          <a:xfrm>
+            <a:off x="1100455" y="1936115"/>
+            <a:ext cx="4364355" cy="922020"/>
+          </a:xfrm>
+          <a:prstGeom prst="rect">
+            <a:avLst/>
+          </a:prstGeom>
+          <a:noFill/>
+        </p:spPr>
+        <p:txBody>
+          <a:bodyPr wrap="square" rtlCol="0">
+            <a:spAutoFit/>
+          </a:bodyPr>
+          <a:p>
+            <a:pPr algn="ctr"/>
+            <a:r>
+              <a:rPr lang="ru-RU" altLang="ru-RU"/>
+              <a:t>Центральный объект должен был быть тёмного цвета, но к нему не применились общие стили</a:t>
+            </a:r>
+            <a:endParaRPr lang="ru-RU" altLang="ru-RU"/>
+          </a:p>
+        </p:txBody>
+      </p:sp>
+      <p:sp>
+        <p:nvSpPr>
+          <p:cNvPr id="7" name="Текстовое поле 6"/>
+          <p:cNvSpPr txBox="1"/>
+          <p:nvPr/>
+        </p:nvSpPr>
+        <p:spPr>
+          <a:xfrm>
+            <a:off x="6475095" y="1936115"/>
+            <a:ext cx="5287010" cy="1233805"/>
+          </a:xfrm>
+          <a:prstGeom prst="rect">
+            <a:avLst/>
+          </a:prstGeom>
+          <a:noFill/>
+        </p:spPr>
+        <p:txBody>
+          <a:bodyPr wrap="square" rtlCol="0">
+            <a:noAutofit/>
+          </a:bodyPr>
+          <a:p>
+            <a:pPr algn="l"/>
+            <a:r>
+              <a:rPr lang="en-US" altLang="en-US" sz="1400"/>
+              <a:t>Решение</a:t>
+            </a:r>
+            <a:r>
+              <a:rPr lang="en-US" altLang="ru-RU" sz="1400"/>
+              <a:t>: </a:t>
+            </a:r>
+            <a:r>
+              <a:rPr lang="en-US" altLang="en-US" sz="1400"/>
+              <a:t>В</a:t>
+            </a:r>
+            <a:r>
+              <a:rPr lang="en-US" altLang="ru-RU" sz="1400"/>
+              <a:t> </a:t>
+            </a:r>
+            <a:r>
+              <a:rPr lang="en-US" altLang="en-US" sz="1400"/>
+              <a:t>файл</a:t>
+            </a:r>
+            <a:r>
+              <a:rPr lang="en-US" altLang="ru-RU" sz="1400"/>
+              <a:t> </a:t>
+            </a:r>
+            <a:r>
+              <a:rPr lang="en-US" altLang="en-US" sz="1400"/>
+              <a:t>стилей</a:t>
+            </a:r>
+            <a:r>
+              <a:rPr lang="en-US" altLang="ru-RU" sz="1400"/>
+              <a:t> DarkTheme.xaml </a:t>
+            </a:r>
+            <a:r>
+              <a:rPr lang="en-US" altLang="en-US" sz="1400"/>
+              <a:t>добавлен</a:t>
+            </a:r>
+            <a:r>
+              <a:rPr lang="en-US" altLang="ru-RU" sz="1400"/>
+              <a:t> </a:t>
+            </a:r>
+            <a:r>
+              <a:rPr lang="en-US" altLang="en-US" sz="1400"/>
+              <a:t>стиль</a:t>
+            </a:r>
+            <a:r>
+              <a:rPr lang="en-US" altLang="ru-RU" sz="1400"/>
+              <a:t> </a:t>
+            </a:r>
+            <a:r>
+              <a:rPr lang="en-US" altLang="en-US" sz="1400"/>
+              <a:t>для</a:t>
+            </a:r>
+            <a:r>
+              <a:rPr lang="en-US" altLang="ru-RU" sz="1400"/>
+              <a:t> UserControl. </a:t>
+            </a:r>
+            <a:r>
+              <a:rPr lang="en-US" altLang="en-US" sz="1400"/>
+              <a:t>Во</a:t>
+            </a:r>
+            <a:r>
+              <a:rPr lang="en-US" altLang="ru-RU" sz="1400"/>
+              <a:t> </a:t>
+            </a:r>
+            <a:r>
+              <a:rPr lang="en-US" altLang="en-US" sz="1400"/>
+              <a:t>все</a:t>
+            </a:r>
+            <a:r>
+              <a:rPr lang="en-US" altLang="ru-RU" sz="1400"/>
+              <a:t> </a:t>
+            </a:r>
+            <a:r>
+              <a:rPr lang="en-US" altLang="en-US" sz="1400"/>
+              <a:t>проблемные</a:t>
+            </a:r>
+            <a:r>
+              <a:rPr lang="en-US" altLang="ru-RU" sz="1400"/>
+              <a:t> </a:t>
+            </a:r>
+            <a:r>
+              <a:rPr lang="en-US" altLang="en-US" sz="1400"/>
+              <a:t>окна</a:t>
+            </a:r>
+            <a:r>
+              <a:rPr lang="en-US" altLang="ru-RU" sz="1400"/>
+              <a:t> </a:t>
+            </a:r>
+            <a:r>
+              <a:rPr lang="en-US" altLang="en-US" sz="1400"/>
+              <a:t>добавлены</a:t>
+            </a:r>
+            <a:r>
+              <a:rPr lang="en-US" altLang="ru-RU" sz="1400"/>
+              <a:t> </a:t>
+            </a:r>
+            <a:r>
+              <a:rPr lang="en-US" altLang="en-US" sz="1400"/>
+              <a:t>атрибуты</a:t>
+            </a:r>
+            <a:r>
+              <a:rPr lang="en-US" altLang="ru-RU" sz="1400"/>
+              <a:t> Background="{DynamicResource MainBackground}"</a:t>
+            </a:r>
+            <a:r>
+              <a:rPr lang="ru-RU" altLang="ru-RU" sz="1400"/>
+              <a:t>, также добавлены стили под прочие элементы</a:t>
+            </a:r>
+            <a:r>
+              <a:rPr lang="en-US" altLang="ru-RU" sz="1400"/>
+              <a:t>. </a:t>
+            </a:r>
+            <a:r>
+              <a:rPr lang="en-US" altLang="en-US" sz="1400"/>
+              <a:t>Теперь</a:t>
+            </a:r>
+            <a:r>
+              <a:rPr lang="en-US" altLang="ru-RU" sz="1400"/>
+              <a:t> </a:t>
+            </a:r>
+            <a:r>
+              <a:rPr lang="en-US" altLang="en-US" sz="1400"/>
+              <a:t>тёмная</a:t>
+            </a:r>
+            <a:r>
+              <a:rPr lang="en-US" altLang="ru-RU" sz="1400"/>
+              <a:t> </a:t>
+            </a:r>
+            <a:r>
+              <a:rPr lang="en-US" altLang="en-US" sz="1400"/>
+              <a:t>тема</a:t>
+            </a:r>
+            <a:r>
+              <a:rPr lang="en-US" altLang="ru-RU" sz="1400"/>
+              <a:t> </a:t>
+            </a:r>
+            <a:r>
+              <a:rPr lang="en-US" altLang="en-US" sz="1400"/>
+              <a:t>применяется</a:t>
+            </a:r>
+            <a:r>
+              <a:rPr lang="en-US" altLang="ru-RU" sz="1400"/>
+              <a:t> </a:t>
+            </a:r>
+            <a:r>
+              <a:rPr lang="en-US" altLang="en-US" sz="1400"/>
+              <a:t>ко</a:t>
+            </a:r>
+            <a:r>
+              <a:rPr lang="en-US" altLang="ru-RU" sz="1400"/>
+              <a:t> </a:t>
+            </a:r>
+            <a:r>
+              <a:rPr lang="en-US" altLang="en-US" sz="1400"/>
+              <a:t>всем</a:t>
+            </a:r>
+            <a:r>
+              <a:rPr lang="en-US" altLang="ru-RU" sz="1400"/>
+              <a:t> </a:t>
+            </a:r>
+            <a:r>
+              <a:rPr lang="en-US" altLang="en-US" sz="1400"/>
+              <a:t>элементам</a:t>
+            </a:r>
+            <a:r>
+              <a:rPr lang="en-US" altLang="ru-RU" sz="1400"/>
+              <a:t> </a:t>
+            </a:r>
+            <a:r>
+              <a:rPr lang="en-US" altLang="en-US" sz="1400"/>
+              <a:t>приложения</a:t>
+            </a:r>
+            <a:r>
+              <a:rPr lang="en-US" altLang="ru-RU" sz="1400"/>
+              <a:t>.</a:t>
+            </a:r>
+            <a:endParaRPr lang="en-US" altLang="ru-RU" sz="1400"/>
+          </a:p>
+          <a:p>
+            <a:endParaRPr lang="en-US" altLang="ru-RU" sz="1400"/>
+          </a:p>
+          <a:p>
+            <a:endParaRPr lang="en-US" altLang="ru-RU" sz="1400"/>
+          </a:p>
+        </p:txBody>
+      </p:sp>
+      <p:pic>
+        <p:nvPicPr>
+          <p:cNvPr id="10" name="Изображение 9"/>
+          <p:cNvPicPr>
+            <a:picLocks noChangeAspect="1"/>
+          </p:cNvPicPr>
+          <p:nvPr/>
+        </p:nvPicPr>
+        <p:blipFill>
+          <a:blip r:embed="rId5"/>
+          <a:stretch>
+            <a:fillRect/>
+          </a:stretch>
+        </p:blipFill>
+        <p:spPr>
+          <a:xfrm>
+            <a:off x="6856730" y="3169920"/>
+            <a:ext cx="4124325" cy="714375"/>
           </a:xfrm>
           <a:prstGeom prst="rect">
             <a:avLst/>
@@ -4762,6 +6490,606 @@
             <a:spLocks noGrp="1"/>
           </p:cNvSpPr>
           <p:nvPr>
+            <p:ph type="title"/>
+          </p:nvPr>
+        </p:nvSpPr>
+        <p:spPr>
+          <a:xfrm>
+            <a:off x="2088164" y="286603"/>
+            <a:ext cx="9067515" cy="1450757"/>
+          </a:xfrm>
+        </p:spPr>
+        <p:txBody>
+          <a:bodyPr/>
+          <a:lstStyle/>
+          <a:p>
+            <a:r>
+              <a:rPr lang="ru-RU" dirty="0"/>
+              <a:t>Дефект 3</a:t>
+            </a:r>
+            <a:endParaRPr lang="ru-RU" dirty="0"/>
+          </a:p>
+        </p:txBody>
+      </p:sp>
+      <p:pic>
+        <p:nvPicPr>
+          <p:cNvPr id="4" name="Замещающее содержимое 3"/>
+          <p:cNvPicPr>
+            <a:picLocks noChangeAspect="1"/>
+          </p:cNvPicPr>
+          <p:nvPr>
+            <p:ph idx="1"/>
+          </p:nvPr>
+        </p:nvPicPr>
+        <p:blipFill>
+          <a:blip r:embed="rId3"/>
+          <a:stretch>
+            <a:fillRect/>
+          </a:stretch>
+        </p:blipFill>
+        <p:spPr>
+          <a:xfrm>
+            <a:off x="914400" y="3024505"/>
+            <a:ext cx="5181600" cy="1228725"/>
+          </a:xfrm>
+          <a:prstGeom prst="rect">
+            <a:avLst/>
+          </a:prstGeom>
+        </p:spPr>
+      </p:pic>
+      <p:pic>
+        <p:nvPicPr>
+          <p:cNvPr id="8" name="Рисунок 7"/>
+          <p:cNvPicPr>
+            <a:picLocks noChangeAspect="1"/>
+          </p:cNvPicPr>
+          <p:nvPr/>
+        </p:nvPicPr>
+        <p:blipFill>
+          <a:blip r:embed="rId4"/>
+          <a:stretch>
+            <a:fillRect/>
+          </a:stretch>
+        </p:blipFill>
+        <p:spPr>
+          <a:xfrm>
+            <a:off x="8904586" y="5499849"/>
+            <a:ext cx="1594580" cy="679657"/>
+          </a:xfrm>
+          <a:prstGeom prst="rect">
+            <a:avLst/>
+          </a:prstGeom>
+        </p:spPr>
+      </p:pic>
+      <p:sp>
+        <p:nvSpPr>
+          <p:cNvPr id="5" name="Текстовое поле 4"/>
+          <p:cNvSpPr txBox="1"/>
+          <p:nvPr/>
+        </p:nvSpPr>
+        <p:spPr>
+          <a:xfrm>
+            <a:off x="914400" y="2309495"/>
+            <a:ext cx="5181600" cy="645160"/>
+          </a:xfrm>
+          <a:prstGeom prst="rect">
+            <a:avLst/>
+          </a:prstGeom>
+          <a:noFill/>
+        </p:spPr>
+        <p:txBody>
+          <a:bodyPr wrap="square" rtlCol="0">
+            <a:spAutoFit/>
+          </a:bodyPr>
+          <a:p>
+            <a:pPr algn="ctr"/>
+            <a:r>
+              <a:rPr lang="ru-RU" altLang="en-US"/>
+              <a:t>Код не видит созданные «окна», в следствие чего код даже не компилируется</a:t>
+            </a:r>
+            <a:endParaRPr lang="ru-RU" altLang="en-US"/>
+          </a:p>
+        </p:txBody>
+      </p:sp>
+      <p:sp>
+        <p:nvSpPr>
+          <p:cNvPr id="7" name="Текстовое поле 6"/>
+          <p:cNvSpPr txBox="1"/>
+          <p:nvPr/>
+        </p:nvSpPr>
+        <p:spPr>
+          <a:xfrm>
+            <a:off x="6962775" y="2032635"/>
+            <a:ext cx="4805680" cy="737235"/>
+          </a:xfrm>
+          <a:prstGeom prst="rect">
+            <a:avLst/>
+          </a:prstGeom>
+          <a:noFill/>
+        </p:spPr>
+        <p:txBody>
+          <a:bodyPr wrap="square" rtlCol="0">
+            <a:spAutoFit/>
+          </a:bodyPr>
+          <a:p>
+            <a:r>
+              <a:rPr lang="ru-RU" altLang="en-US" sz="1400"/>
+              <a:t>Решение</a:t>
+            </a:r>
+            <a:r>
+              <a:rPr lang="en-US" altLang="en-US" sz="1400"/>
+              <a:t>: </a:t>
+            </a:r>
+            <a:r>
+              <a:rPr lang="ru-RU" altLang="en-US" sz="1400"/>
+              <a:t>д</a:t>
+            </a:r>
+            <a:r>
+              <a:rPr lang="en-US" altLang="en-US" sz="1400"/>
+              <a:t>обавлены</a:t>
+            </a:r>
+            <a:r>
+              <a:rPr lang="en-US" altLang="ru-RU" sz="1400"/>
+              <a:t> </a:t>
+            </a:r>
+            <a:r>
+              <a:rPr lang="en-US" altLang="en-US" sz="1400"/>
+              <a:t>пустые</a:t>
+            </a:r>
+            <a:r>
+              <a:rPr lang="en-US" altLang="ru-RU" sz="1400"/>
+              <a:t> </a:t>
+            </a:r>
+            <a:r>
+              <a:rPr lang="en-US" altLang="en-US" sz="1400"/>
+              <a:t>конструкторы</a:t>
+            </a:r>
+            <a:r>
+              <a:rPr lang="en-US" altLang="ru-RU" sz="1400"/>
+              <a:t> </a:t>
+            </a:r>
+            <a:r>
+              <a:rPr lang="en-US" altLang="en-US" sz="1400"/>
+              <a:t>для</a:t>
+            </a:r>
+            <a:r>
+              <a:rPr lang="en-US" altLang="ru-RU" sz="1400"/>
+              <a:t> </a:t>
+            </a:r>
+            <a:r>
+              <a:rPr lang="en-US" altLang="en-US" sz="1400"/>
+              <a:t>корректной</a:t>
+            </a:r>
+            <a:r>
+              <a:rPr lang="en-US" altLang="ru-RU" sz="1400"/>
+              <a:t> </a:t>
+            </a:r>
+            <a:r>
+              <a:rPr lang="en-US" altLang="en-US" sz="1400"/>
+              <a:t>работы</a:t>
+            </a:r>
+            <a:r>
+              <a:rPr lang="en-US" altLang="ru-RU" sz="1400"/>
+              <a:t> </a:t>
+            </a:r>
+            <a:r>
+              <a:rPr lang="en-US" altLang="en-US" sz="1400"/>
+              <a:t>дизайнера</a:t>
+            </a:r>
+            <a:r>
+              <a:rPr lang="en-US" altLang="ru-RU" sz="1400"/>
+              <a:t> XAML. </a:t>
+            </a:r>
+            <a:r>
+              <a:rPr lang="en-US" altLang="en-US" sz="1400"/>
+              <a:t>Вместо</a:t>
+            </a:r>
+            <a:r>
+              <a:rPr lang="en-US" altLang="ru-RU" sz="1400"/>
+              <a:t> </a:t>
+            </a:r>
+            <a:r>
+              <a:rPr lang="en-US" altLang="en-US" sz="1400"/>
+              <a:t>прямых</a:t>
+            </a:r>
+            <a:r>
+              <a:rPr lang="en-US" altLang="ru-RU" sz="1400"/>
+              <a:t> </a:t>
+            </a:r>
+            <a:r>
+              <a:rPr lang="en-US" altLang="en-US" sz="1400"/>
+              <a:t>ссылок</a:t>
+            </a:r>
+            <a:r>
+              <a:rPr lang="en-US" altLang="ru-RU" sz="1400"/>
+              <a:t> </a:t>
+            </a:r>
+            <a:r>
+              <a:rPr lang="en-US" altLang="en-US" sz="1400"/>
+              <a:t>в</a:t>
+            </a:r>
+            <a:r>
+              <a:rPr lang="en-US" altLang="ru-RU" sz="1400"/>
+              <a:t> XAML </a:t>
+            </a:r>
+            <a:r>
+              <a:rPr lang="en-US" altLang="en-US" sz="1400"/>
+              <a:t>контролы</a:t>
+            </a:r>
+            <a:r>
+              <a:rPr lang="en-US" altLang="ru-RU" sz="1400"/>
+              <a:t> </a:t>
+            </a:r>
+            <a:r>
+              <a:rPr lang="en-US" altLang="en-US" sz="1400"/>
+              <a:t>создаются</a:t>
+            </a:r>
+            <a:r>
+              <a:rPr lang="en-US" altLang="ru-RU" sz="1400"/>
+              <a:t> </a:t>
+            </a:r>
+            <a:r>
+              <a:rPr lang="en-US" altLang="en-US" sz="1400"/>
+              <a:t>динамически</a:t>
+            </a:r>
+            <a:r>
+              <a:rPr lang="en-US" altLang="ru-RU" sz="1400"/>
+              <a:t> </a:t>
+            </a:r>
+            <a:r>
+              <a:rPr lang="en-US" altLang="en-US" sz="1400"/>
+              <a:t>в</a:t>
+            </a:r>
+            <a:r>
+              <a:rPr lang="en-US" altLang="ru-RU" sz="1400"/>
+              <a:t> </a:t>
+            </a:r>
+            <a:r>
+              <a:rPr lang="en-US" altLang="en-US" sz="1400"/>
+              <a:t>коде</a:t>
+            </a:r>
+            <a:r>
+              <a:rPr lang="en-US" altLang="ru-RU" sz="1400"/>
+              <a:t> </a:t>
+            </a:r>
+            <a:r>
+              <a:rPr lang="en-US" altLang="en-US" sz="1400"/>
+              <a:t>через</a:t>
+            </a:r>
+            <a:r>
+              <a:rPr lang="en-US" altLang="ru-RU" sz="1400"/>
+              <a:t> FleetControl.</a:t>
+            </a:r>
+            <a:endParaRPr lang="en-US" altLang="ru-RU" sz="1400"/>
+          </a:p>
+        </p:txBody>
+      </p:sp>
+      <p:pic>
+        <p:nvPicPr>
+          <p:cNvPr id="10" name="Изображение 9"/>
+          <p:cNvPicPr>
+            <a:picLocks noChangeAspect="1"/>
+          </p:cNvPicPr>
+          <p:nvPr/>
+        </p:nvPicPr>
+        <p:blipFill>
+          <a:blip r:embed="rId5"/>
+          <a:stretch>
+            <a:fillRect/>
+          </a:stretch>
+        </p:blipFill>
+        <p:spPr>
+          <a:xfrm>
+            <a:off x="7650480" y="2954655"/>
+            <a:ext cx="3505200" cy="895350"/>
+          </a:xfrm>
+          <a:prstGeom prst="rect">
+            <a:avLst/>
+          </a:prstGeom>
+        </p:spPr>
+      </p:pic>
+      <p:pic>
+        <p:nvPicPr>
+          <p:cNvPr id="11" name="Изображение 10"/>
+          <p:cNvPicPr>
+            <a:picLocks noChangeAspect="1"/>
+          </p:cNvPicPr>
+          <p:nvPr/>
+        </p:nvPicPr>
+        <p:blipFill>
+          <a:blip r:embed="rId6"/>
+          <a:stretch>
+            <a:fillRect/>
+          </a:stretch>
+        </p:blipFill>
+        <p:spPr>
+          <a:xfrm>
+            <a:off x="7333615" y="4034790"/>
+            <a:ext cx="4139565" cy="744220"/>
+          </a:xfrm>
+          <a:prstGeom prst="rect">
+            <a:avLst/>
+          </a:prstGeom>
+        </p:spPr>
+      </p:pic>
+    </p:spTree>
+  </p:cSld>
+  <p:clrMapOvr>
+    <a:masterClrMapping/>
+  </p:clrMapOvr>
+</p:sld>
+</file>
+
+<file path=ppt/slides/slide16.xml><?xml version="1.0" encoding="utf-8"?>
+<p:sld xmlns:a="http://schemas.openxmlformats.org/drawingml/2006/main" xmlns:r="http://schemas.openxmlformats.org/officeDocument/2006/relationships" xmlns:p="http://schemas.openxmlformats.org/presentationml/2006/main">
+  <p:cSld>
+    <p:spTree>
+      <p:nvGrpSpPr>
+        <p:cNvPr id="1" name=""/>
+        <p:cNvGrpSpPr/>
+        <p:nvPr/>
+      </p:nvGrpSpPr>
+      <p:grpSpPr>
+        <a:xfrm>
+          <a:off x="0" y="0"/>
+          <a:ext cx="0" cy="0"/>
+          <a:chOff x="0" y="0"/>
+          <a:chExt cx="0" cy="0"/>
+        </a:xfrm>
+      </p:grpSpPr>
+      <p:pic>
+        <p:nvPicPr>
+          <p:cNvPr id="6" name="Рисунок 5"/>
+          <p:cNvPicPr>
+            <a:picLocks noChangeAspect="1"/>
+          </p:cNvPicPr>
+          <p:nvPr/>
+        </p:nvPicPr>
+        <p:blipFill>
+          <a:blip r:embed="rId1"/>
+          <a:stretch>
+            <a:fillRect/>
+          </a:stretch>
+        </p:blipFill>
+        <p:spPr>
+          <a:xfrm>
+            <a:off x="10710505" y="5259143"/>
+            <a:ext cx="1051843" cy="920363"/>
+          </a:xfrm>
+          <a:prstGeom prst="rect">
+            <a:avLst/>
+          </a:prstGeom>
+        </p:spPr>
+      </p:pic>
+      <p:pic>
+        <p:nvPicPr>
+          <p:cNvPr id="9" name="Рисунок 8"/>
+          <p:cNvPicPr>
+            <a:picLocks noChangeAspect="1"/>
+          </p:cNvPicPr>
+          <p:nvPr/>
+        </p:nvPicPr>
+        <p:blipFill>
+          <a:blip r:embed="rId2"/>
+          <a:stretch>
+            <a:fillRect/>
+          </a:stretch>
+        </p:blipFill>
+        <p:spPr>
+          <a:xfrm>
+            <a:off x="268640" y="232088"/>
+            <a:ext cx="1535362" cy="1303234"/>
+          </a:xfrm>
+          <a:prstGeom prst="rect">
+            <a:avLst/>
+          </a:prstGeom>
+        </p:spPr>
+      </p:pic>
+      <p:sp>
+        <p:nvSpPr>
+          <p:cNvPr id="2" name="Заголовок 1"/>
+          <p:cNvSpPr>
+            <a:spLocks noGrp="1"/>
+          </p:cNvSpPr>
+          <p:nvPr>
+            <p:ph type="title"/>
+          </p:nvPr>
+        </p:nvSpPr>
+        <p:spPr>
+          <a:xfrm>
+            <a:off x="2088164" y="286603"/>
+            <a:ext cx="9067515" cy="1450757"/>
+          </a:xfrm>
+        </p:spPr>
+        <p:txBody>
+          <a:bodyPr/>
+          <a:lstStyle/>
+          <a:p>
+            <a:r>
+              <a:rPr lang="ru-RU" dirty="0"/>
+              <a:t>Заключение</a:t>
+            </a:r>
+            <a:endParaRPr lang="ru-RU" dirty="0"/>
+          </a:p>
+        </p:txBody>
+      </p:sp>
+      <p:sp>
+        <p:nvSpPr>
+          <p:cNvPr id="3" name="Объект 2"/>
+          <p:cNvSpPr>
+            <a:spLocks noGrp="1"/>
+          </p:cNvSpPr>
+          <p:nvPr>
+            <p:ph idx="1"/>
+          </p:nvPr>
+        </p:nvSpPr>
+        <p:spPr/>
+        <p:txBody>
+          <a:bodyPr/>
+          <a:lstStyle/>
+          <a:p>
+            <a:r>
+              <a:rPr lang="ru-RU" dirty="0"/>
+              <a:t>В ходе работы были сформулированы и решены следующие проблемы:</a:t>
+            </a:r>
+            <a:endParaRPr lang="ru-RU" dirty="0"/>
+          </a:p>
+          <a:p>
+            <a:r>
+              <a:rPr lang="ru-RU" dirty="0"/>
+              <a:t>- Обосновать разработку автоматизированной системы для рыболовной фирмы;</a:t>
+            </a:r>
+            <a:endParaRPr lang="ru-RU" dirty="0"/>
+          </a:p>
+          <a:p>
+            <a:r>
+              <a:rPr lang="ru-RU" dirty="0"/>
+              <a:t>- Разработать автоматизированную систему для </a:t>
+            </a:r>
+            <a:r>
+              <a:rPr lang="ru-RU" dirty="0">
+                <a:sym typeface="+mn-ea"/>
+              </a:rPr>
+              <a:t>рыболовной фирмы</a:t>
+            </a:r>
+            <a:r>
+              <a:rPr lang="ru-RU" dirty="0"/>
+              <a:t>;</a:t>
+            </a:r>
+            <a:endParaRPr lang="ru-RU" dirty="0"/>
+          </a:p>
+          <a:p>
+            <a:r>
+              <a:rPr lang="ru-RU" dirty="0"/>
+              <a:t>- Определить технологию настройки, установки и сопровождения системы для рыболовной фирмы.</a:t>
+            </a:r>
+            <a:endParaRPr lang="ru-RU" dirty="0"/>
+          </a:p>
+          <a:p>
+            <a:endParaRPr lang="ru-RU" dirty="0"/>
+          </a:p>
+          <a:p>
+            <a:r>
+              <a:rPr lang="ru-RU" dirty="0"/>
+              <a:t>Курсовая работа выполнена в соответствии с методическими рекомендациями. Цель курсовой работы достигнута.</a:t>
+            </a:r>
+            <a:endParaRPr lang="ru-RU" dirty="0"/>
+          </a:p>
+          <a:p>
+            <a:endParaRPr lang="ru-RU" dirty="0"/>
+          </a:p>
+          <a:p>
+            <a:endParaRPr lang="ru-RU" dirty="0"/>
+          </a:p>
+          <a:p>
+            <a:endParaRPr lang="ru-RU" dirty="0"/>
+          </a:p>
+        </p:txBody>
+      </p:sp>
+      <p:pic>
+        <p:nvPicPr>
+          <p:cNvPr id="8" name="Рисунок 7"/>
+          <p:cNvPicPr>
+            <a:picLocks noChangeAspect="1"/>
+          </p:cNvPicPr>
+          <p:nvPr/>
+        </p:nvPicPr>
+        <p:blipFill>
+          <a:blip r:embed="rId3"/>
+          <a:stretch>
+            <a:fillRect/>
+          </a:stretch>
+        </p:blipFill>
+        <p:spPr>
+          <a:xfrm>
+            <a:off x="8904586" y="5499849"/>
+            <a:ext cx="1594580" cy="679657"/>
+          </a:xfrm>
+          <a:prstGeom prst="rect">
+            <a:avLst/>
+          </a:prstGeom>
+        </p:spPr>
+      </p:pic>
+    </p:spTree>
+  </p:cSld>
+  <p:clrMapOvr>
+    <a:masterClrMapping/>
+  </p:clrMapOvr>
+</p:sld>
+</file>
+
+<file path=ppt/slides/slide17.xml><?xml version="1.0" encoding="utf-8"?>
+<p:sld xmlns:a="http://schemas.openxmlformats.org/drawingml/2006/main" xmlns:r="http://schemas.openxmlformats.org/officeDocument/2006/relationships" xmlns:p="http://schemas.openxmlformats.org/presentationml/2006/main">
+  <p:cSld>
+    <p:spTree>
+      <p:nvGrpSpPr>
+        <p:cNvPr id="1" name=""/>
+        <p:cNvGrpSpPr/>
+        <p:nvPr/>
+      </p:nvGrpSpPr>
+      <p:grpSpPr>
+        <a:xfrm>
+          <a:off x="0" y="0"/>
+          <a:ext cx="0" cy="0"/>
+          <a:chOff x="0" y="0"/>
+          <a:chExt cx="0" cy="0"/>
+        </a:xfrm>
+      </p:grpSpPr>
+      <p:pic>
+        <p:nvPicPr>
+          <p:cNvPr id="6" name="Рисунок 5"/>
+          <p:cNvPicPr>
+            <a:picLocks noChangeAspect="1"/>
+          </p:cNvPicPr>
+          <p:nvPr/>
+        </p:nvPicPr>
+        <p:blipFill>
+          <a:blip r:embed="rId1"/>
+          <a:stretch>
+            <a:fillRect/>
+          </a:stretch>
+        </p:blipFill>
+        <p:spPr>
+          <a:xfrm>
+            <a:off x="10710505" y="5259143"/>
+            <a:ext cx="1051843" cy="920363"/>
+          </a:xfrm>
+          <a:prstGeom prst="rect">
+            <a:avLst/>
+          </a:prstGeom>
+        </p:spPr>
+      </p:pic>
+      <p:pic>
+        <p:nvPicPr>
+          <p:cNvPr id="9" name="Рисунок 8"/>
+          <p:cNvPicPr>
+            <a:picLocks noChangeAspect="1"/>
+          </p:cNvPicPr>
+          <p:nvPr/>
+        </p:nvPicPr>
+        <p:blipFill>
+          <a:blip r:embed="rId2"/>
+          <a:stretch>
+            <a:fillRect/>
+          </a:stretch>
+        </p:blipFill>
+        <p:spPr>
+          <a:xfrm>
+            <a:off x="268640" y="232088"/>
+            <a:ext cx="1535362" cy="1303234"/>
+          </a:xfrm>
+          <a:prstGeom prst="rect">
+            <a:avLst/>
+          </a:prstGeom>
+        </p:spPr>
+      </p:pic>
+      <p:sp>
+        <p:nvSpPr>
+          <p:cNvPr id="2" name="Заголовок 1"/>
+          <p:cNvSpPr>
+            <a:spLocks noGrp="1"/>
+          </p:cNvSpPr>
+          <p:nvPr>
             <p:ph type="ctrTitle"/>
           </p:nvPr>
         </p:nvSpPr>
@@ -5329,266 +7657,270 @@
             <a:endParaRPr lang="en-US" altLang="ru-RU" sz="5600" dirty="0"/>
           </a:p>
           <a:p>
-            <a:pPr marL="320040" indent="-228600" fontAlgn="auto">
+            <a:pPr marL="834390" lvl="1" indent="-285750" fontAlgn="auto">
               <a:lnSpc>
                 <a:spcPct val="100000"/>
               </a:lnSpc>
-              <a:buAutoNum type="arabicPeriod"/>
+              <a:buFont typeface="Wingdings" panose="05000000000000000000" charset="0"/>
+              <a:buChar char="Ø"/>
             </a:pPr>
             <a:r>
-              <a:rPr lang="en-US" altLang="en-US" sz="5600" dirty="0"/>
+              <a:rPr lang="en-US" altLang="en-US" sz="5040" dirty="0"/>
               <a:t>для</a:t>
             </a:r>
             <a:r>
-              <a:rPr lang="en-US" altLang="ru-RU" sz="5600" dirty="0"/>
-              <a:t> </a:t>
-            </a:r>
-            <a:r>
-              <a:rPr lang="en-US" altLang="en-US" sz="5600" dirty="0"/>
+              <a:rPr lang="en-US" altLang="ru-RU" sz="5040" dirty="0"/>
+              <a:t> </a:t>
+            </a:r>
+            <a:r>
+              <a:rPr lang="en-US" altLang="en-US" sz="5040" dirty="0"/>
               <a:t>каждого</a:t>
             </a:r>
             <a:r>
-              <a:rPr lang="en-US" altLang="ru-RU" sz="5600" dirty="0"/>
-              <a:t> </a:t>
-            </a:r>
-            <a:r>
-              <a:rPr lang="en-US" altLang="en-US" sz="5600" dirty="0"/>
+              <a:rPr lang="en-US" altLang="ru-RU" sz="5040" dirty="0"/>
+              <a:t> </a:t>
+            </a:r>
+            <a:r>
+              <a:rPr lang="en-US" altLang="en-US" sz="5040" dirty="0"/>
               <a:t>катера</a:t>
             </a:r>
             <a:r>
-              <a:rPr lang="en-US" altLang="ru-RU" sz="5600" dirty="0"/>
+              <a:rPr lang="en-US" altLang="ru-RU" sz="5040" dirty="0"/>
               <a:t> – </a:t>
             </a:r>
             <a:r>
-              <a:rPr lang="en-US" altLang="en-US" sz="5600" dirty="0"/>
+              <a:rPr lang="en-US" altLang="en-US" sz="5040" dirty="0"/>
               <a:t>даты</a:t>
             </a:r>
             <a:r>
-              <a:rPr lang="en-US" altLang="ru-RU" sz="5600" dirty="0"/>
-              <a:t> </a:t>
-            </a:r>
-            <a:r>
-              <a:rPr lang="en-US" altLang="en-US" sz="5600" dirty="0"/>
+              <a:rPr lang="en-US" altLang="ru-RU" sz="5040" dirty="0"/>
+              <a:t> </a:t>
+            </a:r>
+            <a:r>
+              <a:rPr lang="en-US" altLang="en-US" sz="5040" dirty="0"/>
               <a:t>выхода</a:t>
             </a:r>
             <a:r>
-              <a:rPr lang="en-US" altLang="ru-RU" sz="5600" dirty="0"/>
-              <a:t> </a:t>
-            </a:r>
-            <a:r>
-              <a:rPr lang="en-US" altLang="en-US" sz="5600" dirty="0"/>
+              <a:rPr lang="en-US" altLang="ru-RU" sz="5040" dirty="0"/>
+              <a:t> </a:t>
+            </a:r>
+            <a:r>
+              <a:rPr lang="en-US" altLang="en-US" sz="5040" dirty="0"/>
               <a:t>с</a:t>
             </a:r>
             <a:r>
-              <a:rPr lang="en-US" altLang="ru-RU" sz="5600" dirty="0"/>
-              <a:t> </a:t>
-            </a:r>
-            <a:r>
-              <a:rPr lang="en-US" altLang="en-US" sz="5600" dirty="0"/>
+              <a:rPr lang="en-US" altLang="ru-RU" sz="5040" dirty="0"/>
+              <a:t> </a:t>
+            </a:r>
+            <a:r>
+              <a:rPr lang="en-US" altLang="en-US" sz="5040" dirty="0"/>
               <a:t>указанием</a:t>
             </a:r>
             <a:r>
-              <a:rPr lang="en-US" altLang="ru-RU" sz="5600" dirty="0"/>
-              <a:t> </a:t>
-            </a:r>
-            <a:r>
-              <a:rPr lang="en-US" altLang="en-US" sz="5600" dirty="0"/>
+              <a:rPr lang="en-US" altLang="ru-RU" sz="5040" dirty="0"/>
+              <a:t> </a:t>
+            </a:r>
+            <a:r>
+              <a:rPr lang="en-US" altLang="en-US" sz="5040" dirty="0"/>
               <a:t>улова</a:t>
             </a:r>
-            <a:endParaRPr lang="en-US" altLang="ru-RU" sz="5600" dirty="0"/>
-          </a:p>
-          <a:p>
-            <a:pPr marL="320040" indent="-228600" fontAlgn="auto">
+            <a:endParaRPr lang="en-US" altLang="ru-RU" sz="5040" dirty="0"/>
+          </a:p>
+          <a:p>
+            <a:pPr marL="834390" lvl="1" indent="-285750" fontAlgn="auto">
               <a:lnSpc>
                 <a:spcPct val="100000"/>
               </a:lnSpc>
-              <a:buAutoNum type="arabicPeriod"/>
+              <a:buFont typeface="Wingdings" panose="05000000000000000000" charset="0"/>
+              <a:buChar char="Ø"/>
             </a:pPr>
             <a:r>
-              <a:rPr lang="en-US" altLang="en-US" sz="5600" dirty="0"/>
+              <a:rPr lang="en-US" altLang="en-US" sz="5040" dirty="0"/>
               <a:t>для</a:t>
             </a:r>
             <a:r>
-              <a:rPr lang="en-US" altLang="ru-RU" sz="5600" dirty="0"/>
-              <a:t> </a:t>
-            </a:r>
-            <a:r>
-              <a:rPr lang="en-US" altLang="en-US" sz="5600" dirty="0"/>
+              <a:rPr lang="en-US" altLang="ru-RU" sz="5040" dirty="0"/>
+              <a:t> </a:t>
+            </a:r>
+            <a:r>
+              <a:rPr lang="en-US" altLang="en-US" sz="5040" dirty="0"/>
               <a:t>указанного</a:t>
             </a:r>
             <a:r>
-              <a:rPr lang="en-US" altLang="ru-RU" sz="5600" dirty="0"/>
-              <a:t> </a:t>
-            </a:r>
-            <a:r>
-              <a:rPr lang="en-US" altLang="en-US" sz="5600" dirty="0"/>
+              <a:rPr lang="en-US" altLang="ru-RU" sz="5040" dirty="0"/>
+              <a:t> </a:t>
+            </a:r>
+            <a:r>
+              <a:rPr lang="en-US" altLang="en-US" sz="5040" dirty="0"/>
               <a:t>интервала</a:t>
             </a:r>
             <a:r>
-              <a:rPr lang="en-US" altLang="ru-RU" sz="5600" dirty="0"/>
-              <a:t> </a:t>
-            </a:r>
-            <a:r>
-              <a:rPr lang="en-US" altLang="en-US" sz="5600" dirty="0"/>
+              <a:rPr lang="en-US" altLang="ru-RU" sz="5040" dirty="0"/>
+              <a:t> </a:t>
+            </a:r>
+            <a:r>
+              <a:rPr lang="en-US" altLang="en-US" sz="5040" dirty="0"/>
               <a:t>дат</a:t>
             </a:r>
             <a:r>
-              <a:rPr lang="en-US" altLang="ru-RU" sz="5600" dirty="0"/>
+              <a:rPr lang="en-US" altLang="ru-RU" sz="5040" dirty="0"/>
               <a:t> – </a:t>
             </a:r>
             <a:r>
-              <a:rPr lang="en-US" altLang="en-US" sz="5600" dirty="0"/>
+              <a:rPr lang="en-US" altLang="en-US" sz="5040" dirty="0"/>
               <a:t>для</a:t>
             </a:r>
             <a:r>
-              <a:rPr lang="en-US" altLang="ru-RU" sz="5600" dirty="0"/>
-              <a:t> </a:t>
-            </a:r>
-            <a:r>
-              <a:rPr lang="en-US" altLang="en-US" sz="5600" dirty="0"/>
+              <a:rPr lang="en-US" altLang="ru-RU" sz="5040" dirty="0"/>
+              <a:t> </a:t>
+            </a:r>
+            <a:r>
+              <a:rPr lang="en-US" altLang="en-US" sz="5040" dirty="0"/>
               <a:t>каждого</a:t>
             </a:r>
             <a:r>
-              <a:rPr lang="en-US" altLang="ru-RU" sz="5600" dirty="0"/>
-              <a:t> </a:t>
-            </a:r>
-            <a:r>
-              <a:rPr lang="en-US" altLang="en-US" sz="5600" dirty="0"/>
+              <a:rPr lang="en-US" altLang="ru-RU" sz="5040" dirty="0"/>
+              <a:t> </a:t>
+            </a:r>
+            <a:r>
+              <a:rPr lang="en-US" altLang="en-US" sz="5040" dirty="0"/>
               <a:t>сорта</a:t>
             </a:r>
             <a:r>
-              <a:rPr lang="en-US" altLang="ru-RU" sz="5600" dirty="0"/>
-              <a:t> </a:t>
-            </a:r>
-            <a:r>
-              <a:rPr lang="en-US" altLang="en-US" sz="5600" dirty="0"/>
+              <a:rPr lang="en-US" altLang="ru-RU" sz="5040" dirty="0"/>
+              <a:t> </a:t>
+            </a:r>
+            <a:r>
+              <a:rPr lang="en-US" altLang="en-US" sz="5040" dirty="0"/>
               <a:t>рыбы</a:t>
             </a:r>
             <a:r>
-              <a:rPr lang="en-US" altLang="ru-RU" sz="5600" dirty="0"/>
-              <a:t> </a:t>
-            </a:r>
-            <a:r>
-              <a:rPr lang="en-US" altLang="en-US" sz="5600" dirty="0"/>
+              <a:rPr lang="en-US" altLang="ru-RU" sz="5040" dirty="0"/>
+              <a:t> </a:t>
+            </a:r>
+            <a:r>
+              <a:rPr lang="en-US" altLang="en-US" sz="5040" dirty="0"/>
               <a:t>список</a:t>
             </a:r>
             <a:r>
-              <a:rPr lang="en-US" altLang="ru-RU" sz="5600" dirty="0"/>
-              <a:t> </a:t>
-            </a:r>
-            <a:r>
-              <a:rPr lang="en-US" altLang="en-US" sz="5600" dirty="0"/>
+              <a:rPr lang="en-US" altLang="ru-RU" sz="5040" dirty="0"/>
+              <a:t> </a:t>
+            </a:r>
+            <a:r>
+              <a:rPr lang="en-US" altLang="en-US" sz="5040" dirty="0"/>
               <a:t>катеров</a:t>
             </a:r>
             <a:r>
-              <a:rPr lang="en-US" altLang="ru-RU" sz="5600" dirty="0"/>
-              <a:t> </a:t>
-            </a:r>
-            <a:r>
-              <a:rPr lang="en-US" altLang="en-US" sz="5600" dirty="0"/>
+              <a:rPr lang="en-US" altLang="ru-RU" sz="5040" dirty="0"/>
+              <a:t> </a:t>
+            </a:r>
+            <a:r>
+              <a:rPr lang="en-US" altLang="en-US" sz="5040" dirty="0"/>
               <a:t>с</a:t>
             </a:r>
             <a:r>
-              <a:rPr lang="en-US" altLang="ru-RU" sz="5600" dirty="0"/>
-              <a:t> </a:t>
-            </a:r>
-            <a:r>
-              <a:rPr lang="en-US" altLang="en-US" sz="5600" dirty="0"/>
+              <a:rPr lang="en-US" altLang="ru-RU" sz="5040" dirty="0"/>
+              <a:t> </a:t>
+            </a:r>
+            <a:r>
+              <a:rPr lang="en-US" altLang="en-US" sz="5040" dirty="0"/>
               <a:t>наибольшим</a:t>
             </a:r>
             <a:r>
-              <a:rPr lang="en-US" altLang="ru-RU" sz="5600" dirty="0"/>
-              <a:t> </a:t>
-            </a:r>
-            <a:r>
-              <a:rPr lang="en-US" altLang="en-US" sz="5600" dirty="0"/>
+              <a:rPr lang="en-US" altLang="ru-RU" sz="5040" dirty="0"/>
+              <a:t> </a:t>
+            </a:r>
+            <a:r>
+              <a:rPr lang="en-US" altLang="en-US" sz="5040" dirty="0"/>
               <a:t>уловом</a:t>
             </a:r>
-            <a:endParaRPr lang="en-US" altLang="en-US" sz="5600" dirty="0"/>
-          </a:p>
-          <a:p>
-            <a:pPr marL="320040" indent="-228600" fontAlgn="auto">
+            <a:endParaRPr lang="en-US" altLang="en-US" sz="5040" dirty="0"/>
+          </a:p>
+          <a:p>
+            <a:pPr marL="834390" lvl="1" indent="-285750" fontAlgn="auto">
               <a:lnSpc>
                 <a:spcPct val="100000"/>
               </a:lnSpc>
-              <a:buAutoNum type="arabicPeriod"/>
+              <a:buFont typeface="Wingdings" panose="05000000000000000000" charset="0"/>
+              <a:buChar char="Ø"/>
             </a:pPr>
             <a:r>
-              <a:rPr lang="en-US" altLang="en-US" sz="5600" dirty="0"/>
+              <a:rPr lang="en-US" altLang="en-US" sz="5040" dirty="0"/>
               <a:t>для</a:t>
             </a:r>
             <a:r>
-              <a:rPr lang="en-US" altLang="ru-RU" sz="5600" dirty="0"/>
-              <a:t> </a:t>
-            </a:r>
-            <a:r>
-              <a:rPr lang="en-US" altLang="en-US" sz="5600" dirty="0"/>
+              <a:rPr lang="en-US" altLang="ru-RU" sz="5040" dirty="0"/>
+              <a:t> </a:t>
+            </a:r>
+            <a:r>
+              <a:rPr lang="en-US" altLang="en-US" sz="5040" dirty="0"/>
               <a:t>указанного</a:t>
             </a:r>
             <a:r>
-              <a:rPr lang="en-US" altLang="ru-RU" sz="5600" dirty="0"/>
-              <a:t> </a:t>
-            </a:r>
-            <a:r>
-              <a:rPr lang="en-US" altLang="en-US" sz="5600" dirty="0"/>
+              <a:rPr lang="en-US" altLang="ru-RU" sz="5040" dirty="0"/>
+              <a:t> </a:t>
+            </a:r>
+            <a:r>
+              <a:rPr lang="en-US" altLang="en-US" sz="5040" dirty="0"/>
               <a:t>интервала</a:t>
             </a:r>
             <a:r>
-              <a:rPr lang="en-US" altLang="ru-RU" sz="5600" dirty="0"/>
-              <a:t> </a:t>
-            </a:r>
-            <a:r>
-              <a:rPr lang="en-US" altLang="en-US" sz="5600" dirty="0"/>
+              <a:rPr lang="en-US" altLang="ru-RU" sz="5040" dirty="0"/>
+              <a:t> </a:t>
+            </a:r>
+            <a:r>
+              <a:rPr lang="en-US" altLang="en-US" sz="5040" dirty="0"/>
               <a:t>дат</a:t>
             </a:r>
             <a:r>
-              <a:rPr lang="en-US" altLang="ru-RU" sz="5600" dirty="0"/>
+              <a:rPr lang="en-US" altLang="ru-RU" sz="5040" dirty="0"/>
               <a:t> – </a:t>
             </a:r>
             <a:r>
-              <a:rPr lang="en-US" altLang="en-US" sz="5600" dirty="0"/>
+              <a:rPr lang="en-US" altLang="en-US" sz="5040" dirty="0"/>
               <a:t>список</a:t>
             </a:r>
             <a:r>
-              <a:rPr lang="en-US" altLang="ru-RU" sz="5600" dirty="0"/>
-              <a:t> </a:t>
-            </a:r>
-            <a:r>
-              <a:rPr lang="en-US" altLang="en-US" sz="5600" dirty="0"/>
+              <a:rPr lang="en-US" altLang="ru-RU" sz="5040" dirty="0"/>
+              <a:t> </a:t>
+            </a:r>
+            <a:r>
+              <a:rPr lang="en-US" altLang="en-US" sz="5040" dirty="0"/>
               <a:t>банок</a:t>
             </a:r>
             <a:r>
-              <a:rPr lang="en-US" altLang="ru-RU" sz="5600" dirty="0"/>
-              <a:t> </a:t>
-            </a:r>
-            <a:r>
-              <a:rPr lang="en-US" altLang="en-US" sz="5600" dirty="0"/>
+              <a:rPr lang="en-US" altLang="ru-RU" sz="5040" dirty="0"/>
+              <a:t> </a:t>
+            </a:r>
+            <a:r>
+              <a:rPr lang="en-US" altLang="en-US" sz="5040" dirty="0"/>
               <a:t>со</a:t>
             </a:r>
             <a:r>
-              <a:rPr lang="en-US" altLang="ru-RU" sz="5600" dirty="0"/>
-              <a:t> </a:t>
-            </a:r>
-            <a:r>
-              <a:rPr lang="en-US" altLang="en-US" sz="5600" dirty="0"/>
+              <a:rPr lang="en-US" altLang="ru-RU" sz="5040" dirty="0"/>
+              <a:t> </a:t>
+            </a:r>
+            <a:r>
+              <a:rPr lang="en-US" altLang="en-US" sz="5040" dirty="0"/>
               <a:t>средним</a:t>
             </a:r>
             <a:r>
-              <a:rPr lang="en-US" altLang="ru-RU" sz="5600" dirty="0"/>
-              <a:t> </a:t>
-            </a:r>
-            <a:r>
-              <a:rPr lang="en-US" altLang="en-US" sz="5600" dirty="0"/>
+              <a:rPr lang="en-US" altLang="ru-RU" sz="5040" dirty="0"/>
+              <a:t> </a:t>
+            </a:r>
+            <a:r>
+              <a:rPr lang="en-US" altLang="en-US" sz="5040" dirty="0"/>
               <a:t>уловом</a:t>
             </a:r>
-            <a:endParaRPr lang="en-US" altLang="ru-RU" sz="5600" dirty="0"/>
-          </a:p>
-          <a:p>
-            <a:pPr marL="320040" indent="-228600" fontAlgn="auto">
+            <a:endParaRPr lang="en-US" altLang="ru-RU" sz="5040" dirty="0"/>
+          </a:p>
+          <a:p>
+            <a:pPr marL="434340" indent="-342900" fontAlgn="auto">
               <a:lnSpc>
                 <a:spcPct val="100000"/>
               </a:lnSpc>
-              <a:buAutoNum type="arabicPeriod"/>
+              <a:buFont typeface="+mj-lt"/>
+              <a:buAutoNum type="arabicPeriod" startAt="6"/>
             </a:pPr>
             <a:r>
               <a:rPr lang="en-US" altLang="en-US" sz="5600" dirty="0"/>
@@ -5641,11 +7973,12 @@
             <a:endParaRPr lang="en-US" altLang="ru-RU" sz="5600" dirty="0"/>
           </a:p>
           <a:p>
-            <a:pPr marL="320040" indent="-228600" fontAlgn="auto">
+            <a:pPr marL="434340" indent="-342900" fontAlgn="auto">
               <a:lnSpc>
                 <a:spcPct val="100000"/>
               </a:lnSpc>
-              <a:buAutoNum type="arabicPeriod"/>
+              <a:buFont typeface="+mj-lt"/>
+              <a:buAutoNum type="arabicPeriod" startAt="6"/>
             </a:pPr>
             <a:r>
               <a:rPr lang="en-US" altLang="en-US" sz="5600" dirty="0"/>
@@ -5912,6 +8245,84 @@
           </a:p>
         </p:txBody>
       </p:sp>
+      <p:sp useBgFill="1">
+        <p:nvSpPr>
+          <p:cNvPr id="3" name="Прямоугольник 2"/>
+          <p:cNvSpPr/>
+          <p:nvPr/>
+        </p:nvSpPr>
+        <p:spPr>
+          <a:xfrm>
+            <a:off x="151765" y="1854200"/>
+            <a:ext cx="4845050" cy="4308475"/>
+          </a:xfrm>
+          <a:prstGeom prst="rect">
+            <a:avLst/>
+          </a:prstGeom>
+        </p:spPr>
+        <p:style>
+          <a:lnRef idx="2">
+            <a:schemeClr val="accent1">
+              <a:lumMod val="75000"/>
+            </a:schemeClr>
+          </a:lnRef>
+          <a:fillRef idx="1">
+            <a:schemeClr val="accent1"/>
+          </a:fillRef>
+          <a:effectRef idx="0">
+            <a:srgbClr val="FFFFFF"/>
+          </a:effectRef>
+          <a:fontRef idx="minor">
+            <a:schemeClr val="lt1"/>
+          </a:fontRef>
+        </p:style>
+        <p:txBody>
+          <a:bodyPr rtlCol="0" anchor="ctr"/>
+          <a:p>
+            <a:pPr algn="ctr"/>
+            <a:endParaRPr lang="ru-RU" altLang="en-US"/>
+          </a:p>
+        </p:txBody>
+      </p:sp>
+      <p:sp useBgFill="1">
+        <p:nvSpPr>
+          <p:cNvPr id="4" name="Прямоугольник 3"/>
+          <p:cNvSpPr/>
+          <p:nvPr/>
+        </p:nvSpPr>
+        <p:spPr>
+          <a:xfrm>
+            <a:off x="4996815" y="1854200"/>
+            <a:ext cx="4845050" cy="4308475"/>
+          </a:xfrm>
+          <a:prstGeom prst="rect">
+            <a:avLst/>
+          </a:prstGeom>
+        </p:spPr>
+        <p:style>
+          <a:lnRef idx="2">
+            <a:schemeClr val="accent1">
+              <a:lumMod val="75000"/>
+            </a:schemeClr>
+          </a:lnRef>
+          <a:fillRef idx="1">
+            <a:schemeClr val="accent1"/>
+          </a:fillRef>
+          <a:effectRef idx="0">
+            <a:srgbClr val="FFFFFF"/>
+          </a:effectRef>
+          <a:fontRef idx="minor">
+            <a:schemeClr val="lt1"/>
+          </a:fontRef>
+        </p:style>
+        <p:txBody>
+          <a:bodyPr rtlCol="0" anchor="ctr"/>
+          <a:p>
+            <a:pPr algn="ctr"/>
+            <a:endParaRPr lang="ru-RU" altLang="en-US"/>
+          </a:p>
+        </p:txBody>
+      </p:sp>
       <p:pic>
         <p:nvPicPr>
           <p:cNvPr id="8" name="Рисунок 7"/>
@@ -5947,717 +8358,1413 @@
         <p:spPr>
           <a:xfrm>
             <a:off x="268605" y="1845945"/>
-            <a:ext cx="4519295" cy="3027680"/>
+            <a:ext cx="4519295" cy="4241800"/>
           </a:xfrm>
         </p:spPr>
         <p:txBody>
           <a:bodyPr>
-            <a:normAutofit fontScale="50000"/>
+            <a:noAutofit/>
           </a:bodyPr>
           <a:p>
             <a:r>
-              <a:rPr lang="en-US" altLang="en-US"/>
+              <a:rPr lang="en-US" altLang="en-US" sz="1400">
+                <a:solidFill>
+                  <a:schemeClr val="tx1"/>
+                </a:solidFill>
+              </a:rPr>
               <a:t>Объект</a:t>
             </a:r>
             <a:r>
-              <a:rPr lang="en-US" altLang="ru-RU"/>
-              <a:t> </a:t>
-            </a:r>
-            <a:r>
-              <a:rPr lang="en-US" altLang="en-US"/>
+              <a:rPr lang="en-US" altLang="ru-RU" sz="1400">
+                <a:solidFill>
+                  <a:schemeClr val="tx1"/>
+                </a:solidFill>
+              </a:rPr>
+              <a:t> </a:t>
+            </a:r>
+            <a:r>
+              <a:rPr lang="en-US" altLang="en-US" sz="1400">
+                <a:solidFill>
+                  <a:schemeClr val="tx1"/>
+                </a:solidFill>
+              </a:rPr>
               <a:t>автоматизации</a:t>
             </a:r>
             <a:r>
-              <a:rPr lang="en-US" altLang="ru-RU"/>
+              <a:rPr lang="en-US" altLang="ru-RU" sz="1400">
+                <a:solidFill>
+                  <a:schemeClr val="tx1"/>
+                </a:solidFill>
+              </a:rPr>
               <a:t> – </a:t>
             </a:r>
             <a:r>
-              <a:rPr lang="en-US" altLang="en-US"/>
+              <a:rPr lang="en-US" altLang="en-US" sz="1400">
+                <a:solidFill>
+                  <a:schemeClr val="tx1"/>
+                </a:solidFill>
+              </a:rPr>
               <a:t>деятельность</a:t>
             </a:r>
             <a:r>
-              <a:rPr lang="en-US" altLang="ru-RU"/>
-              <a:t> </a:t>
-            </a:r>
-            <a:r>
-              <a:rPr lang="en-US" altLang="en-US"/>
+              <a:rPr lang="en-US" altLang="ru-RU" sz="1400">
+                <a:solidFill>
+                  <a:schemeClr val="tx1"/>
+                </a:solidFill>
+              </a:rPr>
+              <a:t> </a:t>
+            </a:r>
+            <a:r>
+              <a:rPr lang="en-US" altLang="en-US" sz="1400">
+                <a:solidFill>
+                  <a:schemeClr val="tx1"/>
+                </a:solidFill>
+              </a:rPr>
               <a:t>рыболовной</a:t>
             </a:r>
             <a:r>
-              <a:rPr lang="en-US" altLang="ru-RU"/>
-              <a:t> </a:t>
-            </a:r>
-            <a:r>
-              <a:rPr lang="en-US" altLang="en-US"/>
+              <a:rPr lang="en-US" altLang="ru-RU" sz="1400">
+                <a:solidFill>
+                  <a:schemeClr val="tx1"/>
+                </a:solidFill>
+              </a:rPr>
+              <a:t> </a:t>
+            </a:r>
+            <a:r>
+              <a:rPr lang="en-US" altLang="en-US" sz="1400">
+                <a:solidFill>
+                  <a:schemeClr val="tx1"/>
+                </a:solidFill>
+              </a:rPr>
               <a:t>фирмы</a:t>
             </a:r>
             <a:r>
-              <a:rPr lang="en-US" altLang="ru-RU"/>
+              <a:rPr lang="en-US" altLang="ru-RU" sz="1400">
+                <a:solidFill>
+                  <a:schemeClr val="tx1"/>
+                </a:solidFill>
+              </a:rPr>
               <a:t>, </a:t>
             </a:r>
             <a:r>
-              <a:rPr lang="en-US" altLang="en-US"/>
+              <a:rPr lang="en-US" altLang="en-US" sz="1400">
+                <a:solidFill>
+                  <a:schemeClr val="tx1"/>
+                </a:solidFill>
+              </a:rPr>
               <a:t>включающая</a:t>
             </a:r>
             <a:r>
-              <a:rPr lang="en-US" altLang="ru-RU"/>
+              <a:rPr lang="en-US" altLang="ru-RU" sz="1400">
+                <a:solidFill>
+                  <a:schemeClr val="tx1"/>
+                </a:solidFill>
+              </a:rPr>
               <a:t>:</a:t>
             </a:r>
-            <a:endParaRPr lang="en-US" altLang="ru-RU"/>
+            <a:endParaRPr lang="en-US" altLang="ru-RU" sz="1400">
+              <a:solidFill>
+                <a:schemeClr val="tx1"/>
+              </a:solidFill>
+            </a:endParaRPr>
           </a:p>
           <a:p>
             <a:pPr marL="342900" indent="-342900">
               <a:buAutoNum type="arabicPeriod"/>
             </a:pPr>
             <a:r>
-              <a:rPr lang="en-US" altLang="en-US"/>
+              <a:rPr lang="en-US" altLang="en-US" sz="1400">
+                <a:solidFill>
+                  <a:schemeClr val="tx1"/>
+                </a:solidFill>
+              </a:rPr>
               <a:t>Катера</a:t>
             </a:r>
             <a:r>
-              <a:rPr lang="en-US" altLang="ru-RU"/>
+              <a:rPr lang="en-US" altLang="ru-RU" sz="1400">
+                <a:solidFill>
+                  <a:schemeClr val="tx1"/>
+                </a:solidFill>
+              </a:rPr>
               <a:t> – </a:t>
             </a:r>
             <a:r>
-              <a:rPr lang="en-US" altLang="en-US"/>
+              <a:rPr lang="en-US" altLang="en-US" sz="1400">
+                <a:solidFill>
+                  <a:schemeClr val="tx1"/>
+                </a:solidFill>
+              </a:rPr>
               <a:t>плавсредства</a:t>
             </a:r>
             <a:r>
-              <a:rPr lang="en-US" altLang="ru-RU"/>
-              <a:t> </a:t>
-            </a:r>
-            <a:r>
-              <a:rPr lang="en-US" altLang="en-US"/>
+              <a:rPr lang="en-US" altLang="ru-RU" sz="1400">
+                <a:solidFill>
+                  <a:schemeClr val="tx1"/>
+                </a:solidFill>
+              </a:rPr>
+              <a:t> </a:t>
+            </a:r>
+            <a:r>
+              <a:rPr lang="en-US" altLang="en-US" sz="1400">
+                <a:solidFill>
+                  <a:schemeClr val="tx1"/>
+                </a:solidFill>
+              </a:rPr>
               <a:t>для</a:t>
             </a:r>
             <a:r>
-              <a:rPr lang="en-US" altLang="ru-RU"/>
-              <a:t> </a:t>
-            </a:r>
-            <a:r>
-              <a:rPr lang="en-US" altLang="en-US"/>
+              <a:rPr lang="en-US" altLang="ru-RU" sz="1400">
+                <a:solidFill>
+                  <a:schemeClr val="tx1"/>
+                </a:solidFill>
+              </a:rPr>
+              <a:t> </a:t>
+            </a:r>
+            <a:r>
+              <a:rPr lang="en-US" altLang="en-US" sz="1400">
+                <a:solidFill>
+                  <a:schemeClr val="tx1"/>
+                </a:solidFill>
+              </a:rPr>
               <a:t>промысла</a:t>
             </a:r>
             <a:r>
-              <a:rPr lang="en-US" altLang="ru-RU"/>
+              <a:rPr lang="en-US" altLang="ru-RU" sz="1400">
+                <a:solidFill>
+                  <a:schemeClr val="tx1"/>
+                </a:solidFill>
+              </a:rPr>
               <a:t>. </a:t>
             </a:r>
             <a:r>
-              <a:rPr lang="en-US" altLang="en-US"/>
+              <a:rPr lang="en-US" altLang="en-US" sz="1400">
+                <a:solidFill>
+                  <a:schemeClr val="tx1"/>
+                </a:solidFill>
+              </a:rPr>
               <a:t>Учитываются</a:t>
             </a:r>
             <a:r>
-              <a:rPr lang="en-US" altLang="ru-RU"/>
+              <a:rPr lang="en-US" altLang="ru-RU" sz="1400">
+                <a:solidFill>
+                  <a:schemeClr val="tx1"/>
+                </a:solidFill>
+              </a:rPr>
               <a:t>: </a:t>
             </a:r>
             <a:r>
-              <a:rPr lang="en-US" altLang="en-US"/>
+              <a:rPr lang="en-US" altLang="en-US" sz="1400">
+                <a:solidFill>
+                  <a:schemeClr val="tx1"/>
+                </a:solidFill>
+              </a:rPr>
               <a:t>название</a:t>
             </a:r>
             <a:r>
-              <a:rPr lang="en-US" altLang="ru-RU"/>
+              <a:rPr lang="en-US" altLang="ru-RU" sz="1400">
+                <a:solidFill>
+                  <a:schemeClr val="tx1"/>
+                </a:solidFill>
+              </a:rPr>
               <a:t>, </a:t>
             </a:r>
             <a:r>
-              <a:rPr lang="en-US" altLang="en-US"/>
+              <a:rPr lang="en-US" altLang="en-US" sz="1400">
+                <a:solidFill>
+                  <a:schemeClr val="tx1"/>
+                </a:solidFill>
+              </a:rPr>
               <a:t>тип</a:t>
             </a:r>
             <a:r>
-              <a:rPr lang="en-US" altLang="ru-RU"/>
+              <a:rPr lang="en-US" altLang="ru-RU" sz="1400">
+                <a:solidFill>
+                  <a:schemeClr val="tx1"/>
+                </a:solidFill>
+              </a:rPr>
               <a:t> (</a:t>
             </a:r>
             <a:r>
-              <a:rPr lang="en-US" altLang="en-US"/>
+              <a:rPr lang="en-US" altLang="en-US" sz="1400">
+                <a:solidFill>
+                  <a:schemeClr val="tx1"/>
+                </a:solidFill>
+              </a:rPr>
               <a:t>траулер</a:t>
             </a:r>
             <a:r>
-              <a:rPr lang="en-US" altLang="ru-RU"/>
+              <a:rPr lang="en-US" altLang="ru-RU" sz="1400">
+                <a:solidFill>
+                  <a:schemeClr val="tx1"/>
+                </a:solidFill>
+              </a:rPr>
               <a:t>, </a:t>
             </a:r>
             <a:r>
-              <a:rPr lang="en-US" altLang="en-US"/>
+              <a:rPr lang="en-US" altLang="en-US" sz="1400">
+                <a:solidFill>
+                  <a:schemeClr val="tx1"/>
+                </a:solidFill>
+              </a:rPr>
               <a:t>сейнер</a:t>
             </a:r>
             <a:r>
-              <a:rPr lang="en-US" altLang="ru-RU"/>
+              <a:rPr lang="en-US" altLang="ru-RU" sz="1400">
+                <a:solidFill>
+                  <a:schemeClr val="tx1"/>
+                </a:solidFill>
+              </a:rPr>
               <a:t>, </a:t>
             </a:r>
             <a:r>
-              <a:rPr lang="en-US" altLang="en-US"/>
+              <a:rPr lang="en-US" altLang="en-US" sz="1400">
+                <a:solidFill>
+                  <a:schemeClr val="tx1"/>
+                </a:solidFill>
+              </a:rPr>
               <a:t>лонглайнер</a:t>
             </a:r>
             <a:r>
-              <a:rPr lang="en-US" altLang="ru-RU"/>
+              <a:rPr lang="en-US" altLang="ru-RU" sz="1400">
+                <a:solidFill>
+                  <a:schemeClr val="tx1"/>
+                </a:solidFill>
+              </a:rPr>
               <a:t>), </a:t>
             </a:r>
             <a:r>
-              <a:rPr lang="en-US" altLang="en-US"/>
+              <a:rPr lang="en-US" altLang="en-US" sz="1400">
+                <a:solidFill>
+                  <a:schemeClr val="tx1"/>
+                </a:solidFill>
+              </a:rPr>
               <a:t>водоизмещение</a:t>
             </a:r>
             <a:r>
-              <a:rPr lang="en-US" altLang="ru-RU"/>
+              <a:rPr lang="en-US" altLang="ru-RU" sz="1400">
+                <a:solidFill>
+                  <a:schemeClr val="tx1"/>
+                </a:solidFill>
+              </a:rPr>
               <a:t>, </a:t>
             </a:r>
             <a:r>
-              <a:rPr lang="en-US" altLang="en-US"/>
+              <a:rPr lang="en-US" altLang="en-US" sz="1400">
+                <a:solidFill>
+                  <a:schemeClr val="tx1"/>
+                </a:solidFill>
+              </a:rPr>
               <a:t>дата</a:t>
             </a:r>
             <a:r>
-              <a:rPr lang="en-US" altLang="ru-RU"/>
-              <a:t> </a:t>
-            </a:r>
-            <a:r>
-              <a:rPr lang="en-US" altLang="en-US"/>
+              <a:rPr lang="en-US" altLang="ru-RU" sz="1400">
+                <a:solidFill>
+                  <a:schemeClr val="tx1"/>
+                </a:solidFill>
+              </a:rPr>
+              <a:t> </a:t>
+            </a:r>
+            <a:r>
+              <a:rPr lang="en-US" altLang="en-US" sz="1400">
+                <a:solidFill>
+                  <a:schemeClr val="tx1"/>
+                </a:solidFill>
+              </a:rPr>
               <a:t>постройки</a:t>
             </a:r>
             <a:r>
-              <a:rPr lang="en-US" altLang="ru-RU"/>
+              <a:rPr lang="en-US" altLang="ru-RU" sz="1400">
+                <a:solidFill>
+                  <a:schemeClr val="tx1"/>
+                </a:solidFill>
+              </a:rPr>
               <a:t>.</a:t>
             </a:r>
-            <a:endParaRPr lang="en-US" altLang="ru-RU"/>
+            <a:endParaRPr lang="en-US" altLang="ru-RU" sz="1400">
+              <a:solidFill>
+                <a:schemeClr val="tx1"/>
+              </a:solidFill>
+            </a:endParaRPr>
           </a:p>
           <a:p>
             <a:pPr marL="342900" indent="-342900">
               <a:buAutoNum type="arabicPeriod"/>
             </a:pPr>
             <a:r>
-              <a:rPr lang="en-US" altLang="en-US"/>
+              <a:rPr lang="en-US" altLang="en-US" sz="1400">
+                <a:solidFill>
+                  <a:schemeClr val="tx1"/>
+                </a:solidFill>
+              </a:rPr>
               <a:t>Команда</a:t>
             </a:r>
             <a:r>
-              <a:rPr lang="en-US" altLang="ru-RU"/>
+              <a:rPr lang="en-US" altLang="ru-RU" sz="1400">
+                <a:solidFill>
+                  <a:schemeClr val="tx1"/>
+                </a:solidFill>
+              </a:rPr>
               <a:t> – </a:t>
             </a:r>
             <a:r>
-              <a:rPr lang="en-US" altLang="en-US"/>
+              <a:rPr lang="en-US" altLang="en-US" sz="1400">
+                <a:solidFill>
+                  <a:schemeClr val="tx1"/>
+                </a:solidFill>
+              </a:rPr>
               <a:t>экипаж</a:t>
             </a:r>
             <a:r>
-              <a:rPr lang="en-US" altLang="ru-RU"/>
-              <a:t> </a:t>
-            </a:r>
-            <a:r>
-              <a:rPr lang="en-US" altLang="en-US"/>
+              <a:rPr lang="en-US" altLang="ru-RU" sz="1400">
+                <a:solidFill>
+                  <a:schemeClr val="tx1"/>
+                </a:solidFill>
+              </a:rPr>
+              <a:t> </a:t>
+            </a:r>
+            <a:r>
+              <a:rPr lang="en-US" altLang="en-US" sz="1400">
+                <a:solidFill>
+                  <a:schemeClr val="tx1"/>
+                </a:solidFill>
+              </a:rPr>
               <a:t>каждого</a:t>
             </a:r>
             <a:r>
-              <a:rPr lang="en-US" altLang="ru-RU"/>
-              <a:t> </a:t>
-            </a:r>
-            <a:r>
-              <a:rPr lang="en-US" altLang="en-US"/>
+              <a:rPr lang="en-US" altLang="ru-RU" sz="1400">
+                <a:solidFill>
+                  <a:schemeClr val="tx1"/>
+                </a:solidFill>
+              </a:rPr>
+              <a:t> </a:t>
+            </a:r>
+            <a:r>
+              <a:rPr lang="en-US" altLang="en-US" sz="1400">
+                <a:solidFill>
+                  <a:schemeClr val="tx1"/>
+                </a:solidFill>
+              </a:rPr>
               <a:t>катера</a:t>
             </a:r>
             <a:r>
-              <a:rPr lang="en-US" altLang="ru-RU"/>
+              <a:rPr lang="en-US" altLang="ru-RU" sz="1400">
+                <a:solidFill>
+                  <a:schemeClr val="tx1"/>
+                </a:solidFill>
+              </a:rPr>
               <a:t>. </a:t>
             </a:r>
             <a:r>
-              <a:rPr lang="en-US" altLang="en-US"/>
+              <a:rPr lang="en-US" altLang="en-US" sz="1400">
+                <a:solidFill>
+                  <a:schemeClr val="tx1"/>
+                </a:solidFill>
+              </a:rPr>
               <a:t>Учитываются</a:t>
             </a:r>
             <a:r>
-              <a:rPr lang="en-US" altLang="ru-RU"/>
+              <a:rPr lang="en-US" altLang="ru-RU" sz="1400">
+                <a:solidFill>
+                  <a:schemeClr val="tx1"/>
+                </a:solidFill>
+              </a:rPr>
               <a:t>: </a:t>
             </a:r>
             <a:r>
-              <a:rPr lang="en-US" altLang="en-US"/>
+              <a:rPr lang="en-US" altLang="en-US" sz="1400">
+                <a:solidFill>
+                  <a:schemeClr val="tx1"/>
+                </a:solidFill>
+              </a:rPr>
               <a:t>фамилия</a:t>
             </a:r>
             <a:r>
-              <a:rPr lang="en-US" altLang="ru-RU"/>
+              <a:rPr lang="en-US" altLang="ru-RU" sz="1400">
+                <a:solidFill>
+                  <a:schemeClr val="tx1"/>
+                </a:solidFill>
+              </a:rPr>
               <a:t>, </a:t>
             </a:r>
             <a:r>
-              <a:rPr lang="en-US" altLang="en-US"/>
+              <a:rPr lang="en-US" altLang="en-US" sz="1400">
+                <a:solidFill>
+                  <a:schemeClr val="tx1"/>
+                </a:solidFill>
+              </a:rPr>
               <a:t>имя</a:t>
             </a:r>
             <a:r>
-              <a:rPr lang="en-US" altLang="ru-RU"/>
+              <a:rPr lang="en-US" altLang="ru-RU" sz="1400">
+                <a:solidFill>
+                  <a:schemeClr val="tx1"/>
+                </a:solidFill>
+              </a:rPr>
               <a:t>, </a:t>
             </a:r>
             <a:r>
-              <a:rPr lang="en-US" altLang="en-US"/>
+              <a:rPr lang="en-US" altLang="en-US" sz="1400">
+                <a:solidFill>
+                  <a:schemeClr val="tx1"/>
+                </a:solidFill>
+              </a:rPr>
               <a:t>адрес</a:t>
             </a:r>
             <a:r>
-              <a:rPr lang="en-US" altLang="ru-RU"/>
+              <a:rPr lang="en-US" altLang="ru-RU" sz="1400">
+                <a:solidFill>
+                  <a:schemeClr val="tx1"/>
+                </a:solidFill>
+              </a:rPr>
               <a:t>, </a:t>
             </a:r>
             <a:r>
-              <a:rPr lang="en-US" altLang="en-US"/>
+              <a:rPr lang="en-US" altLang="en-US" sz="1400">
+                <a:solidFill>
+                  <a:schemeClr val="tx1"/>
+                </a:solidFill>
+              </a:rPr>
               <a:t>должность</a:t>
             </a:r>
             <a:r>
-              <a:rPr lang="en-US" altLang="ru-RU"/>
+              <a:rPr lang="en-US" altLang="ru-RU" sz="1400">
+                <a:solidFill>
+                  <a:schemeClr val="tx1"/>
+                </a:solidFill>
+              </a:rPr>
               <a:t> (</a:t>
             </a:r>
             <a:r>
-              <a:rPr lang="en-US" altLang="en-US"/>
+              <a:rPr lang="en-US" altLang="en-US" sz="1400">
+                <a:solidFill>
+                  <a:schemeClr val="tx1"/>
+                </a:solidFill>
+              </a:rPr>
               <a:t>капитан</a:t>
             </a:r>
             <a:r>
-              <a:rPr lang="en-US" altLang="ru-RU"/>
+              <a:rPr lang="en-US" altLang="ru-RU" sz="1400">
+                <a:solidFill>
+                  <a:schemeClr val="tx1"/>
+                </a:solidFill>
+              </a:rPr>
               <a:t>, </a:t>
             </a:r>
             <a:r>
-              <a:rPr lang="en-US" altLang="en-US"/>
+              <a:rPr lang="en-US" altLang="en-US" sz="1400">
+                <a:solidFill>
+                  <a:schemeClr val="tx1"/>
+                </a:solidFill>
+              </a:rPr>
               <a:t>боцман</a:t>
             </a:r>
             <a:r>
-              <a:rPr lang="en-US" altLang="ru-RU"/>
+              <a:rPr lang="en-US" altLang="ru-RU" sz="1400">
+                <a:solidFill>
+                  <a:schemeClr val="tx1"/>
+                </a:solidFill>
+              </a:rPr>
               <a:t>, </a:t>
             </a:r>
             <a:r>
-              <a:rPr lang="en-US" altLang="en-US"/>
+              <a:rPr lang="en-US" altLang="en-US" sz="1400">
+                <a:solidFill>
+                  <a:schemeClr val="tx1"/>
+                </a:solidFill>
+              </a:rPr>
               <a:t>матрос</a:t>
             </a:r>
             <a:r>
-              <a:rPr lang="en-US" altLang="ru-RU"/>
-              <a:t> </a:t>
-            </a:r>
-            <a:r>
-              <a:rPr lang="en-US" altLang="en-US"/>
+              <a:rPr lang="en-US" altLang="ru-RU" sz="1400">
+                <a:solidFill>
+                  <a:schemeClr val="tx1"/>
+                </a:solidFill>
+              </a:rPr>
+              <a:t> </a:t>
+            </a:r>
+            <a:r>
+              <a:rPr lang="en-US" altLang="en-US" sz="1400">
+                <a:solidFill>
+                  <a:schemeClr val="tx1"/>
+                </a:solidFill>
+              </a:rPr>
               <a:t>и</a:t>
             </a:r>
             <a:r>
-              <a:rPr lang="en-US" altLang="ru-RU"/>
-              <a:t> </a:t>
-            </a:r>
-            <a:r>
-              <a:rPr lang="en-US" altLang="en-US"/>
+              <a:rPr lang="en-US" altLang="ru-RU" sz="1400">
+                <a:solidFill>
+                  <a:schemeClr val="tx1"/>
+                </a:solidFill>
+              </a:rPr>
+              <a:t> </a:t>
+            </a:r>
+            <a:r>
+              <a:rPr lang="en-US" altLang="en-US" sz="1400">
+                <a:solidFill>
+                  <a:schemeClr val="tx1"/>
+                </a:solidFill>
+              </a:rPr>
               <a:t>др</a:t>
             </a:r>
             <a:r>
-              <a:rPr lang="en-US" altLang="ru-RU"/>
+              <a:rPr lang="en-US" altLang="ru-RU" sz="1400">
+                <a:solidFill>
+                  <a:schemeClr val="tx1"/>
+                </a:solidFill>
+              </a:rPr>
               <a:t>.).</a:t>
             </a:r>
-            <a:endParaRPr lang="en-US" altLang="ru-RU"/>
+            <a:endParaRPr lang="en-US" altLang="ru-RU" sz="1400">
+              <a:solidFill>
+                <a:schemeClr val="tx1"/>
+              </a:solidFill>
+            </a:endParaRPr>
           </a:p>
           <a:p>
             <a:pPr marL="342900" indent="-342900">
               <a:buAutoNum type="arabicPeriod"/>
             </a:pPr>
             <a:r>
-              <a:rPr lang="en-US" altLang="en-US"/>
+              <a:rPr lang="en-US" altLang="en-US" sz="1400">
+                <a:solidFill>
+                  <a:schemeClr val="tx1"/>
+                </a:solidFill>
+              </a:rPr>
               <a:t>Банки</a:t>
             </a:r>
             <a:r>
-              <a:rPr lang="en-US" altLang="ru-RU"/>
+              <a:rPr lang="en-US" altLang="ru-RU" sz="1400">
+                <a:solidFill>
+                  <a:schemeClr val="tx1"/>
+                </a:solidFill>
+              </a:rPr>
               <a:t> (</a:t>
             </a:r>
             <a:r>
-              <a:rPr lang="en-US" altLang="en-US"/>
+              <a:rPr lang="en-US" altLang="en-US" sz="1400">
+                <a:solidFill>
+                  <a:schemeClr val="tx1"/>
+                </a:solidFill>
+              </a:rPr>
               <a:t>м</a:t>
             </a:r>
             <a:r>
-              <a:rPr lang="ru-RU" altLang="en-US"/>
+              <a:rPr lang="ru-RU" altLang="en-US" sz="1400">
+                <a:solidFill>
+                  <a:schemeClr val="tx1"/>
+                </a:solidFill>
+              </a:rPr>
               <a:t>е</a:t>
             </a:r>
             <a:r>
-              <a:rPr lang="en-US" altLang="en-US"/>
+              <a:rPr lang="en-US" altLang="en-US" sz="1400">
+                <a:solidFill>
+                  <a:schemeClr val="tx1"/>
+                </a:solidFill>
+              </a:rPr>
               <a:t>ста</a:t>
             </a:r>
             <a:r>
-              <a:rPr lang="en-US" altLang="ru-RU"/>
-              <a:t> </a:t>
-            </a:r>
-            <a:r>
-              <a:rPr lang="en-US" altLang="en-US"/>
+              <a:rPr lang="en-US" altLang="ru-RU" sz="1400">
+                <a:solidFill>
+                  <a:schemeClr val="tx1"/>
+                </a:solidFill>
+              </a:rPr>
+              <a:t> </a:t>
+            </a:r>
+            <a:r>
+              <a:rPr lang="en-US" altLang="en-US" sz="1400">
+                <a:solidFill>
+                  <a:schemeClr val="tx1"/>
+                </a:solidFill>
+              </a:rPr>
               <a:t>лова</a:t>
             </a:r>
             <a:r>
-              <a:rPr lang="en-US" altLang="ru-RU"/>
+              <a:rPr lang="en-US" altLang="ru-RU" sz="1400">
+                <a:solidFill>
+                  <a:schemeClr val="tx1"/>
+                </a:solidFill>
+              </a:rPr>
               <a:t>) – </a:t>
             </a:r>
             <a:r>
-              <a:rPr lang="en-US" altLang="en-US"/>
+              <a:rPr lang="en-US" altLang="en-US" sz="1400">
+                <a:solidFill>
+                  <a:schemeClr val="tx1"/>
+                </a:solidFill>
+              </a:rPr>
               <a:t>географические</a:t>
             </a:r>
             <a:r>
-              <a:rPr lang="en-US" altLang="ru-RU"/>
-              <a:t> </a:t>
-            </a:r>
-            <a:r>
-              <a:rPr lang="en-US" altLang="en-US"/>
+              <a:rPr lang="en-US" altLang="ru-RU" sz="1400">
+                <a:solidFill>
+                  <a:schemeClr val="tx1"/>
+                </a:solidFill>
+              </a:rPr>
+              <a:t> </a:t>
+            </a:r>
+            <a:r>
+              <a:rPr lang="en-US" altLang="en-US" sz="1400">
+                <a:solidFill>
+                  <a:schemeClr val="tx1"/>
+                </a:solidFill>
+              </a:rPr>
               <a:t>точки</a:t>
             </a:r>
             <a:r>
-              <a:rPr lang="en-US" altLang="ru-RU"/>
-              <a:t> </a:t>
-            </a:r>
-            <a:r>
-              <a:rPr lang="en-US" altLang="en-US"/>
+              <a:rPr lang="en-US" altLang="ru-RU" sz="1400">
+                <a:solidFill>
+                  <a:schemeClr val="tx1"/>
+                </a:solidFill>
+              </a:rPr>
+              <a:t> </a:t>
+            </a:r>
+            <a:r>
+              <a:rPr lang="en-US" altLang="en-US" sz="1400">
+                <a:solidFill>
+                  <a:schemeClr val="tx1"/>
+                </a:solidFill>
+              </a:rPr>
               <a:t>промысла</a:t>
             </a:r>
             <a:r>
-              <a:rPr lang="en-US" altLang="ru-RU"/>
+              <a:rPr lang="en-US" altLang="ru-RU" sz="1400">
+                <a:solidFill>
+                  <a:schemeClr val="tx1"/>
+                </a:solidFill>
+              </a:rPr>
               <a:t>. </a:t>
             </a:r>
             <a:r>
-              <a:rPr lang="en-US" altLang="en-US"/>
+              <a:rPr lang="en-US" altLang="en-US" sz="1400">
+                <a:solidFill>
+                  <a:schemeClr val="tx1"/>
+                </a:solidFill>
+              </a:rPr>
               <a:t>Учитываются</a:t>
             </a:r>
             <a:r>
-              <a:rPr lang="en-US" altLang="ru-RU"/>
+              <a:rPr lang="en-US" altLang="ru-RU" sz="1400">
+                <a:solidFill>
+                  <a:schemeClr val="tx1"/>
+                </a:solidFill>
+              </a:rPr>
               <a:t>: </a:t>
             </a:r>
             <a:r>
-              <a:rPr lang="en-US" altLang="en-US"/>
+              <a:rPr lang="en-US" altLang="en-US" sz="1400">
+                <a:solidFill>
+                  <a:schemeClr val="tx1"/>
+                </a:solidFill>
+              </a:rPr>
               <a:t>название</a:t>
             </a:r>
             <a:r>
-              <a:rPr lang="en-US" altLang="ru-RU"/>
+              <a:rPr lang="en-US" altLang="ru-RU" sz="1400">
+                <a:solidFill>
+                  <a:schemeClr val="tx1"/>
+                </a:solidFill>
+              </a:rPr>
               <a:t>, </a:t>
             </a:r>
             <a:r>
-              <a:rPr lang="en-US" altLang="en-US"/>
+              <a:rPr lang="en-US" altLang="en-US" sz="1400">
+                <a:solidFill>
+                  <a:schemeClr val="tx1"/>
+                </a:solidFill>
+              </a:rPr>
               <a:t>координаты</a:t>
             </a:r>
             <a:r>
-              <a:rPr lang="en-US" altLang="ru-RU"/>
+              <a:rPr lang="en-US" altLang="ru-RU" sz="1400">
+                <a:solidFill>
+                  <a:schemeClr val="tx1"/>
+                </a:solidFill>
+              </a:rPr>
               <a:t>.</a:t>
             </a:r>
-            <a:endParaRPr lang="en-US" altLang="ru-RU"/>
+            <a:endParaRPr lang="en-US" altLang="ru-RU" sz="1400">
+              <a:solidFill>
+                <a:schemeClr val="tx1"/>
+              </a:solidFill>
+            </a:endParaRPr>
           </a:p>
           <a:p>
             <a:pPr marL="342900" indent="-342900">
               <a:buAutoNum type="arabicPeriod"/>
             </a:pPr>
             <a:r>
-              <a:rPr lang="en-US" altLang="en-US"/>
+              <a:rPr lang="en-US" altLang="en-US" sz="1400">
+                <a:solidFill>
+                  <a:schemeClr val="tx1"/>
+                </a:solidFill>
+              </a:rPr>
               <a:t>Выходы</a:t>
             </a:r>
             <a:r>
-              <a:rPr lang="en-US" altLang="ru-RU"/>
-              <a:t> </a:t>
-            </a:r>
-            <a:r>
-              <a:rPr lang="en-US" altLang="en-US"/>
+              <a:rPr lang="en-US" altLang="ru-RU" sz="1400">
+                <a:solidFill>
+                  <a:schemeClr val="tx1"/>
+                </a:solidFill>
+              </a:rPr>
+              <a:t> </a:t>
+            </a:r>
+            <a:r>
+              <a:rPr lang="en-US" altLang="en-US" sz="1400">
+                <a:solidFill>
+                  <a:schemeClr val="tx1"/>
+                </a:solidFill>
+              </a:rPr>
               <a:t>на</a:t>
             </a:r>
             <a:r>
-              <a:rPr lang="en-US" altLang="ru-RU"/>
-              <a:t> </a:t>
-            </a:r>
-            <a:r>
-              <a:rPr lang="en-US" altLang="en-US"/>
+              <a:rPr lang="en-US" altLang="ru-RU" sz="1400">
+                <a:solidFill>
+                  <a:schemeClr val="tx1"/>
+                </a:solidFill>
+              </a:rPr>
+              <a:t> </a:t>
+            </a:r>
+            <a:r>
+              <a:rPr lang="en-US" altLang="en-US" sz="1400">
+                <a:solidFill>
+                  <a:schemeClr val="tx1"/>
+                </a:solidFill>
+              </a:rPr>
               <a:t>промысел</a:t>
             </a:r>
             <a:r>
-              <a:rPr lang="en-US" altLang="ru-RU"/>
+              <a:rPr lang="en-US" altLang="ru-RU" sz="1400">
+                <a:solidFill>
+                  <a:schemeClr val="tx1"/>
+                </a:solidFill>
+              </a:rPr>
               <a:t> – </a:t>
             </a:r>
             <a:r>
-              <a:rPr lang="en-US" altLang="en-US"/>
+              <a:rPr lang="en-US" altLang="en-US" sz="1400">
+                <a:solidFill>
+                  <a:schemeClr val="tx1"/>
+                </a:solidFill>
+              </a:rPr>
               <a:t>каждый</a:t>
             </a:r>
             <a:r>
-              <a:rPr lang="en-US" altLang="ru-RU"/>
-              <a:t> </a:t>
-            </a:r>
-            <a:r>
-              <a:rPr lang="en-US" altLang="en-US"/>
+              <a:rPr lang="en-US" altLang="ru-RU" sz="1400">
+                <a:solidFill>
+                  <a:schemeClr val="tx1"/>
+                </a:solidFill>
+              </a:rPr>
+              <a:t> </a:t>
+            </a:r>
+            <a:r>
+              <a:rPr lang="en-US" altLang="en-US" sz="1400">
+                <a:solidFill>
+                  <a:schemeClr val="tx1"/>
+                </a:solidFill>
+              </a:rPr>
               <a:t>рейс</a:t>
             </a:r>
             <a:r>
-              <a:rPr lang="en-US" altLang="ru-RU"/>
-              <a:t> </a:t>
-            </a:r>
-            <a:r>
-              <a:rPr lang="en-US" altLang="en-US"/>
+              <a:rPr lang="en-US" altLang="ru-RU" sz="1400">
+                <a:solidFill>
+                  <a:schemeClr val="tx1"/>
+                </a:solidFill>
+              </a:rPr>
+              <a:t> </a:t>
+            </a:r>
+            <a:r>
+              <a:rPr lang="en-US" altLang="en-US" sz="1400">
+                <a:solidFill>
+                  <a:schemeClr val="tx1"/>
+                </a:solidFill>
+              </a:rPr>
               <a:t>катера</a:t>
             </a:r>
             <a:r>
-              <a:rPr lang="en-US" altLang="ru-RU"/>
+              <a:rPr lang="en-US" altLang="ru-RU" sz="1400">
+                <a:solidFill>
+                  <a:schemeClr val="tx1"/>
+                </a:solidFill>
+              </a:rPr>
               <a:t>. </a:t>
             </a:r>
             <a:r>
-              <a:rPr lang="en-US" altLang="en-US"/>
+              <a:rPr lang="en-US" altLang="en-US" sz="1400">
+                <a:solidFill>
+                  <a:schemeClr val="tx1"/>
+                </a:solidFill>
+              </a:rPr>
               <a:t>Учитываются</a:t>
             </a:r>
             <a:r>
-              <a:rPr lang="en-US" altLang="ru-RU"/>
+              <a:rPr lang="en-US" altLang="ru-RU" sz="1400">
+                <a:solidFill>
+                  <a:schemeClr val="tx1"/>
+                </a:solidFill>
+              </a:rPr>
               <a:t>: </a:t>
             </a:r>
             <a:r>
-              <a:rPr lang="en-US" altLang="en-US"/>
+              <a:rPr lang="en-US" altLang="en-US" sz="1400">
+                <a:solidFill>
+                  <a:schemeClr val="tx1"/>
+                </a:solidFill>
+              </a:rPr>
               <a:t>дата</a:t>
             </a:r>
             <a:r>
-              <a:rPr lang="en-US" altLang="ru-RU"/>
-              <a:t> </a:t>
-            </a:r>
-            <a:r>
-              <a:rPr lang="en-US" altLang="en-US"/>
+              <a:rPr lang="en-US" altLang="ru-RU" sz="1400">
+                <a:solidFill>
+                  <a:schemeClr val="tx1"/>
+                </a:solidFill>
+              </a:rPr>
+              <a:t> </a:t>
+            </a:r>
+            <a:r>
+              <a:rPr lang="en-US" altLang="en-US" sz="1400">
+                <a:solidFill>
+                  <a:schemeClr val="tx1"/>
+                </a:solidFill>
+              </a:rPr>
               <a:t>выхода</a:t>
             </a:r>
             <a:r>
-              <a:rPr lang="en-US" altLang="ru-RU"/>
+              <a:rPr lang="en-US" altLang="ru-RU" sz="1400">
+                <a:solidFill>
+                  <a:schemeClr val="tx1"/>
+                </a:solidFill>
+              </a:rPr>
               <a:t>, </a:t>
             </a:r>
             <a:r>
-              <a:rPr lang="en-US" altLang="en-US"/>
+              <a:rPr lang="en-US" altLang="en-US" sz="1400">
+                <a:solidFill>
+                  <a:schemeClr val="tx1"/>
+                </a:solidFill>
+              </a:rPr>
               <a:t>дата</a:t>
             </a:r>
             <a:r>
-              <a:rPr lang="en-US" altLang="ru-RU"/>
-              <a:t> </a:t>
-            </a:r>
-            <a:r>
-              <a:rPr lang="en-US" altLang="en-US"/>
+              <a:rPr lang="en-US" altLang="ru-RU" sz="1400">
+                <a:solidFill>
+                  <a:schemeClr val="tx1"/>
+                </a:solidFill>
+              </a:rPr>
+              <a:t> </a:t>
+            </a:r>
+            <a:r>
+              <a:rPr lang="en-US" altLang="en-US" sz="1400">
+                <a:solidFill>
+                  <a:schemeClr val="tx1"/>
+                </a:solidFill>
+              </a:rPr>
               <a:t>возвращения</a:t>
             </a:r>
             <a:r>
-              <a:rPr lang="en-US" altLang="ru-RU"/>
+              <a:rPr lang="en-US" altLang="ru-RU" sz="1400">
+                <a:solidFill>
+                  <a:schemeClr val="tx1"/>
+                </a:solidFill>
+              </a:rPr>
               <a:t>, </a:t>
             </a:r>
             <a:r>
-              <a:rPr lang="en-US" altLang="en-US"/>
+              <a:rPr lang="en-US" altLang="en-US" sz="1400">
+                <a:solidFill>
+                  <a:schemeClr val="tx1"/>
+                </a:solidFill>
+              </a:rPr>
               <a:t>состав</a:t>
             </a:r>
             <a:r>
-              <a:rPr lang="en-US" altLang="ru-RU"/>
-              <a:t> </a:t>
-            </a:r>
-            <a:r>
-              <a:rPr lang="en-US" altLang="en-US"/>
+              <a:rPr lang="en-US" altLang="ru-RU" sz="1400">
+                <a:solidFill>
+                  <a:schemeClr val="tx1"/>
+                </a:solidFill>
+              </a:rPr>
+              <a:t> </a:t>
+            </a:r>
+            <a:r>
+              <a:rPr lang="en-US" altLang="en-US" sz="1400">
+                <a:solidFill>
+                  <a:schemeClr val="tx1"/>
+                </a:solidFill>
+              </a:rPr>
               <a:t>команды</a:t>
             </a:r>
             <a:r>
-              <a:rPr lang="en-US" altLang="ru-RU"/>
+              <a:rPr lang="en-US" altLang="ru-RU" sz="1400">
+                <a:solidFill>
+                  <a:schemeClr val="tx1"/>
+                </a:solidFill>
+              </a:rPr>
               <a:t>.</a:t>
             </a:r>
-            <a:endParaRPr lang="en-US" altLang="ru-RU"/>
+            <a:endParaRPr lang="en-US" altLang="ru-RU" sz="1400">
+              <a:solidFill>
+                <a:schemeClr val="tx1"/>
+              </a:solidFill>
+            </a:endParaRPr>
           </a:p>
           <a:p>
             <a:pPr marL="342900" indent="-342900">
               <a:buAutoNum type="arabicPeriod"/>
             </a:pPr>
             <a:r>
-              <a:rPr lang="en-US" altLang="en-US"/>
+              <a:rPr lang="en-US" altLang="en-US" sz="1400">
+                <a:solidFill>
+                  <a:schemeClr val="tx1"/>
+                </a:solidFill>
+              </a:rPr>
               <a:t>Улов</a:t>
             </a:r>
             <a:r>
-              <a:rPr lang="en-US" altLang="ru-RU"/>
+              <a:rPr lang="en-US" altLang="ru-RU" sz="1400">
+                <a:solidFill>
+                  <a:schemeClr val="tx1"/>
+                </a:solidFill>
+              </a:rPr>
               <a:t> – </a:t>
             </a:r>
             <a:r>
-              <a:rPr lang="en-US" altLang="en-US"/>
+              <a:rPr lang="en-US" altLang="en-US" sz="1400">
+                <a:solidFill>
+                  <a:schemeClr val="tx1"/>
+                </a:solidFill>
+              </a:rPr>
               <a:t>результат</a:t>
             </a:r>
             <a:r>
-              <a:rPr lang="en-US" altLang="ru-RU"/>
-              <a:t> </a:t>
-            </a:r>
-            <a:r>
-              <a:rPr lang="en-US" altLang="en-US"/>
+              <a:rPr lang="en-US" altLang="ru-RU" sz="1400">
+                <a:solidFill>
+                  <a:schemeClr val="tx1"/>
+                </a:solidFill>
+              </a:rPr>
+              <a:t> </a:t>
+            </a:r>
+            <a:r>
+              <a:rPr lang="en-US" altLang="en-US" sz="1400">
+                <a:solidFill>
+                  <a:schemeClr val="tx1"/>
+                </a:solidFill>
+              </a:rPr>
               <a:t>промысла</a:t>
             </a:r>
             <a:r>
-              <a:rPr lang="en-US" altLang="ru-RU"/>
+              <a:rPr lang="en-US" altLang="ru-RU" sz="1400">
+                <a:solidFill>
+                  <a:schemeClr val="tx1"/>
+                </a:solidFill>
+              </a:rPr>
               <a:t>. </a:t>
             </a:r>
             <a:r>
-              <a:rPr lang="en-US" altLang="en-US"/>
+              <a:rPr lang="en-US" altLang="en-US" sz="1400">
+                <a:solidFill>
+                  <a:schemeClr val="tx1"/>
+                </a:solidFill>
+              </a:rPr>
               <a:t>Учитываются</a:t>
             </a:r>
             <a:r>
-              <a:rPr lang="en-US" altLang="ru-RU"/>
+              <a:rPr lang="en-US" altLang="ru-RU" sz="1400">
+                <a:solidFill>
+                  <a:schemeClr val="tx1"/>
+                </a:solidFill>
+              </a:rPr>
               <a:t>: </a:t>
             </a:r>
             <a:r>
-              <a:rPr lang="en-US" altLang="en-US"/>
+              <a:rPr lang="en-US" altLang="en-US" sz="1400">
+                <a:solidFill>
+                  <a:schemeClr val="tx1"/>
+                </a:solidFill>
+              </a:rPr>
               <a:t>привязка</a:t>
             </a:r>
             <a:r>
-              <a:rPr lang="en-US" altLang="ru-RU"/>
-              <a:t> </a:t>
-            </a:r>
-            <a:r>
-              <a:rPr lang="en-US" altLang="en-US"/>
+              <a:rPr lang="en-US" altLang="ru-RU" sz="1400">
+                <a:solidFill>
+                  <a:schemeClr val="tx1"/>
+                </a:solidFill>
+              </a:rPr>
+              <a:t> </a:t>
+            </a:r>
+            <a:r>
+              <a:rPr lang="en-US" altLang="en-US" sz="1400">
+                <a:solidFill>
+                  <a:schemeClr val="tx1"/>
+                </a:solidFill>
+              </a:rPr>
               <a:t>к</a:t>
             </a:r>
             <a:r>
-              <a:rPr lang="en-US" altLang="ru-RU"/>
-              <a:t> </a:t>
-            </a:r>
-            <a:r>
-              <a:rPr lang="en-US" altLang="en-US"/>
+              <a:rPr lang="en-US" altLang="ru-RU" sz="1400">
+                <a:solidFill>
+                  <a:schemeClr val="tx1"/>
+                </a:solidFill>
+              </a:rPr>
+              <a:t> </a:t>
+            </a:r>
+            <a:r>
+              <a:rPr lang="en-US" altLang="en-US" sz="1400">
+                <a:solidFill>
+                  <a:schemeClr val="tx1"/>
+                </a:solidFill>
+              </a:rPr>
               <a:t>выходу</a:t>
             </a:r>
             <a:r>
-              <a:rPr lang="en-US" altLang="ru-RU"/>
-              <a:t> </a:t>
-            </a:r>
-            <a:r>
-              <a:rPr lang="en-US" altLang="en-US"/>
+              <a:rPr lang="en-US" altLang="ru-RU" sz="1400">
+                <a:solidFill>
+                  <a:schemeClr val="tx1"/>
+                </a:solidFill>
+              </a:rPr>
+              <a:t> </a:t>
+            </a:r>
+            <a:r>
+              <a:rPr lang="en-US" altLang="en-US" sz="1400">
+                <a:solidFill>
+                  <a:schemeClr val="tx1"/>
+                </a:solidFill>
+              </a:rPr>
               <a:t>и</a:t>
             </a:r>
             <a:r>
-              <a:rPr lang="en-US" altLang="ru-RU"/>
-              <a:t> </a:t>
-            </a:r>
-            <a:r>
-              <a:rPr lang="en-US" altLang="en-US"/>
+              <a:rPr lang="en-US" altLang="ru-RU" sz="1400">
+                <a:solidFill>
+                  <a:schemeClr val="tx1"/>
+                </a:solidFill>
+              </a:rPr>
+              <a:t> </a:t>
+            </a:r>
+            <a:r>
+              <a:rPr lang="en-US" altLang="en-US" sz="1400">
+                <a:solidFill>
+                  <a:schemeClr val="tx1"/>
+                </a:solidFill>
+              </a:rPr>
               <a:t>банке</a:t>
             </a:r>
             <a:r>
-              <a:rPr lang="en-US" altLang="ru-RU"/>
+              <a:rPr lang="en-US" altLang="ru-RU" sz="1400">
+                <a:solidFill>
+                  <a:schemeClr val="tx1"/>
+                </a:solidFill>
+              </a:rPr>
               <a:t>, </a:t>
             </a:r>
             <a:r>
-              <a:rPr lang="en-US" altLang="en-US"/>
+              <a:rPr lang="en-US" altLang="en-US" sz="1400">
+                <a:solidFill>
+                  <a:schemeClr val="tx1"/>
+                </a:solidFill>
+              </a:rPr>
               <a:t>сорт</a:t>
             </a:r>
             <a:r>
-              <a:rPr lang="en-US" altLang="ru-RU"/>
-              <a:t> </a:t>
-            </a:r>
-            <a:r>
-              <a:rPr lang="en-US" altLang="en-US"/>
+              <a:rPr lang="en-US" altLang="ru-RU" sz="1400">
+                <a:solidFill>
+                  <a:schemeClr val="tx1"/>
+                </a:solidFill>
+              </a:rPr>
+              <a:t> </a:t>
+            </a:r>
+            <a:r>
+              <a:rPr lang="en-US" altLang="en-US" sz="1400">
+                <a:solidFill>
+                  <a:schemeClr val="tx1"/>
+                </a:solidFill>
+              </a:rPr>
               <a:t>рыбы</a:t>
             </a:r>
             <a:r>
-              <a:rPr lang="en-US" altLang="ru-RU"/>
+              <a:rPr lang="en-US" altLang="ru-RU" sz="1400">
+                <a:solidFill>
+                  <a:schemeClr val="tx1"/>
+                </a:solidFill>
+              </a:rPr>
               <a:t> (</a:t>
             </a:r>
             <a:r>
-              <a:rPr lang="en-US" altLang="en-US"/>
+              <a:rPr lang="en-US" altLang="en-US" sz="1400">
+                <a:solidFill>
+                  <a:schemeClr val="tx1"/>
+                </a:solidFill>
+              </a:rPr>
               <a:t>треска</a:t>
             </a:r>
             <a:r>
-              <a:rPr lang="en-US" altLang="ru-RU"/>
+              <a:rPr lang="en-US" altLang="ru-RU" sz="1400">
+                <a:solidFill>
+                  <a:schemeClr val="tx1"/>
+                </a:solidFill>
+              </a:rPr>
               <a:t>, </a:t>
             </a:r>
             <a:r>
-              <a:rPr lang="en-US" altLang="en-US"/>
+              <a:rPr lang="en-US" altLang="en-US" sz="1400">
+                <a:solidFill>
+                  <a:schemeClr val="tx1"/>
+                </a:solidFill>
+              </a:rPr>
               <a:t>пикша</a:t>
             </a:r>
             <a:r>
-              <a:rPr lang="en-US" altLang="ru-RU"/>
+              <a:rPr lang="en-US" altLang="ru-RU" sz="1400">
+                <a:solidFill>
+                  <a:schemeClr val="tx1"/>
+                </a:solidFill>
+              </a:rPr>
               <a:t>, </a:t>
             </a:r>
             <a:r>
-              <a:rPr lang="en-US" altLang="en-US"/>
+              <a:rPr lang="en-US" altLang="en-US" sz="1400">
+                <a:solidFill>
+                  <a:schemeClr val="tx1"/>
+                </a:solidFill>
+              </a:rPr>
               <a:t>минтай</a:t>
             </a:r>
             <a:r>
-              <a:rPr lang="en-US" altLang="ru-RU"/>
-              <a:t> </a:t>
-            </a:r>
-            <a:r>
-              <a:rPr lang="en-US" altLang="en-US"/>
+              <a:rPr lang="en-US" altLang="ru-RU" sz="1400">
+                <a:solidFill>
+                  <a:schemeClr val="tx1"/>
+                </a:solidFill>
+              </a:rPr>
+              <a:t> </a:t>
+            </a:r>
+            <a:r>
+              <a:rPr lang="en-US" altLang="en-US" sz="1400">
+                <a:solidFill>
+                  <a:schemeClr val="tx1"/>
+                </a:solidFill>
+              </a:rPr>
               <a:t>и</a:t>
             </a:r>
             <a:r>
-              <a:rPr lang="en-US" altLang="ru-RU"/>
-              <a:t> </a:t>
-            </a:r>
-            <a:r>
-              <a:rPr lang="en-US" altLang="en-US"/>
+              <a:rPr lang="en-US" altLang="ru-RU" sz="1400">
+                <a:solidFill>
+                  <a:schemeClr val="tx1"/>
+                </a:solidFill>
+              </a:rPr>
+              <a:t> </a:t>
+            </a:r>
+            <a:r>
+              <a:rPr lang="en-US" altLang="en-US" sz="1400">
+                <a:solidFill>
+                  <a:schemeClr val="tx1"/>
+                </a:solidFill>
+              </a:rPr>
               <a:t>др</a:t>
             </a:r>
             <a:r>
-              <a:rPr lang="en-US" altLang="ru-RU"/>
+              <a:rPr lang="en-US" altLang="ru-RU" sz="1400">
+                <a:solidFill>
+                  <a:schemeClr val="tx1"/>
+                </a:solidFill>
+              </a:rPr>
               <a:t>.), </a:t>
             </a:r>
             <a:r>
-              <a:rPr lang="en-US" altLang="en-US"/>
+              <a:rPr lang="en-US" altLang="en-US" sz="1400">
+                <a:solidFill>
+                  <a:schemeClr val="tx1"/>
+                </a:solidFill>
+              </a:rPr>
               <a:t>вес</a:t>
             </a:r>
             <a:r>
-              <a:rPr lang="en-US" altLang="ru-RU"/>
+              <a:rPr lang="en-US" altLang="ru-RU" sz="1400">
+                <a:solidFill>
+                  <a:schemeClr val="tx1"/>
+                </a:solidFill>
+              </a:rPr>
               <a:t> (</a:t>
             </a:r>
             <a:r>
-              <a:rPr lang="en-US" altLang="en-US"/>
+              <a:rPr lang="en-US" altLang="en-US" sz="1400">
+                <a:solidFill>
+                  <a:schemeClr val="tx1"/>
+                </a:solidFill>
+              </a:rPr>
               <a:t>кг</a:t>
             </a:r>
             <a:r>
-              <a:rPr lang="en-US" altLang="ru-RU"/>
+              <a:rPr lang="en-US" altLang="ru-RU" sz="1400">
+                <a:solidFill>
+                  <a:schemeClr val="tx1"/>
+                </a:solidFill>
+              </a:rPr>
               <a:t>), </a:t>
             </a:r>
             <a:r>
-              <a:rPr lang="en-US" altLang="en-US"/>
+              <a:rPr lang="en-US" altLang="en-US" sz="1400">
+                <a:solidFill>
+                  <a:schemeClr val="tx1"/>
+                </a:solidFill>
+              </a:rPr>
               <a:t>качество</a:t>
             </a:r>
             <a:r>
-              <a:rPr lang="en-US" altLang="ru-RU"/>
+              <a:rPr lang="en-US" altLang="ru-RU" sz="1400">
+                <a:solidFill>
+                  <a:schemeClr val="tx1"/>
+                </a:solidFill>
+              </a:rPr>
               <a:t> (</a:t>
             </a:r>
             <a:r>
-              <a:rPr lang="en-US" altLang="en-US"/>
+              <a:rPr lang="en-US" altLang="en-US" sz="1400">
+                <a:solidFill>
+                  <a:schemeClr val="tx1"/>
+                </a:solidFill>
+              </a:rPr>
               <a:t>отличное</a:t>
             </a:r>
             <a:r>
-              <a:rPr lang="en-US" altLang="ru-RU"/>
+              <a:rPr lang="en-US" altLang="ru-RU" sz="1400">
+                <a:solidFill>
+                  <a:schemeClr val="tx1"/>
+                </a:solidFill>
+              </a:rPr>
               <a:t>, </a:t>
             </a:r>
             <a:r>
-              <a:rPr lang="en-US" altLang="en-US"/>
+              <a:rPr lang="en-US" altLang="en-US" sz="1400">
+                <a:solidFill>
+                  <a:schemeClr val="tx1"/>
+                </a:solidFill>
+              </a:rPr>
               <a:t>хорошее</a:t>
             </a:r>
             <a:r>
-              <a:rPr lang="en-US" altLang="ru-RU"/>
+              <a:rPr lang="en-US" altLang="ru-RU" sz="1400">
+                <a:solidFill>
+                  <a:schemeClr val="tx1"/>
+                </a:solidFill>
+              </a:rPr>
               <a:t>, </a:t>
             </a:r>
             <a:r>
-              <a:rPr lang="en-US" altLang="en-US"/>
+              <a:rPr lang="en-US" altLang="en-US" sz="1400">
+                <a:solidFill>
+                  <a:schemeClr val="tx1"/>
+                </a:solidFill>
+              </a:rPr>
               <a:t>плохое</a:t>
             </a:r>
             <a:r>
-              <a:rPr lang="en-US" altLang="ru-RU"/>
+              <a:rPr lang="en-US" altLang="ru-RU" sz="1400">
+                <a:solidFill>
+                  <a:schemeClr val="tx1"/>
+                </a:solidFill>
+              </a:rPr>
               <a:t>), </a:t>
             </a:r>
             <a:r>
-              <a:rPr lang="en-US" altLang="en-US"/>
+              <a:rPr lang="en-US" altLang="en-US" sz="1400">
+                <a:solidFill>
+                  <a:schemeClr val="tx1"/>
+                </a:solidFill>
+              </a:rPr>
               <a:t>дата</a:t>
             </a:r>
             <a:r>
-              <a:rPr lang="en-US" altLang="ru-RU"/>
-              <a:t> </a:t>
-            </a:r>
-            <a:r>
-              <a:rPr lang="en-US" altLang="en-US"/>
+              <a:rPr lang="en-US" altLang="ru-RU" sz="1400">
+                <a:solidFill>
+                  <a:schemeClr val="tx1"/>
+                </a:solidFill>
+              </a:rPr>
+              <a:t> </a:t>
+            </a:r>
+            <a:r>
+              <a:rPr lang="en-US" altLang="en-US" sz="1400">
+                <a:solidFill>
+                  <a:schemeClr val="tx1"/>
+                </a:solidFill>
+              </a:rPr>
               <a:t>прихода</a:t>
             </a:r>
             <a:r>
-              <a:rPr lang="en-US" altLang="ru-RU"/>
-              <a:t> </a:t>
-            </a:r>
-            <a:r>
-              <a:rPr lang="en-US" altLang="en-US"/>
+              <a:rPr lang="en-US" altLang="ru-RU" sz="1400">
+                <a:solidFill>
+                  <a:schemeClr val="tx1"/>
+                </a:solidFill>
+              </a:rPr>
+              <a:t> </a:t>
+            </a:r>
+            <a:r>
+              <a:rPr lang="en-US" altLang="en-US" sz="1400">
+                <a:solidFill>
+                  <a:schemeClr val="tx1"/>
+                </a:solidFill>
+              </a:rPr>
               <a:t>на</a:t>
             </a:r>
             <a:r>
-              <a:rPr lang="en-US" altLang="ru-RU"/>
-              <a:t> </a:t>
-            </a:r>
-            <a:r>
-              <a:rPr lang="en-US" altLang="en-US"/>
+              <a:rPr lang="en-US" altLang="ru-RU" sz="1400">
+                <a:solidFill>
+                  <a:schemeClr val="tx1"/>
+                </a:solidFill>
+              </a:rPr>
+              <a:t> </a:t>
+            </a:r>
+            <a:r>
+              <a:rPr lang="en-US" altLang="en-US" sz="1400">
+                <a:solidFill>
+                  <a:schemeClr val="tx1"/>
+                </a:solidFill>
+              </a:rPr>
               <a:t>банку</a:t>
             </a:r>
             <a:r>
-              <a:rPr lang="en-US" altLang="ru-RU"/>
+              <a:rPr lang="en-US" altLang="ru-RU" sz="1400">
+                <a:solidFill>
+                  <a:schemeClr val="tx1"/>
+                </a:solidFill>
+              </a:rPr>
               <a:t>, </a:t>
             </a:r>
             <a:r>
-              <a:rPr lang="en-US" altLang="en-US"/>
+              <a:rPr lang="en-US" altLang="en-US" sz="1400">
+                <a:solidFill>
+                  <a:schemeClr val="tx1"/>
+                </a:solidFill>
+              </a:rPr>
               <a:t>дата</a:t>
             </a:r>
             <a:r>
-              <a:rPr lang="en-US" altLang="ru-RU"/>
-              <a:t> </a:t>
-            </a:r>
-            <a:r>
-              <a:rPr lang="en-US" altLang="en-US"/>
+              <a:rPr lang="en-US" altLang="ru-RU" sz="1400">
+                <a:solidFill>
+                  <a:schemeClr val="tx1"/>
+                </a:solidFill>
+              </a:rPr>
+              <a:t> </a:t>
+            </a:r>
+            <a:r>
+              <a:rPr lang="en-US" altLang="en-US" sz="1400">
+                <a:solidFill>
+                  <a:schemeClr val="tx1"/>
+                </a:solidFill>
+              </a:rPr>
               <a:t>отплытия</a:t>
             </a:r>
             <a:r>
-              <a:rPr lang="en-US" altLang="ru-RU"/>
+              <a:rPr lang="en-US" altLang="ru-RU" sz="1400">
+                <a:solidFill>
+                  <a:schemeClr val="tx1"/>
+                </a:solidFill>
+              </a:rPr>
               <a:t>.</a:t>
             </a:r>
-            <a:endParaRPr lang="en-US" altLang="ru-RU"/>
+            <a:endParaRPr lang="en-US" altLang="ru-RU" sz="1400">
+              <a:solidFill>
+                <a:schemeClr val="tx1"/>
+              </a:solidFill>
+            </a:endParaRPr>
           </a:p>
         </p:txBody>
       </p:sp>
@@ -6670,7 +9777,7 @@
         <p:spPr>
           <a:xfrm>
             <a:off x="5036820" y="1845945"/>
-            <a:ext cx="4064000" cy="3027680"/>
+            <a:ext cx="4470400" cy="4241165"/>
           </a:xfrm>
           <a:prstGeom prst="rect">
             <a:avLst/>
@@ -6683,22 +9790,22 @@
           </a:bodyPr>
           <a:p>
             <a:r>
-              <a:rPr lang="en-US" altLang="en-US" sz="1000"/>
+              <a:rPr lang="en-US" altLang="en-US" sz="1400"/>
               <a:t>Основные</a:t>
             </a:r>
             <a:r>
-              <a:rPr lang="en-US" altLang="ru-RU" sz="1000"/>
-              <a:t> </a:t>
-            </a:r>
-            <a:r>
-              <a:rPr lang="en-US" altLang="en-US" sz="1000"/>
+              <a:rPr lang="en-US" altLang="ru-RU" sz="1400"/>
+              <a:t> </a:t>
+            </a:r>
+            <a:r>
+              <a:rPr lang="en-US" altLang="en-US" sz="1400"/>
               <a:t>процессы</a:t>
             </a:r>
             <a:r>
-              <a:rPr lang="en-US" altLang="ru-RU" sz="1000"/>
+              <a:rPr lang="en-US" altLang="ru-RU" sz="1400"/>
               <a:t>:</a:t>
             </a:r>
-            <a:endParaRPr lang="en-US" altLang="ru-RU" sz="1000"/>
+            <a:endParaRPr lang="en-US" altLang="ru-RU" sz="1400"/>
           </a:p>
           <a:p>
             <a:pPr marL="342900" indent="-342900" algn="l" defTabSz="914400">
@@ -6715,11 +9822,11 @@
                 <a:schemeClr val="accent1"/>
               </a:buClr>
               <a:buSzTx/>
-              <a:buFont typeface="Calibri" panose="020F0502020204030204" pitchFamily="34" charset="0"/>
+              <a:buFont typeface="+mj-lt"/>
               <a:buAutoNum type="arabicPeriod"/>
             </a:pPr>
             <a:r>
-              <a:rPr lang="en-US" altLang="en-US" sz="1000">
+              <a:rPr lang="en-US" altLang="en-US" sz="1400">
                 <a:solidFill>
                   <a:schemeClr val="tx1">
                     <a:lumMod val="75000"/>
@@ -6729,7 +9836,18 @@
               </a:rPr>
               <a:t>Регистрация выхода катера с назначением команды</a:t>
             </a:r>
-            <a:endParaRPr lang="en-US" altLang="en-US" sz="1000">
+            <a:r>
+              <a:rPr lang="ru-RU" altLang="en-US" sz="1400">
+                <a:solidFill>
+                  <a:schemeClr val="tx1">
+                    <a:lumMod val="75000"/>
+                    <a:lumOff val="25000"/>
+                  </a:schemeClr>
+                </a:solidFill>
+              </a:rPr>
+              <a:t>.</a:t>
+            </a:r>
+            <a:endParaRPr lang="en-US" altLang="en-US" sz="1400">
               <a:solidFill>
                 <a:schemeClr val="tx1">
                   <a:lumMod val="75000"/>
@@ -6753,11 +9871,11 @@
                 <a:schemeClr val="accent1"/>
               </a:buClr>
               <a:buSzTx/>
-              <a:buFont typeface="Calibri" panose="020F0502020204030204" pitchFamily="34" charset="0"/>
+              <a:buFont typeface="+mj-lt"/>
               <a:buAutoNum type="arabicPeriod"/>
             </a:pPr>
             <a:r>
-              <a:rPr lang="en-US" altLang="en-US" sz="1000">
+              <a:rPr lang="en-US" altLang="en-US" sz="1400">
                 <a:solidFill>
                   <a:schemeClr val="tx1">
                     <a:lumMod val="75000"/>
@@ -6767,7 +9885,18 @@
               </a:rPr>
               <a:t>Фиксация улова по сортам и банкам (один рейс – несколько банок)</a:t>
             </a:r>
-            <a:endParaRPr lang="en-US" altLang="en-US" sz="1000">
+            <a:r>
+              <a:rPr lang="ru-RU" altLang="en-US" sz="1400">
+                <a:solidFill>
+                  <a:schemeClr val="tx1">
+                    <a:lumMod val="75000"/>
+                    <a:lumOff val="25000"/>
+                  </a:schemeClr>
+                </a:solidFill>
+              </a:rPr>
+              <a:t>.</a:t>
+            </a:r>
+            <a:endParaRPr lang="en-US" altLang="en-US" sz="1400">
               <a:solidFill>
                 <a:schemeClr val="tx1">
                   <a:lumMod val="75000"/>
@@ -6791,11 +9920,11 @@
                 <a:schemeClr val="accent1"/>
               </a:buClr>
               <a:buSzTx/>
-              <a:buFont typeface="Calibri" panose="020F0502020204030204" pitchFamily="34" charset="0"/>
+              <a:buFont typeface="+mj-lt"/>
               <a:buAutoNum type="arabicPeriod"/>
             </a:pPr>
             <a:r>
-              <a:rPr lang="en-US" altLang="en-US" sz="1000">
+              <a:rPr lang="en-US" altLang="en-US" sz="1400">
                 <a:solidFill>
                   <a:schemeClr val="tx1">
                     <a:lumMod val="75000"/>
@@ -6805,7 +9934,7 @@
               </a:rPr>
               <a:t>Формирование аналитических отчётов:</a:t>
             </a:r>
-            <a:endParaRPr lang="en-US" altLang="en-US" sz="1000">
+            <a:endParaRPr lang="en-US" altLang="en-US" sz="1400">
               <a:solidFill>
                 <a:schemeClr val="tx1">
                   <a:lumMod val="75000"/>
@@ -6829,11 +9958,11 @@
                 <a:schemeClr val="accent1"/>
               </a:buClr>
               <a:buSzTx/>
-              <a:buFont typeface="Calibri" panose="020F0502020204030204" pitchFamily="34" charset="0"/>
-              <a:buAutoNum type="arabicPeriod"/>
+              <a:buFont typeface="Wingdings" panose="05000000000000000000" charset="0"/>
+              <a:buChar char="Ø"/>
             </a:pPr>
             <a:r>
-              <a:rPr lang="en-US" altLang="en-US" sz="1000">
+              <a:rPr lang="en-US" altLang="en-US" sz="1400">
                 <a:solidFill>
                   <a:schemeClr val="tx1">
                     <a:lumMod val="75000"/>
@@ -6841,9 +9970,9 @@
                   </a:schemeClr>
                 </a:solidFill>
               </a:rPr>
-              <a:t>улов по каждому катеру с датами вы</a:t>
-            </a:r>
-            <a:endParaRPr lang="en-US" altLang="en-US" sz="1000">
+              <a:t>улов по каждому катеру с датами вы;</a:t>
+            </a:r>
+            <a:endParaRPr lang="en-US" altLang="en-US" sz="1400">
               <a:solidFill>
                 <a:schemeClr val="tx1">
                   <a:lumMod val="75000"/>
@@ -6867,11 +9996,11 @@
                 <a:schemeClr val="accent1"/>
               </a:buClr>
               <a:buSzTx/>
-              <a:buFont typeface="Calibri" panose="020F0502020204030204" pitchFamily="34" charset="0"/>
-              <a:buAutoNum type="arabicPeriod"/>
+              <a:buFont typeface="Wingdings" panose="05000000000000000000" charset="0"/>
+              <a:buChar char="Ø"/>
             </a:pPr>
             <a:r>
-              <a:rPr lang="en-US" altLang="en-US" sz="1000">
+              <a:rPr lang="en-US" altLang="en-US" sz="1400">
                 <a:solidFill>
                   <a:schemeClr val="tx1">
                     <a:lumMod val="75000"/>
@@ -6879,9 +10008,9 @@
                   </a:schemeClr>
                 </a:solidFill>
               </a:rPr>
-              <a:t>для заданного периода – катера с наибольшим уловом по каждому сорту рыбы</a:t>
-            </a:r>
-            <a:endParaRPr lang="en-US" altLang="en-US" sz="1000">
+              <a:t>для заданного периода – катера с наибольшим уловом по каждому сорту рыбы;</a:t>
+            </a:r>
+            <a:endParaRPr lang="en-US" altLang="en-US" sz="1400">
               <a:solidFill>
                 <a:schemeClr val="tx1">
                   <a:lumMod val="75000"/>
@@ -6905,11 +10034,11 @@
                 <a:schemeClr val="accent1"/>
               </a:buClr>
               <a:buSzTx/>
-              <a:buFont typeface="Calibri" panose="020F0502020204030204" pitchFamily="34" charset="0"/>
-              <a:buAutoNum type="arabicPeriod"/>
+              <a:buFont typeface="Wingdings" panose="05000000000000000000" charset="0"/>
+              <a:buChar char="Ø"/>
             </a:pPr>
             <a:r>
-              <a:rPr lang="en-US" altLang="en-US" sz="1000">
+              <a:rPr lang="en-US" altLang="en-US" sz="1400">
                 <a:solidFill>
                   <a:schemeClr val="tx1">
                     <a:lumMod val="75000"/>
@@ -6919,7 +10048,18 @@
               </a:rPr>
               <a:t>для заданного периода – средний улов по банкам</a:t>
             </a:r>
-            <a:endParaRPr lang="en-US" altLang="en-US" sz="1000">
+            <a:r>
+              <a:rPr lang="ru-RU" altLang="en-US" sz="1400">
+                <a:solidFill>
+                  <a:schemeClr val="tx1">
+                    <a:lumMod val="75000"/>
+                    <a:lumOff val="25000"/>
+                  </a:schemeClr>
+                </a:solidFill>
+              </a:rPr>
+              <a:t>.</a:t>
+            </a:r>
+            <a:endParaRPr lang="en-US" altLang="en-US" sz="1400">
               <a:solidFill>
                 <a:schemeClr val="tx1">
                   <a:lumMod val="75000"/>
@@ -6929,45 +10069,7 @@
             </a:endParaRPr>
           </a:p>
           <a:p>
-            <a:pPr marL="342900" indent="-342900" algn="l" defTabSz="914400">
-              <a:lnSpc>
-                <a:spcPct val="90000"/>
-              </a:lnSpc>
-              <a:spcBef>
-                <a:spcPts val="1200"/>
-              </a:spcBef>
-              <a:spcAft>
-                <a:spcPts val="200"/>
-              </a:spcAft>
-              <a:buClr>
-                <a:schemeClr val="accent1"/>
-              </a:buClr>
-              <a:buSzTx/>
-              <a:buFont typeface="Calibri" panose="020F0502020204030204" pitchFamily="34" charset="0"/>
-              <a:buAutoNum type="arabicPeriod"/>
-            </a:pPr>
-            <a:r>
-              <a:rPr lang="en-US" altLang="en-US" sz="1000">
-                <a:solidFill>
-                  <a:schemeClr val="tx1">
-                    <a:lumMod val="75000"/>
-                    <a:lumOff val="25000"/>
-                  </a:schemeClr>
-                </a:solidFill>
-              </a:rPr>
-              <a:t>Картинка: Схема связей между сущностями (катер → команда → выход → банка → улов) или фотография рыболовного судна и карта с отмеченными банками.</a:t>
-            </a:r>
-            <a:endParaRPr lang="en-US" altLang="en-US" sz="1000">
-              <a:solidFill>
-                <a:schemeClr val="tx1">
-                  <a:lumMod val="75000"/>
-                  <a:lumOff val="25000"/>
-                </a:schemeClr>
-              </a:solidFill>
-            </a:endParaRPr>
-          </a:p>
-          <a:p>
-            <a:endParaRPr lang="en-US" altLang="en-US" sz="1000">
+            <a:endParaRPr lang="en-US" altLang="en-US" sz="1400">
               <a:solidFill>
                 <a:schemeClr val="tx1">
                   <a:lumMod val="75000"/>
@@ -9256,7 +12358,7 @@
               <a:t> </a:t>
             </a:r>
             <a:r>
-              <a:rPr lang="" altLang="en-US" dirty="0"/>
+              <a:rPr lang="en-US" altLang="en-US" dirty="0"/>
               <a:t>«</a:t>
             </a:r>
             <a:r>
@@ -9264,7 +12366,7 @@
               <a:t>висячих</a:t>
             </a:r>
             <a:r>
-              <a:rPr lang="" altLang="en-US" dirty="0"/>
+              <a:rPr lang="en-US" altLang="en-US" dirty="0"/>
               <a:t>»</a:t>
             </a:r>
             <a:r>
@@ -9552,7 +12654,7 @@
               <a:t>: </a:t>
             </a:r>
             <a:r>
-              <a:rPr lang="" altLang="en-US"/>
+              <a:rPr lang="en-US" altLang="en-US"/>
               <a:t>«</a:t>
             </a:r>
             <a:r>
@@ -9560,7 +12662,7 @@
               <a:t>Магазин</a:t>
             </a:r>
             <a:r>
-              <a:rPr lang="" altLang="en-US"/>
+              <a:rPr lang="en-US" altLang="en-US"/>
               <a:t>»</a:t>
             </a:r>
             <a:r>
@@ -9640,7 +12742,7 @@
               <a:t> </a:t>
             </a:r>
             <a:r>
-              <a:rPr lang="" altLang="en-US"/>
+              <a:rPr lang="en-US" altLang="en-US"/>
               <a:t>«</a:t>
             </a:r>
             <a:r>
@@ -9656,7 +12758,7 @@
               <a:t>флота</a:t>
             </a:r>
             <a:r>
-              <a:rPr lang="" altLang="en-US"/>
+              <a:rPr lang="en-US" altLang="en-US"/>
               <a:t>»</a:t>
             </a:r>
             <a:r>
@@ -10852,7 +13954,7 @@
     </a:clrScheme>
     <a:fontScheme name="Ретро">
       <a:majorFont>
-        <a:latin typeface="Calibri Light"/>
+        <a:latin typeface="Times New Roman"/>
         <a:ea typeface=""/>
         <a:cs typeface=""/>
         <a:font script="Jpan" typeface="ＭＳ Ｐゴシック"/>
@@ -10887,7 +13989,7 @@
         <a:font script="Geor" typeface="Sylfaen"/>
       </a:majorFont>
       <a:minorFont>
-        <a:latin typeface="Calibri"/>
+        <a:latin typeface="Times New Roman"/>
         <a:ea typeface=""/>
         <a:cs typeface=""/>
         <a:font script="Jpan" typeface="ＭＳ Ｐゴシック"/>
@@ -11088,4 +14190,522 @@
     </a:ext>
   </a:extLst>
 </a:theme>
+</file>
+
+<file path=ppt/theme/theme2.xml><?xml version="1.0" encoding="utf-8"?>
+<a:theme xmlns:a="http://schemas.openxmlformats.org/drawingml/2006/main" name="Тема Office">
+  <a:themeElements>
+    <a:clrScheme name="Стандартная">
+      <a:dk1>
+        <a:sysClr val="windowText" lastClr="000000"/>
+      </a:dk1>
+      <a:lt1>
+        <a:sysClr val="window" lastClr="FFFFFF"/>
+      </a:lt1>
+      <a:dk2>
+        <a:srgbClr val="44546A"/>
+      </a:dk2>
+      <a:lt2>
+        <a:srgbClr val="E7E6E6"/>
+      </a:lt2>
+      <a:accent1>
+        <a:srgbClr val="5B9BD5"/>
+      </a:accent1>
+      <a:accent2>
+        <a:srgbClr val="ED7D31"/>
+      </a:accent2>
+      <a:accent3>
+        <a:srgbClr val="A5A5A5"/>
+      </a:accent3>
+      <a:accent4>
+        <a:srgbClr val="FFC000"/>
+      </a:accent4>
+      <a:accent5>
+        <a:srgbClr val="4472C4"/>
+      </a:accent5>
+      <a:accent6>
+        <a:srgbClr val="70AD47"/>
+      </a:accent6>
+      <a:hlink>
+        <a:srgbClr val="0563C1"/>
+      </a:hlink>
+      <a:folHlink>
+        <a:srgbClr val="954F72"/>
+      </a:folHlink>
+    </a:clrScheme>
+    <a:fontScheme name="Стандартная">
+      <a:majorFont>
+        <a:latin typeface="Times New Roman"/>
+        <a:ea typeface=""/>
+        <a:cs typeface=""/>
+        <a:font script="Jpan" typeface="游ゴシック Light"/>
+        <a:font script="Hang" typeface="맑은 고딕"/>
+        <a:font script="Hans" typeface="等线 Light"/>
+        <a:font script="Hant" typeface="新細明體"/>
+        <a:font script="Arab" typeface="Times New Roman"/>
+        <a:font script="Hebr" typeface="Times New Roman"/>
+        <a:font script="Thai" typeface="Angsana New"/>
+        <a:font script="Ethi" typeface="Nyala"/>
+        <a:font script="Beng" typeface="Vrinda"/>
+        <a:font script="Gujr" typeface="Shruti"/>
+        <a:font script="Khmr" typeface="MoolBoran"/>
+        <a:font script="Knda" typeface="Tunga"/>
+        <a:font script="Guru" typeface="Raavi"/>
+        <a:font script="Cans" typeface="Euphemia"/>
+        <a:font script="Cher" typeface="Plantagenet Cherokee"/>
+        <a:font script="Yiii" typeface="Microsoft Yi Baiti"/>
+        <a:font script="Tibt" typeface="Microsoft Himalaya"/>
+        <a:font script="Thaa" typeface="MV Boli"/>
+        <a:font script="Deva" typeface="Mangal"/>
+        <a:font script="Telu" typeface="Gautami"/>
+        <a:font script="Taml" typeface="Latha"/>
+        <a:font script="Syrc" typeface="Estrangelo Edessa"/>
+        <a:font script="Orya" typeface="Kalinga"/>
+        <a:font script="Mlym" typeface="Kartika"/>
+        <a:font script="Laoo" typeface="DokChampa"/>
+        <a:font script="Sinh" typeface="Iskoola Pota"/>
+        <a:font script="Mong" typeface="Mongolian Baiti"/>
+        <a:font script="Viet" typeface="Times New Roman"/>
+        <a:font script="Uigh" typeface="Microsoft Uighur"/>
+        <a:font script="Geor" typeface="Sylfaen"/>
+      </a:majorFont>
+      <a:minorFont>
+        <a:latin typeface="Times New Roman"/>
+        <a:ea typeface=""/>
+        <a:cs typeface=""/>
+        <a:font script="Jpan" typeface="游ゴシック"/>
+        <a:font script="Hang" typeface="맑은 고딕"/>
+        <a:font script="Hans" typeface="等线"/>
+        <a:font script="Hant" typeface="新細明體"/>
+        <a:font script="Arab" typeface="Arial"/>
+        <a:font script="Hebr" typeface="Arial"/>
+        <a:font script="Thai" typeface="Cordia New"/>
+        <a:font script="Ethi" typeface="Nyala"/>
+        <a:font script="Beng" typeface="Vrinda"/>
+        <a:font script="Gujr" typeface="Shruti"/>
+        <a:font script="Khmr" typeface="DaunPenh"/>
+        <a:font script="Knda" typeface="Tunga"/>
+        <a:font script="Guru" typeface="Raavi"/>
+        <a:font script="Cans" typeface="Euphemia"/>
+        <a:font script="Cher" typeface="Plantagenet Cherokee"/>
+        <a:font script="Yiii" typeface="Microsoft Yi Baiti"/>
+        <a:font script="Tibt" typeface="Microsoft Himalaya"/>
+        <a:font script="Thaa" typeface="MV Boli"/>
+        <a:font script="Deva" typeface="Mangal"/>
+        <a:font script="Telu" typeface="Gautami"/>
+        <a:font script="Taml" typeface="Latha"/>
+        <a:font script="Syrc" typeface="Estrangelo Edessa"/>
+        <a:font script="Orya" typeface="Kalinga"/>
+        <a:font script="Mlym" typeface="Kartika"/>
+        <a:font script="Laoo" typeface="DokChampa"/>
+        <a:font script="Sinh" typeface="Iskoola Pota"/>
+        <a:font script="Mong" typeface="Mongolian Baiti"/>
+        <a:font script="Viet" typeface="Arial"/>
+        <a:font script="Uigh" typeface="Microsoft Uighur"/>
+        <a:font script="Geor" typeface="Sylfaen"/>
+      </a:minorFont>
+    </a:fontScheme>
+    <a:fmtScheme name="Стандартная">
+      <a:fillStyleLst>
+        <a:solidFill>
+          <a:schemeClr val="phClr"/>
+        </a:solidFill>
+        <a:gradFill rotWithShape="1">
+          <a:gsLst>
+            <a:gs pos="0">
+              <a:schemeClr val="phClr">
+                <a:lumMod val="110000"/>
+                <a:satMod val="105000"/>
+                <a:tint val="67000"/>
+              </a:schemeClr>
+            </a:gs>
+            <a:gs pos="50000">
+              <a:schemeClr val="phClr">
+                <a:lumMod val="105000"/>
+                <a:satMod val="103000"/>
+                <a:tint val="73000"/>
+              </a:schemeClr>
+            </a:gs>
+            <a:gs pos="100000">
+              <a:schemeClr val="phClr">
+                <a:lumMod val="105000"/>
+                <a:satMod val="109000"/>
+                <a:tint val="81000"/>
+              </a:schemeClr>
+            </a:gs>
+          </a:gsLst>
+          <a:lin ang="5400000" scaled="0"/>
+        </a:gradFill>
+        <a:gradFill rotWithShape="1">
+          <a:gsLst>
+            <a:gs pos="0">
+              <a:schemeClr val="phClr">
+                <a:satMod val="103000"/>
+                <a:lumMod val="102000"/>
+                <a:tint val="94000"/>
+              </a:schemeClr>
+            </a:gs>
+            <a:gs pos="50000">
+              <a:schemeClr val="phClr">
+                <a:satMod val="110000"/>
+                <a:lumMod val="100000"/>
+                <a:shade val="100000"/>
+              </a:schemeClr>
+            </a:gs>
+            <a:gs pos="100000">
+              <a:schemeClr val="phClr">
+                <a:lumMod val="99000"/>
+                <a:satMod val="120000"/>
+                <a:shade val="78000"/>
+              </a:schemeClr>
+            </a:gs>
+          </a:gsLst>
+          <a:lin ang="5400000" scaled="0"/>
+        </a:gradFill>
+      </a:fillStyleLst>
+      <a:lnStyleLst>
+        <a:ln w="6350" cap="flat" cmpd="sng" algn="ctr">
+          <a:solidFill>
+            <a:schemeClr val="phClr"/>
+          </a:solidFill>
+          <a:prstDash val="solid"/>
+          <a:miter lim="800000"/>
+        </a:ln>
+        <a:ln w="12700" cap="flat" cmpd="sng" algn="ctr">
+          <a:solidFill>
+            <a:schemeClr val="phClr"/>
+          </a:solidFill>
+          <a:prstDash val="solid"/>
+          <a:miter lim="800000"/>
+        </a:ln>
+        <a:ln w="19050" cap="flat" cmpd="sng" algn="ctr">
+          <a:solidFill>
+            <a:schemeClr val="phClr"/>
+          </a:solidFill>
+          <a:prstDash val="solid"/>
+          <a:miter lim="800000"/>
+        </a:ln>
+      </a:lnStyleLst>
+      <a:effectStyleLst>
+        <a:effectStyle>
+          <a:effectLst/>
+        </a:effectStyle>
+        <a:effectStyle>
+          <a:effectLst/>
+        </a:effectStyle>
+        <a:effectStyle>
+          <a:effectLst>
+            <a:outerShdw blurRad="57150" dist="19050" dir="5400000" algn="ctr" rotWithShape="0">
+              <a:srgbClr val="000000">
+                <a:alpha val="63000"/>
+              </a:srgbClr>
+            </a:outerShdw>
+          </a:effectLst>
+        </a:effectStyle>
+      </a:effectStyleLst>
+      <a:bgFillStyleLst>
+        <a:solidFill>
+          <a:schemeClr val="phClr"/>
+        </a:solidFill>
+        <a:solidFill>
+          <a:schemeClr val="phClr">
+            <a:tint val="95000"/>
+            <a:satMod val="170000"/>
+          </a:schemeClr>
+        </a:solidFill>
+        <a:gradFill rotWithShape="1">
+          <a:gsLst>
+            <a:gs pos="0">
+              <a:schemeClr val="phClr">
+                <a:tint val="93000"/>
+                <a:satMod val="150000"/>
+                <a:shade val="98000"/>
+                <a:lumMod val="102000"/>
+              </a:schemeClr>
+            </a:gs>
+            <a:gs pos="50000">
+              <a:schemeClr val="phClr">
+                <a:tint val="98000"/>
+                <a:satMod val="130000"/>
+                <a:shade val="90000"/>
+                <a:lumMod val="103000"/>
+              </a:schemeClr>
+            </a:gs>
+            <a:gs pos="100000">
+              <a:schemeClr val="phClr">
+                <a:shade val="63000"/>
+                <a:satMod val="120000"/>
+              </a:schemeClr>
+            </a:gs>
+          </a:gsLst>
+          <a:lin ang="5400000" scaled="0"/>
+        </a:gradFill>
+      </a:bgFillStyleLst>
+    </a:fmtScheme>
+  </a:themeElements>
+  <a:extLst>
+    <a:ext uri="{05A4C25C-085E-4340-85A3-A5531E510DB2}">
+      <thm15:themeFamily xmlns:thm15="http://schemas.microsoft.com/office/thememl/2012/main" name="Office Theme" id="{62F939B6-93AF-4DB8-9C6B-D6C7DFDC589F}" vid="{4A3C46E8-61CC-4603-A589-7422A47A8E4A}"/>
+    </a:ext>
+  </a:extLst>
+</a:theme>
+</file>
+
+<file path=ppt/theme/theme3.xml><?xml version="1.0" encoding="utf-8"?>
+<a:theme xmlns:a="http://schemas.openxmlformats.org/drawingml/2006/main" name="Тема Office">
+  <a:themeElements>
+    <a:clrScheme name="Стандартная">
+      <a:dk1>
+        <a:sysClr val="windowText" lastClr="000000"/>
+      </a:dk1>
+      <a:lt1>
+        <a:sysClr val="window" lastClr="FFFFFF"/>
+      </a:lt1>
+      <a:dk2>
+        <a:srgbClr val="44546A"/>
+      </a:dk2>
+      <a:lt2>
+        <a:srgbClr val="E7E6E6"/>
+      </a:lt2>
+      <a:accent1>
+        <a:srgbClr val="5B9BD5"/>
+      </a:accent1>
+      <a:accent2>
+        <a:srgbClr val="ED7D31"/>
+      </a:accent2>
+      <a:accent3>
+        <a:srgbClr val="A5A5A5"/>
+      </a:accent3>
+      <a:accent4>
+        <a:srgbClr val="FFC000"/>
+      </a:accent4>
+      <a:accent5>
+        <a:srgbClr val="4472C4"/>
+      </a:accent5>
+      <a:accent6>
+        <a:srgbClr val="70AD47"/>
+      </a:accent6>
+      <a:hlink>
+        <a:srgbClr val="0563C1"/>
+      </a:hlink>
+      <a:folHlink>
+        <a:srgbClr val="954F72"/>
+      </a:folHlink>
+    </a:clrScheme>
+    <a:fontScheme name="Стандартная">
+      <a:majorFont>
+        <a:latin typeface="Times New Roman"/>
+        <a:ea typeface=""/>
+        <a:cs typeface=""/>
+        <a:font script="Jpan" typeface="游ゴシック Light"/>
+        <a:font script="Hang" typeface="맑은 고딕"/>
+        <a:font script="Hans" typeface="等线 Light"/>
+        <a:font script="Hant" typeface="新細明體"/>
+        <a:font script="Arab" typeface="Times New Roman"/>
+        <a:font script="Hebr" typeface="Times New Roman"/>
+        <a:font script="Thai" typeface="Angsana New"/>
+        <a:font script="Ethi" typeface="Nyala"/>
+        <a:font script="Beng" typeface="Vrinda"/>
+        <a:font script="Gujr" typeface="Shruti"/>
+        <a:font script="Khmr" typeface="MoolBoran"/>
+        <a:font script="Knda" typeface="Tunga"/>
+        <a:font script="Guru" typeface="Raavi"/>
+        <a:font script="Cans" typeface="Euphemia"/>
+        <a:font script="Cher" typeface="Plantagenet Cherokee"/>
+        <a:font script="Yiii" typeface="Microsoft Yi Baiti"/>
+        <a:font script="Tibt" typeface="Microsoft Himalaya"/>
+        <a:font script="Thaa" typeface="MV Boli"/>
+        <a:font script="Deva" typeface="Mangal"/>
+        <a:font script="Telu" typeface="Gautami"/>
+        <a:font script="Taml" typeface="Latha"/>
+        <a:font script="Syrc" typeface="Estrangelo Edessa"/>
+        <a:font script="Orya" typeface="Kalinga"/>
+        <a:font script="Mlym" typeface="Kartika"/>
+        <a:font script="Laoo" typeface="DokChampa"/>
+        <a:font script="Sinh" typeface="Iskoola Pota"/>
+        <a:font script="Mong" typeface="Mongolian Baiti"/>
+        <a:font script="Viet" typeface="Times New Roman"/>
+        <a:font script="Uigh" typeface="Microsoft Uighur"/>
+        <a:font script="Geor" typeface="Sylfaen"/>
+      </a:majorFont>
+      <a:minorFont>
+        <a:latin typeface="Times New Roman"/>
+        <a:ea typeface=""/>
+        <a:cs typeface=""/>
+        <a:font script="Jpan" typeface="游ゴシック"/>
+        <a:font script="Hang" typeface="맑은 고딕"/>
+        <a:font script="Hans" typeface="等线"/>
+        <a:font script="Hant" typeface="新細明體"/>
+        <a:font script="Arab" typeface="Arial"/>
+        <a:font script="Hebr" typeface="Arial"/>
+        <a:font script="Thai" typeface="Cordia New"/>
+        <a:font script="Ethi" typeface="Nyala"/>
+        <a:font script="Beng" typeface="Vrinda"/>
+        <a:font script="Gujr" typeface="Shruti"/>
+        <a:font script="Khmr" typeface="DaunPenh"/>
+        <a:font script="Knda" typeface="Tunga"/>
+        <a:font script="Guru" typeface="Raavi"/>
+        <a:font script="Cans" typeface="Euphemia"/>
+        <a:font script="Cher" typeface="Plantagenet Cherokee"/>
+        <a:font script="Yiii" typeface="Microsoft Yi Baiti"/>
+        <a:font script="Tibt" typeface="Microsoft Himalaya"/>
+        <a:font script="Thaa" typeface="MV Boli"/>
+        <a:font script="Deva" typeface="Mangal"/>
+        <a:font script="Telu" typeface="Gautami"/>
+        <a:font script="Taml" typeface="Latha"/>
+        <a:font script="Syrc" typeface="Estrangelo Edessa"/>
+        <a:font script="Orya" typeface="Kalinga"/>
+        <a:font script="Mlym" typeface="Kartika"/>
+        <a:font script="Laoo" typeface="DokChampa"/>
+        <a:font script="Sinh" typeface="Iskoola Pota"/>
+        <a:font script="Mong" typeface="Mongolian Baiti"/>
+        <a:font script="Viet" typeface="Arial"/>
+        <a:font script="Uigh" typeface="Microsoft Uighur"/>
+        <a:font script="Geor" typeface="Sylfaen"/>
+      </a:minorFont>
+    </a:fontScheme>
+    <a:fmtScheme name="Стандартная">
+      <a:fillStyleLst>
+        <a:solidFill>
+          <a:schemeClr val="phClr"/>
+        </a:solidFill>
+        <a:gradFill rotWithShape="1">
+          <a:gsLst>
+            <a:gs pos="0">
+              <a:schemeClr val="phClr">
+                <a:lumMod val="110000"/>
+                <a:satMod val="105000"/>
+                <a:tint val="67000"/>
+              </a:schemeClr>
+            </a:gs>
+            <a:gs pos="50000">
+              <a:schemeClr val="phClr">
+                <a:lumMod val="105000"/>
+                <a:satMod val="103000"/>
+                <a:tint val="73000"/>
+              </a:schemeClr>
+            </a:gs>
+            <a:gs pos="100000">
+              <a:schemeClr val="phClr">
+                <a:lumMod val="105000"/>
+                <a:satMod val="109000"/>
+                <a:tint val="81000"/>
+              </a:schemeClr>
+            </a:gs>
+          </a:gsLst>
+          <a:lin ang="5400000" scaled="0"/>
+        </a:gradFill>
+        <a:gradFill rotWithShape="1">
+          <a:gsLst>
+            <a:gs pos="0">
+              <a:schemeClr val="phClr">
+                <a:satMod val="103000"/>
+                <a:lumMod val="102000"/>
+                <a:tint val="94000"/>
+              </a:schemeClr>
+            </a:gs>
+            <a:gs pos="50000">
+              <a:schemeClr val="phClr">
+                <a:satMod val="110000"/>
+                <a:lumMod val="100000"/>
+                <a:shade val="100000"/>
+              </a:schemeClr>
+            </a:gs>
+            <a:gs pos="100000">
+              <a:schemeClr val="phClr">
+                <a:lumMod val="99000"/>
+                <a:satMod val="120000"/>
+                <a:shade val="78000"/>
+              </a:schemeClr>
+            </a:gs>
+          </a:gsLst>
+          <a:lin ang="5400000" scaled="0"/>
+        </a:gradFill>
+      </a:fillStyleLst>
+      <a:lnStyleLst>
+        <a:ln w="6350" cap="flat" cmpd="sng" algn="ctr">
+          <a:solidFill>
+            <a:schemeClr val="phClr"/>
+          </a:solidFill>
+          <a:prstDash val="solid"/>
+          <a:miter lim="800000"/>
+        </a:ln>
+        <a:ln w="12700" cap="flat" cmpd="sng" algn="ctr">
+          <a:solidFill>
+            <a:schemeClr val="phClr"/>
+          </a:solidFill>
+          <a:prstDash val="solid"/>
+          <a:miter lim="800000"/>
+        </a:ln>
+        <a:ln w="19050" cap="flat" cmpd="sng" algn="ctr">
+          <a:solidFill>
+            <a:schemeClr val="phClr"/>
+          </a:solidFill>
+          <a:prstDash val="solid"/>
+          <a:miter lim="800000"/>
+        </a:ln>
+      </a:lnStyleLst>
+      <a:effectStyleLst>
+        <a:effectStyle>
+          <a:effectLst/>
+        </a:effectStyle>
+        <a:effectStyle>
+          <a:effectLst/>
+        </a:effectStyle>
+        <a:effectStyle>
+          <a:effectLst>
+            <a:outerShdw blurRad="57150" dist="19050" dir="5400000" algn="ctr" rotWithShape="0">
+              <a:srgbClr val="000000">
+                <a:alpha val="63000"/>
+              </a:srgbClr>
+            </a:outerShdw>
+          </a:effectLst>
+        </a:effectStyle>
+      </a:effectStyleLst>
+      <a:bgFillStyleLst>
+        <a:solidFill>
+          <a:schemeClr val="phClr"/>
+        </a:solidFill>
+        <a:solidFill>
+          <a:schemeClr val="phClr">
+            <a:tint val="95000"/>
+            <a:satMod val="170000"/>
+          </a:schemeClr>
+        </a:solidFill>
+        <a:gradFill rotWithShape="1">
+          <a:gsLst>
+            <a:gs pos="0">
+              <a:schemeClr val="phClr">
+                <a:tint val="93000"/>
+                <a:satMod val="150000"/>
+                <a:shade val="98000"/>
+                <a:lumMod val="102000"/>
+              </a:schemeClr>
+            </a:gs>
+            <a:gs pos="50000">
+              <a:schemeClr val="phClr">
+                <a:tint val="98000"/>
+                <a:satMod val="130000"/>
+                <a:shade val="90000"/>
+                <a:lumMod val="103000"/>
+              </a:schemeClr>
+            </a:gs>
+            <a:gs pos="100000">
+              <a:schemeClr val="phClr">
+                <a:shade val="63000"/>
+                <a:satMod val="120000"/>
+              </a:schemeClr>
+            </a:gs>
+          </a:gsLst>
+          <a:lin ang="5400000" scaled="0"/>
+        </a:gradFill>
+      </a:bgFillStyleLst>
+    </a:fmtScheme>
+  </a:themeElements>
+  <a:extLst>
+    <a:ext uri="{05A4C25C-085E-4340-85A3-A5531E510DB2}">
+      <thm15:themeFamily xmlns:thm15="http://schemas.microsoft.com/office/thememl/2012/main" name="Office Theme" id="{62F939B6-93AF-4DB8-9C6B-D6C7DFDC589F}" vid="{4A3C46E8-61CC-4603-A589-7422A47A8E4A}"/>
+    </a:ext>
+  </a:extLst>
+</a:theme>
 </file>